--- a/temp/kg-schema-design/그래프스키마도출.pptx
+++ b/temp/kg-schema-design/그래프스키마도출.pptx
@@ -4,15 +4,16 @@
   <p:sldMasterIdLst>
     <p:sldMasterId id="2147483648" r:id="rId1"/>
   </p:sldMasterIdLst>
+  <p:notesMasterIdLst>
+    <p:notesMasterId r:id="rId7"/>
+  </p:notesMasterIdLst>
   <p:sldIdLst>
     <p:sldId id="256" r:id="rId2"/>
     <p:sldId id="257" r:id="rId3"/>
     <p:sldId id="258" r:id="rId4"/>
     <p:sldId id="259" r:id="rId5"/>
+    <p:sldId id="260" r:id="rId6"/>
   </p:sldIdLst>
-  <p:notesMasterIdLst>
-    <p:notesMasterId r:id="rId6"/>
-  </p:notesMasterIdLst>
   <p:sldSz cx="14630400" cy="8229600"/>
   <p:notesSz cx="8229600" cy="14630400"/>
   <p:defaultTextStyle>
@@ -107,6 +108,11 @@
       </a:defRPr>
     </a:lvl9pPr>
   </p:defaultTextStyle>
+  <p:extLst>
+    <p:ext uri="{EFAFB233-063F-42B5-8137-9DF3F51BA10A}">
+      <p15:sldGuideLst xmlns:p15="http://schemas.microsoft.com/office/powerpoint/2012/main"/>
+    </p:ext>
+  </p:extLst>
 </p:presentation>
 </file>
 
@@ -132,240 +138,16 @@
           <a:chExt cx="0" cy="0"/>
         </a:xfrm>
       </p:grpSpPr>
-      <p:sp>
-        <p:nvSpPr>
-          <p:cNvPr id="2" name="Header Placeholder 1"/>
-          <p:cNvSpPr>
-            <a:spLocks noGrp="1"/>
-          </p:cNvSpPr>
-          <p:nvPr>
-            <p:ph type="hdr" sz="quarter"/>
-          </p:nvPr>
-        </p:nvSpPr>
-        <p:spPr>
-          <a:xfrm>
-            <a:off x="0" y="0"/>
-            <a:ext cx="2971800" cy="458788"/>
-          </a:xfrm>
-          <a:prstGeom prst="rect">
-            <a:avLst/>
-          </a:prstGeom>
-        </p:spPr>
-        <p:txBody>
-          <a:bodyPr vert="horz" lIns="91440" tIns="45720" rIns="91440" bIns="45720" rtlCol="0"/>
-          <a:lstStyle>
-            <a:lvl1pPr algn="l">
-              <a:defRPr sz="1200"/>
-            </a:lvl1pPr>
-          </a:lstStyle>
-          <a:p>
-            <a:endParaRPr lang="en-US"/>
-          </a:p>
-        </p:txBody>
-      </p:sp>
-      <p:sp>
-        <p:nvSpPr>
-          <p:cNvPr id="3" name="Date Placeholder 2"/>
-          <p:cNvSpPr>
-            <a:spLocks noGrp="1"/>
-          </p:cNvSpPr>
-          <p:nvPr>
-            <p:ph type="dt" idx="1"/>
-          </p:nvPr>
-        </p:nvSpPr>
-        <p:spPr>
-          <a:xfrm>
-            <a:off x="3884613" y="0"/>
-            <a:ext cx="2971800" cy="458788"/>
-          </a:xfrm>
-          <a:prstGeom prst="rect">
-            <a:avLst/>
-          </a:prstGeom>
-        </p:spPr>
-        <p:txBody>
-          <a:bodyPr vert="horz" lIns="91440" tIns="45720" rIns="91440" bIns="45720" rtlCol="0"/>
-          <a:lstStyle>
-            <a:lvl1pPr algn="r">
-              <a:defRPr sz="1200"/>
-            </a:lvl1pPr>
-          </a:lstStyle>
-          <a:p>
-            <a:fld id="{5282F153-3F37-0F45-9E97-73ACFA13230C}" type="datetimeFigureOut">
-              <a:rPr lang="en-US"/>
-              <a:t>7/23/19</a:t>
-            </a:fld>
-            <a:endParaRPr lang="en-US"/>
-          </a:p>
-        </p:txBody>
-      </p:sp>
-      <p:sp>
-        <p:nvSpPr>
-          <p:cNvPr id="4" name="Slide Image Placeholder 3"/>
-          <p:cNvSpPr>
-            <a:spLocks noGrp="1" noRot="1" noChangeAspect="1"/>
-          </p:cNvSpPr>
-          <p:nvPr>
-            <p:ph type="sldImg" idx="2"/>
-          </p:nvPr>
-        </p:nvSpPr>
-        <p:spPr>
-          <a:xfrm>
-            <a:off x="685800" y="1143000"/>
-            <a:ext cx="5486400" cy="3086100"/>
-          </a:xfrm>
-          <a:prstGeom prst="rect">
-            <a:avLst/>
-          </a:prstGeom>
-          <a:noFill/>
-          <a:ln w="12700">
-            <a:solidFill>
-              <a:prstClr val="black"/>
-            </a:solidFill>
-          </a:ln>
-        </p:spPr>
-        <p:txBody>
-          <a:bodyPr vert="horz" lIns="91440" tIns="45720" rIns="91440" bIns="45720" rtlCol="0" anchor="ctr"/>
-          <a:lstStyle/>
-          <a:p>
-            <a:endParaRPr lang="en-US"/>
-          </a:p>
-        </p:txBody>
-      </p:sp>
-      <p:sp>
-        <p:nvSpPr>
-          <p:cNvPr id="5" name="Notes Placeholder 4"/>
-          <p:cNvSpPr>
-            <a:spLocks noGrp="1"/>
-          </p:cNvSpPr>
-          <p:nvPr>
-            <p:ph type="body" sz="quarter" idx="3"/>
-          </p:nvPr>
-        </p:nvSpPr>
-        <p:spPr>
-          <a:xfrm>
-            <a:off x="685800" y="4400550"/>
-            <a:ext cx="5486400" cy="3600450"/>
-          </a:xfrm>
-          <a:prstGeom prst="rect">
-            <a:avLst/>
-          </a:prstGeom>
-        </p:spPr>
-        <p:txBody>
-          <a:bodyPr vert="horz" lIns="91440" tIns="45720" rIns="91440" bIns="45720" rtlCol="0"/>
-          <a:lstStyle/>
-          <a:p>
-            <a:pPr lvl="0"/>
-            <a:r>
-              <a:rPr lang="en-US"/>
-              <a:t>Click to edit Master text styles</a:t>
-            </a:r>
-          </a:p>
-          <a:p>
-            <a:pPr lvl="1"/>
-            <a:r>
-              <a:rPr lang="en-US"/>
-              <a:t>Second level</a:t>
-            </a:r>
-          </a:p>
-          <a:p>
-            <a:pPr lvl="2"/>
-            <a:r>
-              <a:rPr lang="en-US"/>
-              <a:t>Third level</a:t>
-            </a:r>
-          </a:p>
-          <a:p>
-            <a:pPr lvl="3"/>
-            <a:r>
-              <a:rPr lang="en-US"/>
-              <a:t>Fourth level</a:t>
-            </a:r>
-          </a:p>
-          <a:p>
-            <a:pPr lvl="4"/>
-            <a:r>
-              <a:rPr lang="en-US"/>
-              <a:t>Fifth level</a:t>
-            </a:r>
-          </a:p>
-        </p:txBody>
-      </p:sp>
-      <p:sp>
-        <p:nvSpPr>
-          <p:cNvPr id="6" name="Footer Placeholder 5"/>
-          <p:cNvSpPr>
-            <a:spLocks noGrp="1"/>
-          </p:cNvSpPr>
-          <p:nvPr>
-            <p:ph type="ftr" sz="quarter" idx="4"/>
-          </p:nvPr>
-        </p:nvSpPr>
-        <p:spPr>
-          <a:xfrm>
-            <a:off x="0" y="8685213"/>
-            <a:ext cx="2971800" cy="458787"/>
-          </a:xfrm>
-          <a:prstGeom prst="rect">
-            <a:avLst/>
-          </a:prstGeom>
-        </p:spPr>
-        <p:txBody>
-          <a:bodyPr vert="horz" lIns="91440" tIns="45720" rIns="91440" bIns="45720" rtlCol="0" anchor="b"/>
-          <a:lstStyle>
-            <a:lvl1pPr algn="l">
-              <a:defRPr sz="1200"/>
-            </a:lvl1pPr>
-          </a:lstStyle>
-          <a:p>
-            <a:endParaRPr lang="en-US"/>
-          </a:p>
-        </p:txBody>
-      </p:sp>
-      <p:sp>
-        <p:nvSpPr>
-          <p:cNvPr id="7" name="Slide Number Placeholder 6"/>
-          <p:cNvSpPr>
-            <a:spLocks noGrp="1"/>
-          </p:cNvSpPr>
-          <p:nvPr>
-            <p:ph type="sldNum" sz="quarter" idx="5"/>
-          </p:nvPr>
-        </p:nvSpPr>
-        <p:spPr>
-          <a:xfrm>
-            <a:off x="3884613" y="8685213"/>
-            <a:ext cx="2971800" cy="458787"/>
-          </a:xfrm>
-          <a:prstGeom prst="rect">
-            <a:avLst/>
-          </a:prstGeom>
-        </p:spPr>
-        <p:txBody>
-          <a:bodyPr vert="horz" lIns="91440" tIns="45720" rIns="91440" bIns="45720" rtlCol="0" anchor="b"/>
-          <a:lstStyle>
-            <a:lvl1pPr algn="r">
-              <a:defRPr sz="1200"/>
-            </a:lvl1pPr>
-          </a:lstStyle>
-          <a:p>
-            <a:fld id="{CE5E9CC1-C706-0F49-92D6-E571CC5EEA8F}" type="slidenum">
-              <a:rPr lang="en-US"/>
-              <a:t>‹#›</a:t>
-            </a:fld>
-            <a:endParaRPr lang="en-US"/>
-          </a:p>
-        </p:txBody>
-      </p:sp>
     </p:spTree>
     <p:extLst>
       <p:ext uri="{BB962C8B-B14F-4D97-AF65-F5344CB8AC3E}">
-        <p14:creationId xmlns:p14="http://schemas.microsoft.com/office/powerpoint/2010/main" val="1024086991"/>
+        <p14:creationId xmlns:p14="http://schemas.microsoft.com/office/powerpoint/2010/main" val="1271427443"/>
       </p:ext>
     </p:extLst>
   </p:cSld>
   <p:clrMap bg1="lt1" tx1="dk1" bg2="lt2" tx2="dk2" accent1="accent1" accent2="accent2" accent3="accent3" accent4="accent4" accent5="accent5" accent6="accent6" hlink="hlink" folHlink="folHlink"/>
   <p:notesStyle>
-    <a:lvl1pPr marL="0" algn="l" defTabSz="914400" rtl="0" eaLnBrk="1" latinLnBrk="0" hangingPunct="1">
+    <a:lvl1pPr marL="0" algn="l" defTabSz="914400" rtl="0" eaLnBrk="1" latinLnBrk="1" hangingPunct="1">
       <a:defRPr sz="1200" kern="1200">
         <a:solidFill>
           <a:schemeClr val="tx1"/>
@@ -375,7 +157,7 @@
         <a:cs typeface="+mn-cs"/>
       </a:defRPr>
     </a:lvl1pPr>
-    <a:lvl2pPr marL="457200" algn="l" defTabSz="914400" rtl="0" eaLnBrk="1" latinLnBrk="0" hangingPunct="1">
+    <a:lvl2pPr marL="457200" algn="l" defTabSz="914400" rtl="0" eaLnBrk="1" latinLnBrk="1" hangingPunct="1">
       <a:defRPr sz="1200" kern="1200">
         <a:solidFill>
           <a:schemeClr val="tx1"/>
@@ -385,7 +167,7 @@
         <a:cs typeface="+mn-cs"/>
       </a:defRPr>
     </a:lvl2pPr>
-    <a:lvl3pPr marL="914400" algn="l" defTabSz="914400" rtl="0" eaLnBrk="1" latinLnBrk="0" hangingPunct="1">
+    <a:lvl3pPr marL="914400" algn="l" defTabSz="914400" rtl="0" eaLnBrk="1" latinLnBrk="1" hangingPunct="1">
       <a:defRPr sz="1200" kern="1200">
         <a:solidFill>
           <a:schemeClr val="tx1"/>
@@ -395,7 +177,7 @@
         <a:cs typeface="+mn-cs"/>
       </a:defRPr>
     </a:lvl3pPr>
-    <a:lvl4pPr marL="1371600" algn="l" defTabSz="914400" rtl="0" eaLnBrk="1" latinLnBrk="0" hangingPunct="1">
+    <a:lvl4pPr marL="1371600" algn="l" defTabSz="914400" rtl="0" eaLnBrk="1" latinLnBrk="1" hangingPunct="1">
       <a:defRPr sz="1200" kern="1200">
         <a:solidFill>
           <a:schemeClr val="tx1"/>
@@ -405,7 +187,7 @@
         <a:cs typeface="+mn-cs"/>
       </a:defRPr>
     </a:lvl4pPr>
-    <a:lvl5pPr marL="1828800" algn="l" defTabSz="914400" rtl="0" eaLnBrk="1" latinLnBrk="0" hangingPunct="1">
+    <a:lvl5pPr marL="1828800" algn="l" defTabSz="914400" rtl="0" eaLnBrk="1" latinLnBrk="1" hangingPunct="1">
       <a:defRPr sz="1200" kern="1200">
         <a:solidFill>
           <a:schemeClr val="tx1"/>
@@ -415,7 +197,7 @@
         <a:cs typeface="+mn-cs"/>
       </a:defRPr>
     </a:lvl5pPr>
-    <a:lvl6pPr marL="2286000" algn="l" defTabSz="914400" rtl="0" eaLnBrk="1" latinLnBrk="0" hangingPunct="1">
+    <a:lvl6pPr marL="2286000" algn="l" defTabSz="914400" rtl="0" eaLnBrk="1" latinLnBrk="1" hangingPunct="1">
       <a:defRPr sz="1200" kern="1200">
         <a:solidFill>
           <a:schemeClr val="tx1"/>
@@ -425,7 +207,7 @@
         <a:cs typeface="+mn-cs"/>
       </a:defRPr>
     </a:lvl6pPr>
-    <a:lvl7pPr marL="2743200" algn="l" defTabSz="914400" rtl="0" eaLnBrk="1" latinLnBrk="0" hangingPunct="1">
+    <a:lvl7pPr marL="2743200" algn="l" defTabSz="914400" rtl="0" eaLnBrk="1" latinLnBrk="1" hangingPunct="1">
       <a:defRPr sz="1200" kern="1200">
         <a:solidFill>
           <a:schemeClr val="tx1"/>
@@ -435,7 +217,7 @@
         <a:cs typeface="+mn-cs"/>
       </a:defRPr>
     </a:lvl7pPr>
-    <a:lvl8pPr marL="3200400" algn="l" defTabSz="914400" rtl="0" eaLnBrk="1" latinLnBrk="0" hangingPunct="1">
+    <a:lvl8pPr marL="3200400" algn="l" defTabSz="914400" rtl="0" eaLnBrk="1" latinLnBrk="1" hangingPunct="1">
       <a:defRPr sz="1200" kern="1200">
         <a:solidFill>
           <a:schemeClr val="tx1"/>
@@ -445,7 +227,7 @@
         <a:cs typeface="+mn-cs"/>
       </a:defRPr>
     </a:lvl8pPr>
-    <a:lvl9pPr marL="3657600" algn="l" defTabSz="914400" rtl="0" eaLnBrk="1" latinLnBrk="0" hangingPunct="1">
+    <a:lvl9pPr marL="3657600" algn="l" defTabSz="914400" rtl="0" eaLnBrk="1" latinLnBrk="1" hangingPunct="1">
       <a:defRPr sz="1200" kern="1200">
         <a:solidFill>
           <a:schemeClr val="tx1"/>
@@ -507,7 +289,6 @@
               <a:rPr lang="en-US" dirty="0"/>
               <a:t>스키마 도출은 인덱싱 파이프라인의 단계가 아니라 설계 단계의 일임. 사람이 후보를 줄이고 이름을 정해 확정하므로 매 실행 자동으로 돌리지 않음. 확정한 GraphSchema를 파일로 두고 버전을 관리하며, 인덱싱은 그 파일을 읽어 ④ 추출의 프롬프트 안내와 가지치기에 씀. 스키마가 바뀌면 새 세대로 다시 인덱싱함. 인덱싱 줄의 KG 저장과 병합은 다른 단계임: Native는 저장기(Neo4jWriter)가 먼저 쓰고 병합기(resolver)가 DB 안에서 같은 이름 노드를 합침(SimpleKGPipeline 연결 순서 writer → resolver). 임베딩은 합쳐진 노드 설명을 벡터로 바꾸는 단계라 병합 다음에 둠. 청크 벡터는 기존 벡터DB 인덱싱의 벡터를 KG 저장 때 함께 넣어 다시 만들지 않음. 같은 카드가 어떤 청크에선 Brand, 어떤 청크에선 CardProduct로 뽑히면 병합 단계에서도 못 합침(라벨이 달라서). 실측: 로컬 gemma-4 12B로 스키마 없이 청크 2개를 추출했더니 라벨이 11종 나왔고, 카드는 Brand와 CardProduct, 요금은 Fee와 AnnualFee로 갈렸음. Native neo4j-graphrag는 스키마를 안 주면 SimpleKGPipeline이 매번 입력 글에서 스키마를 자동으로 뽑아 쓰므로(사람 검토 없음) 실행마다 달라질 수 있음 — 그래서 설계 단계에서 고정함.</a:t>
             </a:r>
-            <a:endParaRPr lang="en-US" dirty="0"/>
           </a:p>
         </p:txBody>
       </p:sp>
@@ -595,7 +376,6 @@
               <a:rPr lang="en-US" dirty="0"/>
               <a:t>①~⑤가 뼈대임: 노드 타입, 노드 속성, 관계, 관계 속성, 그리고 어느 노드에서 어느 노드로 그 관계가 갈 수 있는지를 정하는 연결 패턴. ⑥ 제약은 고유키와 필수 속성이며 UNIQUENESS, EXISTENCE, KEY 세 종류가 있음. KEY는 필수이면서 고유함. ⑦ 허용 범위는 목록 밖의 타입, 패턴, 속성을 지울지 통과시킬지이며, 목록을 주면 기본은 지움. 실행 확인(neo4j-graphrag 1.22.0): 이 코드로 만든 스키마로 가지치기를 돌리니 name이 없는 Card 노드가 MISSING_REQUIRED_PROPERTY로 지워졌음. 타입과 속성마다 description을 적으면 추출 프롬프트에 들어가 LLM이 고르는 기준이 됨. 속성의 type(STRING, INTEGER 등)은 적을 수 있지만 지금 버전의 가지치기는 값 형식을 검사하지 않으므로 금액과 날짜는 저장 전에 따로 변환함. 최대 홉 수, 결과 상한, 상충 관계 쌍은 검색과 검수에 쓰는 규칙이라 추출용 스키마에는 넣지 않음.</a:t>
             </a:r>
-            <a:endParaRPr lang="en-US" dirty="0"/>
           </a:p>
         </p:txBody>
       </p:sp>
@@ -683,7 +463,6 @@
               <a:rPr lang="en-US" dirty="0"/>
               <a:t>Neo4j 공식 관계형 → 그래프 변환 규칙과 같음: 테이블은 라벨, 행은 노드, 열은 속성, FK는 관계로 바꾸고 FK 열은 지움, 조인 테이블은 관계로 바꾸고 그 열은 관계 속성. 관계는 양 끝이 둘뿐이라 셋 이상을 묶으면 중간 노드로 풂. 판정 결과는 4가지이고 오른쪽 예시가 같은 번호임. ① 조회 대상이면 노드 타입: 이체는 FK가 2개지만 이체 자체를 찾으므로 노드. ② FK가 2개이고 업무 열이 없으면 관계로 흡수: 사용자역할 테이블은 사용자와 역할을 잇기만 하므로 노드를 만들지 않음. ③ FK 2개 + 업무 속성이면 관계 속성: 주문상품의 수량과 단가는 '포함' 관계의 속성. 상품별 판매 집계처럼 그 속성을 조회하거나 집계하면 노드로 둠. ④ FK 3개 이상이면 중간 노드: 수강신청은 학생, 과목, 학기를 함께 묶어 관계 하나로 못 담음. 조회 대상 질문을 먼저 하는 이유는 ① 이체 예: FK 개수만 보면 관계로 흡수되어 이체 자체를 찾을 수 없게 됨. 정형에서 나온 타입은 LLM 추출이 필요 없어 비용이 들지 않으므로 정형을 먼저 훑는 것이 이득임.</a:t>
             </a:r>
-            <a:endParaRPr lang="en-US" dirty="0"/>
           </a:p>
         </p:txBody>
       </p:sp>
@@ -769,9 +548,8 @@
           <a:p>
             <a:r>
               <a:rPr lang="en-US" dirty="0"/>
-              <a:t>자동 추출 결과는 표본에 있는 것만 담는 후보임. 사람이 3단계로 줄이고 이름을 정한 뒤 GraphSchema로 고정해야 매 실행 결과가 같아짐. Native는 SchemaFromTextExtractor로 표본 글에서 후보 스키마를 받을 수 있고, 확정본을 schema로 넘기지 않으면 SimpleKGPipeline이 매번 자동 추출함. Neo4j LLM Knowledge Graph Builder는 'Get Schema From Text'로 스키마를 제안하고, MS GraphRAG는 graphrag prompt-tune의 --discover-entity-types(기본 켜짐)로 표본 청크에서 엔티티 타입을 만들어 프롬프트 파일로 저장함. LangChain과 LlamaIndex는 자동 후보 단계 없이 사람이 허용 목록을 먼저 적음. 3단계 확정은 온톨로지 공학의 용어 정리, 역량 질문(답해야 할 질문이 범위를 정함)과 같은 생각이며, 3단계(원천 없는 타입 제외)는 적재를 전제한 가이드 고유 규칙임. 확정 뒤 역량 질문으로 되짚는 검증은 가이드에 없는 보완점임.</a:t>
-            </a:r>
-            <a:endParaRPr lang="en-US" dirty="0"/>
+              <a:t>앞 장의 변환 규칙은 대부분 기계적으로 적용할 수 있어서, 규칙을 프롬프트에 적어 바이브 코딩 도구에 맡김. 규칙 ②③④와 검증, 그림, 저장은 AI가 하고, 업무 판단이 필요한 규칙 ①과 이름, 최종 승인은 사람이 함. DB 카탈로그는 DB가 원래 갖고 있는 구조 설명 테이블이라 따로 만들 필요가 없음(PostgreSQL은 pg_catalog). FK 개수는 열이 아니라 제약 수로 셈: card의 product_id와 brand는 열 2개지만 FK 제약 1개임. 라벨은 Neo4j 이름 규칙에 따라 영문(Card, HAS_CARD)으로 두고, 한글 이름은 description에 넣어 그림과 LLM 안내에 씀. 한글 라벨도 동작은 하지만(실행 확인), 영문 속성 이름과 섞이지 않게 하려고 영문으로 정함. 8단계에서 수정을 요청하면 5단계부터 다시 하며, 5회가 넘으면 남은 쟁점을 정리해 멈춤. 최종 파일은 GraphSchema.save()로 저장한 뒤 from_file()로 다시 읽어 개수가 같은지 확인하고, 승인 기록을 함께 남김.</a:t>
+            </a:r>
           </a:p>
         </p:txBody>
       </p:sp>
@@ -793,6 +571,93 @@
             <a:fld id="{F7021451-1387-4CA6-816F-3879F97B5CBC}" type="slidenum">
               <a:rPr lang="en-US"/>
               <a:t>4</a:t>
+            </a:fld>
+            <a:endParaRPr lang="en-US"/>
+          </a:p>
+        </p:txBody>
+      </p:sp>
+    </p:spTree>
+    <p:extLst>
+      <p:ext uri="{BB962C8B-B14F-4D97-AF65-F5344CB8AC3E}">
+        <p14:creationId xmlns:p14="http://schemas.microsoft.com/office/powerpoint/2010/main" val="1024086991"/>
+      </p:ext>
+    </p:extLst>
+  </p:cSld>
+  <p:clrMapOvr>
+    <a:masterClrMapping/>
+  </p:clrMapOvr>
+</p:notes>
+</file>
+
+<file path=ppt/notesSlides/notesSlide5.xml><?xml version="1.0" encoding="utf-8"?>
+<p:notes xmlns:a="http://schemas.openxmlformats.org/drawingml/2006/main" xmlns:r="http://schemas.openxmlformats.org/officeDocument/2006/relationships" xmlns:p="http://schemas.openxmlformats.org/presentationml/2006/main">
+  <p:cSld>
+    <p:spTree>
+      <p:nvGrpSpPr>
+        <p:cNvPr id="1" name=""/>
+        <p:cNvGrpSpPr/>
+        <p:nvPr/>
+      </p:nvGrpSpPr>
+      <p:grpSpPr>
+        <a:xfrm>
+          <a:off x="0" y="0"/>
+          <a:ext cx="0" cy="0"/>
+          <a:chOff x="0" y="0"/>
+          <a:chExt cx="0" cy="0"/>
+        </a:xfrm>
+      </p:grpSpPr>
+      <p:sp>
+        <p:nvSpPr>
+          <p:cNvPr id="2" name="Slide Image Placeholder 1"/>
+          <p:cNvSpPr>
+            <a:spLocks noGrp="1" noRot="1" noChangeAspect="1"/>
+          </p:cNvSpPr>
+          <p:nvPr>
+            <p:ph type="sldImg"/>
+          </p:nvPr>
+        </p:nvSpPr>
+        <p:spPr/>
+      </p:sp>
+      <p:sp>
+        <p:nvSpPr>
+          <p:cNvPr id="3" name="Notes Placeholder 2"/>
+          <p:cNvSpPr>
+            <a:spLocks noGrp="1"/>
+          </p:cNvSpPr>
+          <p:nvPr>
+            <p:ph type="body" idx="1"/>
+          </p:nvPr>
+        </p:nvSpPr>
+        <p:spPr/>
+        <p:txBody>
+          <a:bodyPr/>
+          <a:lstStyle/>
+          <a:p>
+            <a:r>
+              <a:rPr lang="en-US" dirty="0"/>
+              <a:t>자동 추출 결과는 표본에 있는 것만 담는 후보임. 사람이 3단계로 줄이고 이름을 정한 뒤 GraphSchema로 고정해야 매 실행 결과가 같아짐. Native는 SchemaFromTextExtractor로 표본 글에서 후보 스키마를 받을 수 있고, 확정본을 schema로 넘기지 않으면 SimpleKGPipeline이 매번 자동 추출함. Neo4j LLM Knowledge Graph Builder는 'Get Schema From Text'로 스키마를 제안하고, MS GraphRAG는 graphrag prompt-tune의 --discover-entity-types(기본 켜짐)로 표본 청크에서 엔티티 타입을 만들어 프롬프트 파일로 저장함. LangChain과 LlamaIndex는 자동 후보 단계 없이 사람이 허용 목록을 먼저 적음. 3단계 확정은 온톨로지 공학의 용어 정리, 역량 질문(답해야 할 질문이 범위를 정함)과 같은 생각이며, 3단계(원천 없는 타입 제외)는 적재를 전제한 가이드 고유 규칙임. 확정 뒤 역량 질문으로 되짚는 검증은 가이드에 없는 보완점임.</a:t>
+            </a:r>
+          </a:p>
+        </p:txBody>
+      </p:sp>
+      <p:sp>
+        <p:nvSpPr>
+          <p:cNvPr id="4" name="Slide Number Placeholder 3"/>
+          <p:cNvSpPr>
+            <a:spLocks noGrp="1"/>
+          </p:cNvSpPr>
+          <p:nvPr>
+            <p:ph type="sldNum" sz="quarter" idx="10"/>
+          </p:nvPr>
+        </p:nvSpPr>
+        <p:spPr/>
+        <p:txBody>
+          <a:bodyPr/>
+          <a:lstStyle/>
+          <a:p>
+            <a:fld id="{F7021451-1387-4CA6-816F-3879F97B5CBC}" type="slidenum">
+              <a:rPr lang="en-US"/>
+              <a:t>5</a:t>
             </a:fld>
             <a:endParaRPr lang="en-US"/>
           </a:p>
@@ -849,6 +714,7 @@
         <a:solidFill>
           <a:srgbClr val="FFFFFF"/>
         </a:solidFill>
+        <a:effectLst/>
       </p:bgPr>
     </p:bg>
     <p:spTree>
@@ -887,6 +753,13 @@
             <a:prstDash val="solid"/>
           </a:ln>
         </p:spPr>
+        <p:txBody>
+          <a:bodyPr/>
+          <a:lstStyle/>
+          <a:p>
+            <a:endParaRPr lang="ko-KR" altLang="en-US"/>
+          </a:p>
+        </p:txBody>
       </p:sp>
       <p:sp>
         <p:nvSpPr>
@@ -909,7 +782,7 @@
           <a:bodyPr wrap="square" lIns="0" tIns="0" rIns="0" bIns="0" rtlCol="0" anchor="ctr"/>
           <a:lstStyle/>
           <a:p>
-            <a:pPr indent="0" marL="0">
+            <a:pPr marL="0" indent="0">
               <a:buNone/>
             </a:pPr>
             <a:r>
@@ -930,7 +803,9 @@
       <p:sp>
         <p:nvSpPr>
           <p:cNvPr id="4" name="Text 2"/>
-          <p:cNvSpPr/>
+          <p:cNvSpPr>
+            <a:spLocks noGrp="1"/>
+          </p:cNvSpPr>
           <p:nvPr>
             <p:ph type="title"/>
           </p:nvPr>
@@ -949,7 +824,7 @@
         <p:txBody>
           <a:bodyPr wrap="square" rtlCol="0"/>
           <a:lstStyle>
-            <a:lvl1pPr algn="l" indent="0" marL="0">
+            <a:lvl1pPr marL="0" indent="0" algn="l">
               <a:buNone/>
               <a:defRPr lang="en-US" sz="3200" b="1" dirty="0">
                 <a:solidFill>
@@ -962,7 +837,7 @@
             </a:lvl1pPr>
           </a:lstStyle>
           <a:p>
-            <a:pPr algn="l" indent="0" marL="0">
+            <a:pPr marL="0" indent="0" algn="l">
               <a:buNone/>
             </a:pPr>
             <a:endParaRPr lang="en-US" sz="3200" dirty="0"/>
@@ -989,7 +864,7 @@
           </a:prstGeom>
           <a:extLst>
             <a:ext uri="{C572A759-6A51-4108-AA02-DFA0A04FC94B}">
-              <ma14:wrappingTextBoxFlag xmlns:ma14="http://schemas.microsoft.com/office/mac/drawingml/2011/main" val="0"/>
+              <ma14:wrappingTextBoxFlag xmlns="" xmlns:ma14="http://schemas.microsoft.com/office/mac/drawingml/2011/main" val="0"/>
             </a:ext>
           </a:extLst>
         </p:spPr>
@@ -1010,8 +885,8 @@
           <a:p>
             <a:pPr algn="r"/>
             <a:fld id="{F7021451-1387-4CA6-816F-3879F97B5CBC}" type="slidenum">
-              <a:rPr b="0" lang="en-US"/>
-              <a:t>1002</a:t>
+              <a:rPr lang="en-US" b="0"/>
+              <a:t>‹#›</a:t>
             </a:fld>
             <a:endParaRPr lang="en-US"/>
           </a:p>
@@ -1028,6 +903,11 @@
 <file path=ppt/slideMasters/slideMaster1.xml><?xml version="1.0" encoding="utf-8"?>
 <p:sldMaster xmlns:a="http://schemas.openxmlformats.org/drawingml/2006/main" xmlns:r="http://schemas.openxmlformats.org/officeDocument/2006/relationships" xmlns:p="http://schemas.openxmlformats.org/presentationml/2006/main">
   <p:cSld>
+    <p:bg>
+      <p:bgRef idx="1001">
+        <a:schemeClr val="bg1"/>
+      </p:bgRef>
+    </p:bg>
     <p:spTree>
       <p:nvGrpSpPr>
         <p:cNvPr id="1" name=""/>
@@ -1062,7 +942,7 @@
           </a:prstGeom>
           <a:extLst>
             <a:ext uri="{C572A759-6A51-4108-AA02-DFA0A04FC94B}">
-              <ma14:wrappingTextBoxFlag xmlns:ma14="http://schemas.microsoft.com/office/mac/drawingml/2011/main" val="0"/>
+              <ma14:wrappingTextBoxFlag xmlns="" xmlns:ma14="http://schemas.microsoft.com/office/mac/drawingml/2011/main" val="0"/>
             </a:ext>
           </a:extLst>
         </p:spPr>
@@ -1083,8 +963,8 @@
           <a:p>
             <a:pPr algn="r"/>
             <a:fld id="{F7021451-1387-4CA6-816F-3879F97B5CBC}" type="slidenum">
-              <a:rPr b="0" lang="en-US"/>
-              <a:t>null</a:t>
+              <a:rPr lang="en-US" b="0"/>
+              <a:t>‹#›</a:t>
             </a:fld>
             <a:endParaRPr lang="en-US"/>
           </a:p>
@@ -1371,7 +1251,9 @@
       <p:sp>
         <p:nvSpPr>
           <p:cNvPr id="2" name="Text 2"/>
-          <p:cNvSpPr/>
+          <p:cNvSpPr>
+            <a:spLocks noGrp="1"/>
+          </p:cNvSpPr>
           <p:nvPr>
             <p:ph type="title"/>
           </p:nvPr>
@@ -1391,7 +1273,7 @@
           <a:bodyPr wrap="square" lIns="0" tIns="0" rIns="0" bIns="0" rtlCol="0" anchor="ctr"/>
           <a:lstStyle/>
           <a:p>
-            <a:pPr algn="l" indent="0" marL="0">
+            <a:pPr marL="0" indent="0" algn="l">
               <a:buNone/>
             </a:pPr>
             <a:r>
@@ -1430,7 +1312,7 @@
           <a:bodyPr wrap="square" lIns="0" tIns="0" rIns="0" bIns="0" rtlCol="0" anchor="ctr"/>
           <a:lstStyle/>
           <a:p>
-            <a:pPr indent="0" marL="0">
+            <a:pPr marL="0" indent="0">
               <a:buNone/>
             </a:pPr>
             <a:r>
@@ -1469,6 +1351,13 @@
           </a:solidFill>
           <a:ln/>
         </p:spPr>
+        <p:txBody>
+          <a:bodyPr/>
+          <a:lstStyle/>
+          <a:p>
+            <a:endParaRPr lang="ko-KR" altLang="en-US"/>
+          </a:p>
+        </p:txBody>
       </p:sp>
       <p:sp>
         <p:nvSpPr>
@@ -1491,7 +1380,7 @@
           <a:bodyPr wrap="square" lIns="1016" tIns="1016" rIns="1016" bIns="1016" rtlCol="0" anchor="ctr"/>
           <a:lstStyle/>
           <a:p>
-            <a:pPr algn="ctr" indent="0" marL="0">
+            <a:pPr marL="0" indent="0" algn="ctr">
               <a:buNone/>
             </a:pPr>
             <a:r>
@@ -1530,6 +1419,13 @@
           </a:solidFill>
           <a:ln/>
         </p:spPr>
+        <p:txBody>
+          <a:bodyPr/>
+          <a:lstStyle/>
+          <a:p>
+            <a:endParaRPr lang="ko-KR" altLang="en-US"/>
+          </a:p>
+        </p:txBody>
       </p:sp>
       <p:sp>
         <p:nvSpPr>
@@ -1552,7 +1448,7 @@
           <a:bodyPr wrap="square" lIns="1016" tIns="1016" rIns="1016" bIns="1016" rtlCol="0" anchor="ctr"/>
           <a:lstStyle/>
           <a:p>
-            <a:pPr algn="ctr" indent="0" marL="0">
+            <a:pPr marL="0" indent="0" algn="ctr">
               <a:buNone/>
             </a:pPr>
             <a:r>
@@ -1596,6 +1492,13 @@
             <a:prstDash val="solid"/>
           </a:ln>
         </p:spPr>
+        <p:txBody>
+          <a:bodyPr/>
+          <a:lstStyle/>
+          <a:p>
+            <a:endParaRPr lang="ko-KR" altLang="en-US"/>
+          </a:p>
+        </p:txBody>
       </p:sp>
       <p:sp>
         <p:nvSpPr>
@@ -1618,7 +1521,7 @@
           <a:bodyPr wrap="square" lIns="1016" tIns="1016" rIns="1016" bIns="1016" rtlCol="0" anchor="ctr"/>
           <a:lstStyle/>
           <a:p>
-            <a:pPr algn="ctr" indent="0" marL="0">
+            <a:pPr marL="0" indent="0" algn="ctr">
               <a:buNone/>
             </a:pPr>
             <a:r>
@@ -1659,6 +1562,13 @@
             <a:tailEnd type="triangle"/>
           </a:ln>
         </p:spPr>
+        <p:txBody>
+          <a:bodyPr/>
+          <a:lstStyle/>
+          <a:p>
+            <a:endParaRPr lang="ko-KR" altLang="en-US"/>
+          </a:p>
+        </p:txBody>
       </p:sp>
       <p:sp>
         <p:nvSpPr>
@@ -1686,6 +1596,13 @@
             <a:prstDash val="solid"/>
           </a:ln>
         </p:spPr>
+        <p:txBody>
+          <a:bodyPr/>
+          <a:lstStyle/>
+          <a:p>
+            <a:endParaRPr lang="ko-KR" altLang="en-US"/>
+          </a:p>
+        </p:txBody>
       </p:sp>
       <p:sp>
         <p:nvSpPr>
@@ -1708,7 +1625,7 @@
           <a:bodyPr wrap="square" lIns="1016" tIns="1016" rIns="1016" bIns="1016" rtlCol="0" anchor="ctr"/>
           <a:lstStyle/>
           <a:p>
-            <a:pPr algn="ctr" indent="0" marL="0">
+            <a:pPr marL="0" indent="0" algn="ctr">
               <a:buNone/>
             </a:pPr>
             <a:r>
@@ -1749,6 +1666,13 @@
             <a:tailEnd type="triangle"/>
           </a:ln>
         </p:spPr>
+        <p:txBody>
+          <a:bodyPr/>
+          <a:lstStyle/>
+          <a:p>
+            <a:endParaRPr lang="ko-KR" altLang="en-US"/>
+          </a:p>
+        </p:txBody>
       </p:sp>
       <p:sp>
         <p:nvSpPr>
@@ -1771,6 +1695,13 @@
           </a:solidFill>
           <a:ln/>
         </p:spPr>
+        <p:txBody>
+          <a:bodyPr/>
+          <a:lstStyle/>
+          <a:p>
+            <a:endParaRPr lang="ko-KR" altLang="en-US"/>
+          </a:p>
+        </p:txBody>
       </p:sp>
       <p:sp>
         <p:nvSpPr>
@@ -1793,7 +1724,7 @@
           <a:bodyPr wrap="square" lIns="1016" tIns="1016" rIns="1016" bIns="1016" rtlCol="0" anchor="ctr"/>
           <a:lstStyle/>
           <a:p>
-            <a:pPr algn="ctr" indent="0" marL="0">
+            <a:pPr marL="0" indent="0" algn="ctr">
               <a:buNone/>
             </a:pPr>
             <a:r>
@@ -1810,7 +1741,7 @@
             <a:endParaRPr lang="en-US" sz="1400" dirty="0"/>
           </a:p>
           <a:p>
-            <a:pPr algn="ctr" indent="0" marL="0">
+            <a:pPr marL="0" indent="0" algn="ctr">
               <a:buNone/>
             </a:pPr>
             <a:r>
@@ -1851,6 +1782,13 @@
             <a:tailEnd type="triangle"/>
           </a:ln>
         </p:spPr>
+        <p:txBody>
+          <a:bodyPr/>
+          <a:lstStyle/>
+          <a:p>
+            <a:endParaRPr lang="ko-KR" altLang="en-US"/>
+          </a:p>
+        </p:txBody>
       </p:sp>
       <p:sp>
         <p:nvSpPr>
@@ -1878,6 +1816,13 @@
             <a:prstDash val="solid"/>
           </a:ln>
         </p:spPr>
+        <p:txBody>
+          <a:bodyPr/>
+          <a:lstStyle/>
+          <a:p>
+            <a:endParaRPr lang="ko-KR" altLang="en-US"/>
+          </a:p>
+        </p:txBody>
       </p:sp>
       <p:sp>
         <p:nvSpPr>
@@ -1900,7 +1845,7 @@
           <a:bodyPr wrap="square" lIns="1016" tIns="1016" rIns="1016" bIns="1016" rtlCol="0" anchor="ctr"/>
           <a:lstStyle/>
           <a:p>
-            <a:pPr algn="ctr" indent="0" marL="0">
+            <a:pPr marL="0" indent="0" algn="ctr">
               <a:buNone/>
             </a:pPr>
             <a:r>
@@ -1917,7 +1862,7 @@
             <a:endParaRPr lang="en-US" sz="1400" dirty="0"/>
           </a:p>
           <a:p>
-            <a:pPr algn="ctr" indent="0" marL="0">
+            <a:pPr marL="0" indent="0" algn="ctr">
               <a:buNone/>
             </a:pPr>
             <a:r>
@@ -1956,7 +1901,7 @@
           <a:bodyPr wrap="square" lIns="0" tIns="0" rIns="0" bIns="0" rtlCol="0" anchor="ctr"/>
           <a:lstStyle/>
           <a:p>
-            <a:pPr algn="l" indent="0" marL="0">
+            <a:pPr marL="0" indent="0" algn="l">
               <a:buNone/>
             </a:pPr>
             <a:r>
@@ -1973,7 +1918,7 @@
             <a:endParaRPr lang="en-US" sz="1400" dirty="0"/>
           </a:p>
           <a:p>
-            <a:pPr algn="l" indent="0" marL="0">
+            <a:pPr marL="0" indent="0" algn="l">
               <a:buNone/>
             </a:pPr>
             <a:r>
@@ -2017,6 +1962,13 @@
             <a:prstDash val="solid"/>
           </a:ln>
         </p:spPr>
+        <p:txBody>
+          <a:bodyPr/>
+          <a:lstStyle/>
+          <a:p>
+            <a:endParaRPr lang="ko-KR" altLang="en-US"/>
+          </a:p>
+        </p:txBody>
       </p:sp>
       <p:sp>
         <p:nvSpPr>
@@ -2039,7 +1991,7 @@
           <a:bodyPr wrap="square" lIns="1016" tIns="1016" rIns="1016" bIns="1016" rtlCol="0" anchor="ctr"/>
           <a:lstStyle/>
           <a:p>
-            <a:pPr algn="ctr" indent="0" marL="0">
+            <a:pPr marL="0" indent="0" algn="ctr">
               <a:buNone/>
             </a:pPr>
             <a:r>
@@ -2080,6 +2032,13 @@
             <a:tailEnd type="triangle"/>
           </a:ln>
         </p:spPr>
+        <p:txBody>
+          <a:bodyPr/>
+          <a:lstStyle/>
+          <a:p>
+            <a:endParaRPr lang="ko-KR" altLang="en-US"/>
+          </a:p>
+        </p:txBody>
       </p:sp>
       <p:sp>
         <p:nvSpPr>
@@ -2107,6 +2066,13 @@
             <a:prstDash val="solid"/>
           </a:ln>
         </p:spPr>
+        <p:txBody>
+          <a:bodyPr/>
+          <a:lstStyle/>
+          <a:p>
+            <a:endParaRPr lang="ko-KR" altLang="en-US"/>
+          </a:p>
+        </p:txBody>
       </p:sp>
       <p:sp>
         <p:nvSpPr>
@@ -2129,7 +2095,7 @@
           <a:bodyPr wrap="square" lIns="1016" tIns="1016" rIns="1016" bIns="1016" rtlCol="0" anchor="ctr"/>
           <a:lstStyle/>
           <a:p>
-            <a:pPr algn="ctr" indent="0" marL="0">
+            <a:pPr marL="0" indent="0" algn="ctr">
               <a:buNone/>
             </a:pPr>
             <a:r>
@@ -2146,7 +2112,7 @@
             <a:endParaRPr lang="en-US" sz="1400" dirty="0"/>
           </a:p>
           <a:p>
-            <a:pPr algn="ctr" indent="0" marL="0">
+            <a:pPr marL="0" indent="0" algn="ctr">
               <a:buNone/>
             </a:pPr>
             <a:r>
@@ -2187,6 +2153,13 @@
             <a:tailEnd type="triangle"/>
           </a:ln>
         </p:spPr>
+        <p:txBody>
+          <a:bodyPr/>
+          <a:lstStyle/>
+          <a:p>
+            <a:endParaRPr lang="ko-KR" altLang="en-US"/>
+          </a:p>
+        </p:txBody>
       </p:sp>
       <p:sp>
         <p:nvSpPr>
@@ -2214,6 +2187,13 @@
             <a:prstDash val="solid"/>
           </a:ln>
         </p:spPr>
+        <p:txBody>
+          <a:bodyPr/>
+          <a:lstStyle/>
+          <a:p>
+            <a:endParaRPr lang="ko-KR" altLang="en-US"/>
+          </a:p>
+        </p:txBody>
       </p:sp>
       <p:sp>
         <p:nvSpPr>
@@ -2236,7 +2216,7 @@
           <a:bodyPr wrap="square" lIns="1016" tIns="1016" rIns="1016" bIns="1016" rtlCol="0" anchor="ctr"/>
           <a:lstStyle/>
           <a:p>
-            <a:pPr algn="ctr" indent="0" marL="0">
+            <a:pPr marL="0" indent="0" algn="ctr">
               <a:buNone/>
             </a:pPr>
             <a:r>
@@ -2277,6 +2257,13 @@
             <a:tailEnd type="triangle"/>
           </a:ln>
         </p:spPr>
+        <p:txBody>
+          <a:bodyPr/>
+          <a:lstStyle/>
+          <a:p>
+            <a:endParaRPr lang="ko-KR" altLang="en-US"/>
+          </a:p>
+        </p:txBody>
       </p:sp>
       <p:sp>
         <p:nvSpPr>
@@ -2299,6 +2286,13 @@
           </a:solidFill>
           <a:ln/>
         </p:spPr>
+        <p:txBody>
+          <a:bodyPr/>
+          <a:lstStyle/>
+          <a:p>
+            <a:endParaRPr lang="ko-KR" altLang="en-US"/>
+          </a:p>
+        </p:txBody>
       </p:sp>
       <p:sp>
         <p:nvSpPr>
@@ -2321,7 +2315,7 @@
           <a:bodyPr wrap="square" lIns="1016" tIns="1016" rIns="1016" bIns="1016" rtlCol="0" anchor="ctr"/>
           <a:lstStyle/>
           <a:p>
-            <a:pPr algn="ctr" indent="0" marL="0">
+            <a:pPr marL="0" indent="0" algn="ctr">
               <a:buNone/>
             </a:pPr>
             <a:r>
@@ -2362,6 +2356,13 @@
             <a:tailEnd type="triangle"/>
           </a:ln>
         </p:spPr>
+        <p:txBody>
+          <a:bodyPr/>
+          <a:lstStyle/>
+          <a:p>
+            <a:endParaRPr lang="ko-KR" altLang="en-US"/>
+          </a:p>
+        </p:txBody>
       </p:sp>
       <p:sp>
         <p:nvSpPr>
@@ -2384,6 +2385,13 @@
           </a:solidFill>
           <a:ln/>
         </p:spPr>
+        <p:txBody>
+          <a:bodyPr/>
+          <a:lstStyle/>
+          <a:p>
+            <a:endParaRPr lang="ko-KR" altLang="en-US"/>
+          </a:p>
+        </p:txBody>
       </p:sp>
       <p:sp>
         <p:nvSpPr>
@@ -2406,7 +2414,7 @@
           <a:bodyPr wrap="square" lIns="1016" tIns="1016" rIns="1016" bIns="1016" rtlCol="0" anchor="ctr"/>
           <a:lstStyle/>
           <a:p>
-            <a:pPr algn="ctr" indent="0" marL="0">
+            <a:pPr marL="0" indent="0" algn="ctr">
               <a:buNone/>
             </a:pPr>
             <a:r>
@@ -2423,7 +2431,7 @@
             <a:endParaRPr lang="en-US" sz="1400" dirty="0"/>
           </a:p>
           <a:p>
-            <a:pPr algn="ctr" indent="0" marL="0">
+            <a:pPr marL="0" indent="0" algn="ctr">
               <a:buNone/>
             </a:pPr>
             <a:r>
@@ -2464,6 +2472,13 @@
             <a:tailEnd type="triangle"/>
           </a:ln>
         </p:spPr>
+        <p:txBody>
+          <a:bodyPr/>
+          <a:lstStyle/>
+          <a:p>
+            <a:endParaRPr lang="ko-KR" altLang="en-US"/>
+          </a:p>
+        </p:txBody>
       </p:sp>
       <p:sp>
         <p:nvSpPr>
@@ -2491,6 +2506,13 @@
             <a:prstDash val="solid"/>
           </a:ln>
         </p:spPr>
+        <p:txBody>
+          <a:bodyPr/>
+          <a:lstStyle/>
+          <a:p>
+            <a:endParaRPr lang="ko-KR" altLang="en-US"/>
+          </a:p>
+        </p:txBody>
       </p:sp>
       <p:sp>
         <p:nvSpPr>
@@ -2513,7 +2535,7 @@
           <a:bodyPr wrap="square" lIns="1016" tIns="1016" rIns="1016" bIns="1016" rtlCol="0" anchor="ctr"/>
           <a:lstStyle/>
           <a:p>
-            <a:pPr algn="ctr" indent="0" marL="0">
+            <a:pPr marL="0" indent="0" algn="ctr">
               <a:buNone/>
             </a:pPr>
             <a:r>
@@ -2554,6 +2576,13 @@
             <a:tailEnd type="triangle"/>
           </a:ln>
         </p:spPr>
+        <p:txBody>
+          <a:bodyPr/>
+          <a:lstStyle/>
+          <a:p>
+            <a:endParaRPr lang="ko-KR" altLang="en-US"/>
+          </a:p>
+        </p:txBody>
       </p:sp>
       <p:sp>
         <p:nvSpPr>
@@ -2581,6 +2610,13 @@
             <a:prstDash val="solid"/>
           </a:ln>
         </p:spPr>
+        <p:txBody>
+          <a:bodyPr/>
+          <a:lstStyle/>
+          <a:p>
+            <a:endParaRPr lang="ko-KR" altLang="en-US"/>
+          </a:p>
+        </p:txBody>
       </p:sp>
       <p:sp>
         <p:nvSpPr>
@@ -2603,7 +2639,7 @@
           <a:bodyPr wrap="square" lIns="1016" tIns="1016" rIns="1016" bIns="1016" rtlCol="0" anchor="ctr"/>
           <a:lstStyle/>
           <a:p>
-            <a:pPr algn="ctr" indent="0" marL="0">
+            <a:pPr marL="0" indent="0" algn="ctr">
               <a:buNone/>
             </a:pPr>
             <a:r>
@@ -2644,6 +2680,13 @@
             <a:tailEnd type="triangle"/>
           </a:ln>
         </p:spPr>
+        <p:txBody>
+          <a:bodyPr/>
+          <a:lstStyle/>
+          <a:p>
+            <a:endParaRPr lang="ko-KR" altLang="en-US"/>
+          </a:p>
+        </p:txBody>
       </p:sp>
       <p:sp>
         <p:nvSpPr>
@@ -2671,6 +2714,13 @@
             <a:prstDash val="solid"/>
           </a:ln>
         </p:spPr>
+        <p:txBody>
+          <a:bodyPr/>
+          <a:lstStyle/>
+          <a:p>
+            <a:endParaRPr lang="ko-KR" altLang="en-US"/>
+          </a:p>
+        </p:txBody>
       </p:sp>
       <p:sp>
         <p:nvSpPr>
@@ -2693,7 +2743,7 @@
           <a:bodyPr wrap="square" lIns="1016" tIns="1016" rIns="1016" bIns="1016" rtlCol="0" anchor="ctr"/>
           <a:lstStyle/>
           <a:p>
-            <a:pPr algn="ctr" indent="0" marL="0">
+            <a:pPr marL="0" indent="0" algn="ctr">
               <a:buNone/>
             </a:pPr>
             <a:r>
@@ -2710,7 +2760,7 @@
             <a:endParaRPr lang="en-US" sz="1400" dirty="0"/>
           </a:p>
           <a:p>
-            <a:pPr algn="ctr" indent="0" marL="0">
+            <a:pPr marL="0" indent="0" algn="ctr">
               <a:buNone/>
             </a:pPr>
             <a:r>
@@ -2751,6 +2801,13 @@
             <a:tailEnd type="triangle"/>
           </a:ln>
         </p:spPr>
+        <p:txBody>
+          <a:bodyPr/>
+          <a:lstStyle/>
+          <a:p>
+            <a:endParaRPr lang="ko-KR" altLang="en-US"/>
+          </a:p>
+        </p:txBody>
       </p:sp>
       <p:sp>
         <p:nvSpPr>
@@ -2775,6 +2832,13 @@
             <a:tailEnd type="triangle"/>
           </a:ln>
         </p:spPr>
+        <p:txBody>
+          <a:bodyPr/>
+          <a:lstStyle/>
+          <a:p>
+            <a:endParaRPr lang="ko-KR" altLang="en-US"/>
+          </a:p>
+        </p:txBody>
       </p:sp>
       <p:sp>
         <p:nvSpPr>
@@ -2797,7 +2861,7 @@
           <a:bodyPr wrap="square" lIns="0" tIns="0" rIns="0" bIns="0" rtlCol="0" anchor="ctr"/>
           <a:lstStyle/>
           <a:p>
-            <a:pPr algn="l" indent="0" marL="0">
+            <a:pPr marL="0" indent="0" algn="l">
               <a:buNone/>
             </a:pPr>
             <a:r>
@@ -2836,6 +2900,13 @@
           </a:solidFill>
           <a:ln/>
         </p:spPr>
+        <p:txBody>
+          <a:bodyPr/>
+          <a:lstStyle/>
+          <a:p>
+            <a:endParaRPr lang="ko-KR" altLang="en-US"/>
+          </a:p>
+        </p:txBody>
       </p:sp>
       <p:sp>
         <p:nvSpPr>
@@ -2858,7 +2929,7 @@
           <a:bodyPr wrap="square" lIns="1016" tIns="1016" rIns="1016" bIns="1016" rtlCol="0" anchor="ctr"/>
           <a:lstStyle/>
           <a:p>
-            <a:pPr algn="ctr" indent="0" marL="0">
+            <a:pPr marL="0" indent="0" algn="ctr">
               <a:buNone/>
             </a:pPr>
             <a:r>
@@ -2902,6 +2973,13 @@
             <a:prstDash val="solid"/>
           </a:ln>
         </p:spPr>
+        <p:txBody>
+          <a:bodyPr/>
+          <a:lstStyle/>
+          <a:p>
+            <a:endParaRPr lang="ko-KR" altLang="en-US"/>
+          </a:p>
+        </p:txBody>
       </p:sp>
       <p:sp>
         <p:nvSpPr>
@@ -2924,7 +3002,7 @@
           <a:bodyPr wrap="square" lIns="0" tIns="0" rIns="0" bIns="0" rtlCol="0" anchor="ctr"/>
           <a:lstStyle/>
           <a:p>
-            <a:pPr algn="l" indent="0" marL="0">
+            <a:pPr marL="0" indent="0" algn="l">
               <a:buNone/>
             </a:pPr>
             <a:r>
@@ -2963,6 +3041,13 @@
           </a:solidFill>
           <a:ln/>
         </p:spPr>
+        <p:txBody>
+          <a:bodyPr/>
+          <a:lstStyle/>
+          <a:p>
+            <a:endParaRPr lang="ko-KR" altLang="en-US"/>
+          </a:p>
+        </p:txBody>
       </p:sp>
       <p:sp>
         <p:nvSpPr>
@@ -2985,7 +3070,7 @@
           <a:bodyPr wrap="square" lIns="1016" tIns="1016" rIns="1016" bIns="1016" rtlCol="0" anchor="ctr"/>
           <a:lstStyle/>
           <a:p>
-            <a:pPr algn="ctr" indent="0" marL="0">
+            <a:pPr marL="0" indent="0" algn="ctr">
               <a:buNone/>
             </a:pPr>
             <a:r>
@@ -3024,6 +3109,13 @@
           </a:solidFill>
           <a:ln/>
         </p:spPr>
+        <p:txBody>
+          <a:bodyPr/>
+          <a:lstStyle/>
+          <a:p>
+            <a:endParaRPr lang="ko-KR" altLang="en-US"/>
+          </a:p>
+        </p:txBody>
       </p:sp>
       <p:sp>
         <p:nvSpPr>
@@ -3046,7 +3138,7 @@
           <a:bodyPr wrap="square" lIns="1016" tIns="1016" rIns="1016" bIns="1016" rtlCol="0" anchor="ctr"/>
           <a:lstStyle/>
           <a:p>
-            <a:pPr algn="ctr" indent="0" marL="0">
+            <a:pPr marL="0" indent="0" algn="ctr">
               <a:buNone/>
             </a:pPr>
             <a:r>
@@ -3085,7 +3177,7 @@
           <a:bodyPr wrap="square" lIns="0" tIns="0" rIns="0" bIns="0" rtlCol="0" anchor="ctr"/>
           <a:lstStyle/>
           <a:p>
-            <a:pPr algn="l" indent="0" marL="0">
+            <a:pPr marL="0" indent="0" algn="l">
               <a:buNone/>
             </a:pPr>
             <a:r>
@@ -3124,6 +3216,13 @@
           </a:solidFill>
           <a:ln/>
         </p:spPr>
+        <p:txBody>
+          <a:bodyPr/>
+          <a:lstStyle/>
+          <a:p>
+            <a:endParaRPr lang="ko-KR" altLang="en-US"/>
+          </a:p>
+        </p:txBody>
       </p:sp>
       <p:sp>
         <p:nvSpPr>
@@ -3146,7 +3245,7 @@
           <a:bodyPr wrap="square" lIns="1016" tIns="1016" rIns="1016" bIns="1016" rtlCol="0" anchor="ctr"/>
           <a:lstStyle/>
           <a:p>
-            <a:pPr algn="ctr" indent="0" marL="0">
+            <a:pPr marL="0" indent="0" algn="ctr">
               <a:buNone/>
             </a:pPr>
             <a:r>
@@ -3185,6 +3284,13 @@
           </a:solidFill>
           <a:ln/>
         </p:spPr>
+        <p:txBody>
+          <a:bodyPr/>
+          <a:lstStyle/>
+          <a:p>
+            <a:endParaRPr lang="ko-KR" altLang="en-US"/>
+          </a:p>
+        </p:txBody>
       </p:sp>
       <p:sp>
         <p:nvSpPr>
@@ -3207,7 +3313,7 @@
           <a:bodyPr wrap="square" lIns="1016" tIns="1016" rIns="1016" bIns="1016" rtlCol="0" anchor="ctr"/>
           <a:lstStyle/>
           <a:p>
-            <a:pPr algn="ctr" indent="0" marL="0">
+            <a:pPr marL="0" indent="0" algn="ctr">
               <a:buNone/>
             </a:pPr>
             <a:r>
@@ -3246,7 +3352,7 @@
           <a:bodyPr wrap="square" lIns="0" tIns="0" rIns="0" bIns="0" rtlCol="0" anchor="ctr"/>
           <a:lstStyle/>
           <a:p>
-            <a:pPr algn="l" indent="0" marL="0">
+            <a:pPr marL="0" indent="0" algn="l">
               <a:buNone/>
             </a:pPr>
             <a:r>
@@ -3290,6 +3396,13 @@
             <a:prstDash val="solid"/>
           </a:ln>
         </p:spPr>
+        <p:txBody>
+          <a:bodyPr/>
+          <a:lstStyle/>
+          <a:p>
+            <a:endParaRPr lang="ko-KR" altLang="en-US"/>
+          </a:p>
+        </p:txBody>
       </p:sp>
       <p:sp>
         <p:nvSpPr>
@@ -3312,7 +3425,7 @@
           <a:bodyPr wrap="square" lIns="1016" tIns="1016" rIns="1016" bIns="1016" rtlCol="0" anchor="ctr"/>
           <a:lstStyle/>
           <a:p>
-            <a:pPr algn="ctr" indent="0" marL="0">
+            <a:pPr marL="0" indent="0" algn="ctr">
               <a:buNone/>
             </a:pPr>
             <a:r>
@@ -3356,6 +3469,13 @@
             <a:prstDash val="solid"/>
           </a:ln>
         </p:spPr>
+        <p:txBody>
+          <a:bodyPr/>
+          <a:lstStyle/>
+          <a:p>
+            <a:endParaRPr lang="ko-KR" altLang="en-US"/>
+          </a:p>
+        </p:txBody>
       </p:sp>
       <p:sp>
         <p:nvSpPr>
@@ -3378,7 +3498,7 @@
           <a:bodyPr wrap="square" lIns="1016" tIns="1016" rIns="1016" bIns="1016" rtlCol="0" anchor="ctr"/>
           <a:lstStyle/>
           <a:p>
-            <a:pPr algn="ctr" indent="0" marL="0">
+            <a:pPr marL="0" indent="0" algn="ctr">
               <a:buNone/>
             </a:pPr>
             <a:r>
@@ -3422,6 +3542,13 @@
             <a:prstDash val="solid"/>
           </a:ln>
         </p:spPr>
+        <p:txBody>
+          <a:bodyPr/>
+          <a:lstStyle/>
+          <a:p>
+            <a:endParaRPr lang="ko-KR" altLang="en-US"/>
+          </a:p>
+        </p:txBody>
       </p:sp>
       <p:sp>
         <p:nvSpPr>
@@ -3444,7 +3571,7 @@
           <a:bodyPr wrap="square" lIns="1016" tIns="1016" rIns="1016" bIns="1016" rtlCol="0" anchor="ctr"/>
           <a:lstStyle/>
           <a:p>
-            <a:pPr algn="ctr" indent="0" marL="0">
+            <a:pPr marL="0" indent="0" algn="ctr">
               <a:buNone/>
             </a:pPr>
             <a:r>
@@ -3488,6 +3615,13 @@
             <a:prstDash val="solid"/>
           </a:ln>
         </p:spPr>
+        <p:txBody>
+          <a:bodyPr/>
+          <a:lstStyle/>
+          <a:p>
+            <a:endParaRPr lang="ko-KR" altLang="en-US"/>
+          </a:p>
+        </p:txBody>
       </p:sp>
       <p:sp>
         <p:nvSpPr>
@@ -3510,7 +3644,7 @@
           <a:bodyPr wrap="square" lIns="1016" tIns="1016" rIns="1016" bIns="1016" rtlCol="0" anchor="ctr"/>
           <a:lstStyle/>
           <a:p>
-            <a:pPr algn="ctr" indent="0" marL="0">
+            <a:pPr marL="0" indent="0" algn="ctr">
               <a:buNone/>
             </a:pPr>
             <a:r>
@@ -3554,6 +3688,13 @@
             <a:prstDash val="solid"/>
           </a:ln>
         </p:spPr>
+        <p:txBody>
+          <a:bodyPr/>
+          <a:lstStyle/>
+          <a:p>
+            <a:endParaRPr lang="ko-KR" altLang="en-US"/>
+          </a:p>
+        </p:txBody>
       </p:sp>
       <p:sp>
         <p:nvSpPr>
@@ -3576,7 +3717,7 @@
           <a:bodyPr wrap="square" lIns="1016" tIns="1016" rIns="1016" bIns="1016" rtlCol="0" anchor="ctr"/>
           <a:lstStyle/>
           <a:p>
-            <a:pPr algn="ctr" indent="0" marL="0">
+            <a:pPr marL="0" indent="0" algn="ctr">
               <a:buNone/>
             </a:pPr>
             <a:r>
@@ -3620,6 +3761,13 @@
             <a:prstDash val="solid"/>
           </a:ln>
         </p:spPr>
+        <p:txBody>
+          <a:bodyPr/>
+          <a:lstStyle/>
+          <a:p>
+            <a:endParaRPr lang="ko-KR" altLang="en-US"/>
+          </a:p>
+        </p:txBody>
       </p:sp>
       <p:sp>
         <p:nvSpPr>
@@ -3642,7 +3790,7 @@
           <a:bodyPr wrap="square" lIns="1016" tIns="1016" rIns="1016" bIns="1016" rtlCol="0" anchor="ctr"/>
           <a:lstStyle/>
           <a:p>
-            <a:pPr algn="ctr" indent="0" marL="0">
+            <a:pPr marL="0" indent="0" algn="ctr">
               <a:buNone/>
             </a:pPr>
             <a:r>
@@ -3686,6 +3834,13 @@
             <a:prstDash val="solid"/>
           </a:ln>
         </p:spPr>
+        <p:txBody>
+          <a:bodyPr/>
+          <a:lstStyle/>
+          <a:p>
+            <a:endParaRPr lang="ko-KR" altLang="en-US"/>
+          </a:p>
+        </p:txBody>
       </p:sp>
       <p:sp>
         <p:nvSpPr>
@@ -3708,7 +3863,7 @@
           <a:bodyPr wrap="square" lIns="1016" tIns="1016" rIns="1016" bIns="1016" rtlCol="0" anchor="ctr"/>
           <a:lstStyle/>
           <a:p>
-            <a:pPr algn="ctr" indent="0" marL="0">
+            <a:pPr marL="0" indent="0" algn="ctr">
               <a:buNone/>
             </a:pPr>
             <a:r>
@@ -3748,6 +3903,13 @@
             <a:prstDash val="solid"/>
           </a:ln>
         </p:spPr>
+        <p:txBody>
+          <a:bodyPr/>
+          <a:lstStyle/>
+          <a:p>
+            <a:endParaRPr lang="ko-KR" altLang="en-US"/>
+          </a:p>
+        </p:txBody>
       </p:sp>
       <p:sp>
         <p:nvSpPr>
@@ -3770,7 +3932,7 @@
           <a:bodyPr wrap="square" lIns="0" tIns="0" rIns="0" bIns="0" rtlCol="0" anchor="ctr"/>
           <a:lstStyle/>
           <a:p>
-            <a:pPr algn="l" indent="0" marL="0">
+            <a:pPr marL="0" indent="0" algn="l">
               <a:buNone/>
             </a:pPr>
             <a:r>
@@ -3809,7 +3971,7 @@
           <a:bodyPr wrap="square" lIns="0" tIns="0" rIns="0" bIns="0" rtlCol="0" anchor="t"/>
           <a:lstStyle/>
           <a:p>
-            <a:pPr algn="l" indent="0" marL="0">
+            <a:pPr marL="0" indent="0" algn="l">
               <a:buNone/>
             </a:pPr>
             <a:r>
@@ -3826,7 +3988,7 @@
             <a:endParaRPr lang="en-US" sz="1400" dirty="0"/>
           </a:p>
           <a:p>
-            <a:pPr algn="l" indent="0" marL="0">
+            <a:pPr marL="0" indent="0" algn="l">
               <a:buNone/>
             </a:pPr>
             <a:r>
@@ -3843,7 +4005,7 @@
             <a:endParaRPr lang="en-US" sz="1400" dirty="0"/>
           </a:p>
           <a:p>
-            <a:pPr algn="l" indent="0" marL="0">
+            <a:pPr marL="0" indent="0" algn="l">
               <a:buNone/>
             </a:pPr>
             <a:r>
@@ -3882,6 +4044,13 @@
           </a:solidFill>
           <a:ln/>
         </p:spPr>
+        <p:txBody>
+          <a:bodyPr/>
+          <a:lstStyle/>
+          <a:p>
+            <a:endParaRPr lang="ko-KR" altLang="en-US"/>
+          </a:p>
+        </p:txBody>
       </p:sp>
       <p:sp>
         <p:nvSpPr>
@@ -3904,7 +4073,7 @@
           <a:bodyPr wrap="square" lIns="1016" tIns="1016" rIns="1016" bIns="1016" rtlCol="0" anchor="ctr"/>
           <a:lstStyle/>
           <a:p>
-            <a:pPr algn="ctr" indent="0" marL="0">
+            <a:pPr marL="0" indent="0" algn="ctr">
               <a:buNone/>
             </a:pPr>
             <a:r>
@@ -3948,6 +4117,13 @@
             <a:prstDash val="solid"/>
           </a:ln>
         </p:spPr>
+        <p:txBody>
+          <a:bodyPr/>
+          <a:lstStyle/>
+          <a:p>
+            <a:endParaRPr lang="ko-KR" altLang="en-US"/>
+          </a:p>
+        </p:txBody>
       </p:sp>
       <p:sp>
         <p:nvSpPr>
@@ -3970,7 +4146,7 @@
           <a:bodyPr wrap="square" lIns="254" tIns="254" rIns="254" bIns="254" rtlCol="0" anchor="t"/>
           <a:lstStyle/>
           <a:p>
-            <a:pPr indent="0" marL="0">
+            <a:pPr marL="0" indent="0">
               <a:lnSpc>
                 <a:spcPct val="105000"/>
               </a:lnSpc>
@@ -3990,7 +4166,7 @@
             <a:endParaRPr lang="en-US" sz="1400" dirty="0"/>
           </a:p>
           <a:p>
-            <a:pPr indent="0" marL="0">
+            <a:pPr marL="0" indent="0">
               <a:lnSpc>
                 <a:spcPct val="105000"/>
               </a:lnSpc>
@@ -4010,7 +4186,7 @@
             <a:endParaRPr lang="en-US" sz="1400" dirty="0"/>
           </a:p>
           <a:p>
-            <a:pPr indent="0" marL="0">
+            <a:pPr marL="0" indent="0">
               <a:lnSpc>
                 <a:spcPct val="105000"/>
               </a:lnSpc>
@@ -4030,7 +4206,7 @@
             <a:endParaRPr lang="en-US" sz="1400" dirty="0"/>
           </a:p>
           <a:p>
-            <a:pPr indent="0" marL="0">
+            <a:pPr marL="0" indent="0">
               <a:lnSpc>
                 <a:spcPct val="105000"/>
               </a:lnSpc>
@@ -4050,7 +4226,7 @@
             <a:endParaRPr lang="en-US" sz="1400" dirty="0"/>
           </a:p>
           <a:p>
-            <a:pPr indent="0" marL="0">
+            <a:pPr marL="0" indent="0">
               <a:lnSpc>
                 <a:spcPct val="105000"/>
               </a:lnSpc>
@@ -4070,7 +4246,7 @@
             <a:endParaRPr lang="en-US" sz="1400" dirty="0"/>
           </a:p>
           <a:p>
-            <a:pPr indent="0" marL="0">
+            <a:pPr marL="0" indent="0">
               <a:lnSpc>
                 <a:spcPct val="105000"/>
               </a:lnSpc>
@@ -4090,7 +4266,7 @@
             <a:endParaRPr lang="en-US" sz="1400" dirty="0"/>
           </a:p>
           <a:p>
-            <a:pPr indent="0" marL="0">
+            <a:pPr marL="0" indent="0">
               <a:lnSpc>
                 <a:spcPct val="105000"/>
               </a:lnSpc>
@@ -4137,6 +4313,13 @@
             <a:prstDash val="solid"/>
           </a:ln>
         </p:spPr>
+        <p:txBody>
+          <a:bodyPr/>
+          <a:lstStyle/>
+          <a:p>
+            <a:endParaRPr lang="ko-KR" altLang="en-US"/>
+          </a:p>
+        </p:txBody>
       </p:sp>
       <p:sp>
         <p:nvSpPr>
@@ -4159,7 +4342,7 @@
           <a:bodyPr wrap="square" lIns="0" tIns="0" rIns="0" bIns="0" rtlCol="0" anchor="ctr"/>
           <a:lstStyle/>
           <a:p>
-            <a:pPr algn="l" indent="0" marL="0">
+            <a:pPr marL="0" indent="0" algn="l">
               <a:buNone/>
             </a:pPr>
             <a:r>
@@ -4198,7 +4381,7 @@
           <a:bodyPr wrap="square" lIns="0" tIns="0" rIns="0" bIns="0" rtlCol="0" anchor="t"/>
           <a:lstStyle/>
           <a:p>
-            <a:pPr algn="l" indent="0" marL="0">
+            <a:pPr marL="0" indent="0" algn="l">
               <a:buNone/>
             </a:pPr>
             <a:r>
@@ -4215,7 +4398,7 @@
             <a:endParaRPr lang="en-US" sz="1400" dirty="0"/>
           </a:p>
           <a:p>
-            <a:pPr algn="l" indent="0" marL="0">
+            <a:pPr marL="0" indent="0" algn="l">
               <a:buNone/>
             </a:pPr>
             <a:r>
@@ -4259,6 +4442,13 @@
             <a:prstDash val="solid"/>
           </a:ln>
         </p:spPr>
+        <p:txBody>
+          <a:bodyPr/>
+          <a:lstStyle/>
+          <a:p>
+            <a:endParaRPr lang="ko-KR" altLang="en-US"/>
+          </a:p>
+        </p:txBody>
       </p:sp>
       <p:sp>
         <p:nvSpPr>
@@ -4281,7 +4471,7 @@
           <a:bodyPr wrap="square" lIns="0" tIns="0" rIns="0" bIns="0" rtlCol="0" anchor="ctr"/>
           <a:lstStyle/>
           <a:p>
-            <a:pPr algn="l" indent="0" marL="0">
+            <a:pPr marL="0" indent="0" algn="l">
               <a:buNone/>
             </a:pPr>
             <a:r>
@@ -4320,7 +4510,7 @@
           <a:bodyPr wrap="square" lIns="0" tIns="0" rIns="0" bIns="0" rtlCol="0" anchor="t"/>
           <a:lstStyle/>
           <a:p>
-            <a:pPr algn="l" indent="0" marL="0">
+            <a:pPr marL="0" indent="0" algn="l">
               <a:buNone/>
             </a:pPr>
             <a:r>
@@ -4337,7 +4527,7 @@
             <a:endParaRPr lang="en-US" sz="1400" dirty="0"/>
           </a:p>
           <a:p>
-            <a:pPr algn="l" indent="0" marL="0">
+            <a:pPr marL="0" indent="0" algn="l">
               <a:buNone/>
             </a:pPr>
             <a:r>
@@ -4376,7 +4566,7 @@
           <a:bodyPr wrap="square" lIns="0" tIns="0" rIns="0" bIns="0" rtlCol="0" anchor="ctr"/>
           <a:lstStyle/>
           <a:p>
-            <a:pPr algn="l" indent="0" marL="0">
+            <a:pPr marL="0" indent="0" algn="l">
               <a:buNone/>
             </a:pPr>
             <a:r>
@@ -4420,6 +4610,13 @@
             <a:prstDash val="solid"/>
           </a:ln>
         </p:spPr>
+        <p:txBody>
+          <a:bodyPr/>
+          <a:lstStyle/>
+          <a:p>
+            <a:endParaRPr lang="ko-KR" altLang="en-US"/>
+          </a:p>
+        </p:txBody>
       </p:sp>
       <p:sp>
         <p:nvSpPr>
@@ -4440,6 +4637,13 @@
           </a:solidFill>
           <a:ln/>
         </p:spPr>
+        <p:txBody>
+          <a:bodyPr/>
+          <a:lstStyle/>
+          <a:p>
+            <a:endParaRPr lang="ko-KR" altLang="en-US"/>
+          </a:p>
+        </p:txBody>
       </p:sp>
       <p:sp>
         <p:nvSpPr>
@@ -4462,7 +4666,7 @@
           <a:bodyPr wrap="square" lIns="0" tIns="0" rIns="0" bIns="0" rtlCol="0" anchor="ctr"/>
           <a:lstStyle/>
           <a:p>
-            <a:pPr algn="l" indent="0" marL="0">
+            <a:pPr marL="0" indent="0" algn="l">
               <a:buNone/>
             </a:pPr>
             <a:r>
@@ -4479,7 +4683,7 @@
             <a:endParaRPr lang="en-US" sz="1600" dirty="0"/>
           </a:p>
           <a:p>
-            <a:pPr algn="l" indent="0" marL="0">
+            <a:pPr marL="0" indent="0" algn="l">
               <a:buNone/>
             </a:pPr>
             <a:r>
@@ -4499,7 +4703,7 @@
       </p:sp>
       <p:sp>
         <p:nvSpPr>
-          <p:cNvPr id="25" name="Slide Number Placeholder 0"/>
+          <p:cNvPr id="4" name="Slide Number Placeholder 0"/>
           <p:cNvSpPr>
             <a:spLocks noGrp="1"/>
           </p:cNvSpPr>
@@ -4517,7 +4721,7 @@
           </a:prstGeom>
           <a:extLst>
             <a:ext uri="{C572A759-6A51-4108-AA02-DFA0A04FC94B}">
-              <ma14:wrappingTextBoxFlag xmlns:ma14="http://schemas.microsoft.com/office/mac/drawingml/2011/main" val="0"/>
+              <ma14:wrappingTextBoxFlag xmlns="" xmlns:ma14="http://schemas.microsoft.com/office/mac/drawingml/2011/main" val="0"/>
             </a:ext>
           </a:extLst>
         </p:spPr>
@@ -4538,7 +4742,7 @@
           <a:p>
             <a:pPr algn="r"/>
             <a:fld id="{F7021451-1387-4CA6-816F-3879F97B5CBC}" type="slidenum">
-              <a:rPr b="0" lang="en-US"/>
+              <a:rPr lang="en-US" b="0"/>
               <a:t>1</a:t>
             </a:fld>
             <a:endParaRPr lang="en-US"/>
@@ -4573,7 +4777,9 @@
       <p:sp>
         <p:nvSpPr>
           <p:cNvPr id="2" name="Text 2"/>
-          <p:cNvSpPr/>
+          <p:cNvSpPr>
+            <a:spLocks noGrp="1"/>
+          </p:cNvSpPr>
           <p:nvPr>
             <p:ph type="title"/>
           </p:nvPr>
@@ -4593,7 +4799,7 @@
           <a:bodyPr wrap="square" lIns="0" tIns="0" rIns="0" bIns="0" rtlCol="0" anchor="ctr"/>
           <a:lstStyle/>
           <a:p>
-            <a:pPr algn="l" indent="0" marL="0">
+            <a:pPr marL="0" indent="0" algn="l">
               <a:buNone/>
             </a:pPr>
             <a:r>
@@ -4632,7 +4838,7 @@
           <a:bodyPr wrap="square" lIns="0" tIns="0" rIns="0" bIns="0" rtlCol="0" anchor="ctr"/>
           <a:lstStyle/>
           <a:p>
-            <a:pPr indent="0" marL="0">
+            <a:pPr marL="0" indent="0">
               <a:buNone/>
             </a:pPr>
             <a:r>
@@ -4671,7 +4877,7 @@
           <a:bodyPr wrap="square" lIns="0" tIns="0" rIns="0" bIns="0" rtlCol="0" anchor="ctr"/>
           <a:lstStyle/>
           <a:p>
-            <a:pPr algn="l" indent="0" marL="0">
+            <a:pPr marL="0" indent="0" algn="l">
               <a:buNone/>
             </a:pPr>
             <a:r>
@@ -4710,7 +4916,7 @@
           <a:bodyPr wrap="square" lIns="0" tIns="0" rIns="0" bIns="0" rtlCol="0" anchor="ctr"/>
           <a:lstStyle/>
           <a:p>
-            <a:pPr algn="r" indent="0" marL="0">
+            <a:pPr marL="0" indent="0" algn="r">
               <a:buNone/>
             </a:pPr>
             <a:r>
@@ -4754,6 +4960,13 @@
             <a:prstDash val="solid"/>
           </a:ln>
         </p:spPr>
+        <p:txBody>
+          <a:bodyPr/>
+          <a:lstStyle/>
+          <a:p>
+            <a:endParaRPr lang="ko-KR" altLang="en-US"/>
+          </a:p>
+        </p:txBody>
       </p:sp>
       <p:sp>
         <p:nvSpPr>
@@ -4776,6 +4989,13 @@
           </a:solidFill>
           <a:ln/>
         </p:spPr>
+        <p:txBody>
+          <a:bodyPr/>
+          <a:lstStyle/>
+          <a:p>
+            <a:endParaRPr lang="ko-KR" altLang="en-US"/>
+          </a:p>
+        </p:txBody>
       </p:sp>
       <p:sp>
         <p:nvSpPr>
@@ -4798,7 +5018,7 @@
           <a:bodyPr wrap="square" lIns="1016" tIns="1016" rIns="1016" bIns="1016" rtlCol="0" anchor="ctr"/>
           <a:lstStyle/>
           <a:p>
-            <a:pPr algn="ctr" indent="0" marL="0">
+            <a:pPr marL="0" indent="0" algn="ctr">
               <a:buNone/>
             </a:pPr>
             <a:r>
@@ -4837,7 +5057,7 @@
           <a:bodyPr wrap="square" lIns="0" tIns="0" rIns="0" bIns="0" rtlCol="0" anchor="ctr"/>
           <a:lstStyle/>
           <a:p>
-            <a:pPr algn="l" indent="0" marL="0">
+            <a:pPr marL="0" indent="0" algn="l">
               <a:buNone/>
             </a:pPr>
             <a:r>
@@ -4876,7 +5096,7 @@
           <a:bodyPr wrap="square" lIns="0" tIns="0" rIns="0" bIns="0" rtlCol="0" anchor="ctr"/>
           <a:lstStyle/>
           <a:p>
-            <a:pPr algn="l" indent="0" marL="0">
+            <a:pPr marL="0" indent="0" algn="l">
               <a:buNone/>
             </a:pPr>
             <a:r>
@@ -4915,7 +5135,7 @@
           <a:bodyPr wrap="square" lIns="0" tIns="0" rIns="0" bIns="0" rtlCol="0" anchor="ctr"/>
           <a:lstStyle/>
           <a:p>
-            <a:pPr algn="l" indent="0" marL="0">
+            <a:pPr marL="0" indent="0" algn="l">
               <a:buNone/>
             </a:pPr>
             <a:r>
@@ -4959,6 +5179,13 @@
             <a:prstDash val="solid"/>
           </a:ln>
         </p:spPr>
+        <p:txBody>
+          <a:bodyPr/>
+          <a:lstStyle/>
+          <a:p>
+            <a:endParaRPr lang="ko-KR" altLang="en-US"/>
+          </a:p>
+        </p:txBody>
       </p:sp>
       <p:sp>
         <p:nvSpPr>
@@ -4981,6 +5208,13 @@
           </a:solidFill>
           <a:ln/>
         </p:spPr>
+        <p:txBody>
+          <a:bodyPr/>
+          <a:lstStyle/>
+          <a:p>
+            <a:endParaRPr lang="ko-KR" altLang="en-US"/>
+          </a:p>
+        </p:txBody>
       </p:sp>
       <p:sp>
         <p:nvSpPr>
@@ -5003,7 +5237,7 @@
           <a:bodyPr wrap="square" lIns="1016" tIns="1016" rIns="1016" bIns="1016" rtlCol="0" anchor="ctr"/>
           <a:lstStyle/>
           <a:p>
-            <a:pPr algn="ctr" indent="0" marL="0">
+            <a:pPr marL="0" indent="0" algn="ctr">
               <a:buNone/>
             </a:pPr>
             <a:r>
@@ -5042,7 +5276,7 @@
           <a:bodyPr wrap="square" lIns="0" tIns="0" rIns="0" bIns="0" rtlCol="0" anchor="ctr"/>
           <a:lstStyle/>
           <a:p>
-            <a:pPr algn="l" indent="0" marL="0">
+            <a:pPr marL="0" indent="0" algn="l">
               <a:buNone/>
             </a:pPr>
             <a:r>
@@ -5081,7 +5315,7 @@
           <a:bodyPr wrap="square" lIns="0" tIns="0" rIns="0" bIns="0" rtlCol="0" anchor="ctr"/>
           <a:lstStyle/>
           <a:p>
-            <a:pPr algn="l" indent="0" marL="0">
+            <a:pPr marL="0" indent="0" algn="l">
               <a:buNone/>
             </a:pPr>
             <a:r>
@@ -5098,7 +5332,7 @@
             <a:endParaRPr lang="en-US" sz="1400" dirty="0"/>
           </a:p>
           <a:p>
-            <a:pPr algn="l" indent="0" marL="0">
+            <a:pPr marL="0" indent="0" algn="l">
               <a:buNone/>
             </a:pPr>
             <a:r>
@@ -5137,7 +5371,7 @@
           <a:bodyPr wrap="square" lIns="0" tIns="0" rIns="0" bIns="0" rtlCol="0" anchor="ctr"/>
           <a:lstStyle/>
           <a:p>
-            <a:pPr algn="l" indent="0" marL="0">
+            <a:pPr marL="0" indent="0" algn="l">
               <a:buNone/>
             </a:pPr>
             <a:r>
@@ -5181,6 +5415,13 @@
             <a:prstDash val="solid"/>
           </a:ln>
         </p:spPr>
+        <p:txBody>
+          <a:bodyPr/>
+          <a:lstStyle/>
+          <a:p>
+            <a:endParaRPr lang="ko-KR" altLang="en-US"/>
+          </a:p>
+        </p:txBody>
       </p:sp>
       <p:sp>
         <p:nvSpPr>
@@ -5203,6 +5444,13 @@
           </a:solidFill>
           <a:ln/>
         </p:spPr>
+        <p:txBody>
+          <a:bodyPr/>
+          <a:lstStyle/>
+          <a:p>
+            <a:endParaRPr lang="ko-KR" altLang="en-US"/>
+          </a:p>
+        </p:txBody>
       </p:sp>
       <p:sp>
         <p:nvSpPr>
@@ -5225,7 +5473,7 @@
           <a:bodyPr wrap="square" lIns="1016" tIns="1016" rIns="1016" bIns="1016" rtlCol="0" anchor="ctr"/>
           <a:lstStyle/>
           <a:p>
-            <a:pPr algn="ctr" indent="0" marL="0">
+            <a:pPr marL="0" indent="0" algn="ctr">
               <a:buNone/>
             </a:pPr>
             <a:r>
@@ -5264,7 +5512,7 @@
           <a:bodyPr wrap="square" lIns="0" tIns="0" rIns="0" bIns="0" rtlCol="0" anchor="ctr"/>
           <a:lstStyle/>
           <a:p>
-            <a:pPr algn="l" indent="0" marL="0">
+            <a:pPr marL="0" indent="0" algn="l">
               <a:buNone/>
             </a:pPr>
             <a:r>
@@ -5303,7 +5551,7 @@
           <a:bodyPr wrap="square" lIns="0" tIns="0" rIns="0" bIns="0" rtlCol="0" anchor="ctr"/>
           <a:lstStyle/>
           <a:p>
-            <a:pPr algn="l" indent="0" marL="0">
+            <a:pPr marL="0" indent="0" algn="l">
               <a:buNone/>
             </a:pPr>
             <a:r>
@@ -5320,7 +5568,7 @@
             <a:endParaRPr lang="en-US" sz="1400" dirty="0"/>
           </a:p>
           <a:p>
-            <a:pPr algn="l" indent="0" marL="0">
+            <a:pPr marL="0" indent="0" algn="l">
               <a:buNone/>
             </a:pPr>
             <a:r>
@@ -5359,7 +5607,7 @@
           <a:bodyPr wrap="square" lIns="0" tIns="0" rIns="0" bIns="0" rtlCol="0" anchor="ctr"/>
           <a:lstStyle/>
           <a:p>
-            <a:pPr algn="l" indent="0" marL="0">
+            <a:pPr marL="0" indent="0" algn="l">
               <a:buNone/>
             </a:pPr>
             <a:r>
@@ -5403,6 +5651,13 @@
             <a:prstDash val="solid"/>
           </a:ln>
         </p:spPr>
+        <p:txBody>
+          <a:bodyPr/>
+          <a:lstStyle/>
+          <a:p>
+            <a:endParaRPr lang="ko-KR" altLang="en-US"/>
+          </a:p>
+        </p:txBody>
       </p:sp>
       <p:sp>
         <p:nvSpPr>
@@ -5425,6 +5680,13 @@
           </a:solidFill>
           <a:ln/>
         </p:spPr>
+        <p:txBody>
+          <a:bodyPr/>
+          <a:lstStyle/>
+          <a:p>
+            <a:endParaRPr lang="ko-KR" altLang="en-US"/>
+          </a:p>
+        </p:txBody>
       </p:sp>
       <p:sp>
         <p:nvSpPr>
@@ -5447,7 +5709,7 @@
           <a:bodyPr wrap="square" lIns="1016" tIns="1016" rIns="1016" bIns="1016" rtlCol="0" anchor="ctr"/>
           <a:lstStyle/>
           <a:p>
-            <a:pPr algn="ctr" indent="0" marL="0">
+            <a:pPr marL="0" indent="0" algn="ctr">
               <a:buNone/>
             </a:pPr>
             <a:r>
@@ -5486,7 +5748,7 @@
           <a:bodyPr wrap="square" lIns="0" tIns="0" rIns="0" bIns="0" rtlCol="0" anchor="ctr"/>
           <a:lstStyle/>
           <a:p>
-            <a:pPr algn="l" indent="0" marL="0">
+            <a:pPr marL="0" indent="0" algn="l">
               <a:buNone/>
             </a:pPr>
             <a:r>
@@ -5525,7 +5787,7 @@
           <a:bodyPr wrap="square" lIns="0" tIns="0" rIns="0" bIns="0" rtlCol="0" anchor="ctr"/>
           <a:lstStyle/>
           <a:p>
-            <a:pPr algn="l" indent="0" marL="0">
+            <a:pPr marL="0" indent="0" algn="l">
               <a:buNone/>
             </a:pPr>
             <a:r>
@@ -5542,7 +5804,7 @@
             <a:endParaRPr lang="en-US" sz="1400" dirty="0"/>
           </a:p>
           <a:p>
-            <a:pPr algn="l" indent="0" marL="0">
+            <a:pPr marL="0" indent="0" algn="l">
               <a:buNone/>
             </a:pPr>
             <a:r>
@@ -5581,7 +5843,7 @@
           <a:bodyPr wrap="square" lIns="0" tIns="0" rIns="0" bIns="0" rtlCol="0" anchor="ctr"/>
           <a:lstStyle/>
           <a:p>
-            <a:pPr algn="l" indent="0" marL="0">
+            <a:pPr marL="0" indent="0" algn="l">
               <a:buNone/>
             </a:pPr>
             <a:r>
@@ -5625,6 +5887,13 @@
             <a:prstDash val="solid"/>
           </a:ln>
         </p:spPr>
+        <p:txBody>
+          <a:bodyPr/>
+          <a:lstStyle/>
+          <a:p>
+            <a:endParaRPr lang="ko-KR" altLang="en-US"/>
+          </a:p>
+        </p:txBody>
       </p:sp>
       <p:sp>
         <p:nvSpPr>
@@ -5647,6 +5916,13 @@
           </a:solidFill>
           <a:ln/>
         </p:spPr>
+        <p:txBody>
+          <a:bodyPr/>
+          <a:lstStyle/>
+          <a:p>
+            <a:endParaRPr lang="ko-KR" altLang="en-US"/>
+          </a:p>
+        </p:txBody>
       </p:sp>
       <p:sp>
         <p:nvSpPr>
@@ -5669,7 +5945,7 @@
           <a:bodyPr wrap="square" lIns="1016" tIns="1016" rIns="1016" bIns="1016" rtlCol="0" anchor="ctr"/>
           <a:lstStyle/>
           <a:p>
-            <a:pPr algn="ctr" indent="0" marL="0">
+            <a:pPr marL="0" indent="0" algn="ctr">
               <a:buNone/>
             </a:pPr>
             <a:r>
@@ -5708,7 +5984,7 @@
           <a:bodyPr wrap="square" lIns="0" tIns="0" rIns="0" bIns="0" rtlCol="0" anchor="ctr"/>
           <a:lstStyle/>
           <a:p>
-            <a:pPr algn="l" indent="0" marL="0">
+            <a:pPr marL="0" indent="0" algn="l">
               <a:buNone/>
             </a:pPr>
             <a:r>
@@ -5747,7 +6023,7 @@
           <a:bodyPr wrap="square" lIns="0" tIns="0" rIns="0" bIns="0" rtlCol="0" anchor="ctr"/>
           <a:lstStyle/>
           <a:p>
-            <a:pPr algn="l" indent="0" marL="0">
+            <a:pPr marL="0" indent="0" algn="l">
               <a:buNone/>
             </a:pPr>
             <a:r>
@@ -5764,7 +6040,7 @@
             <a:endParaRPr lang="en-US" sz="1400" dirty="0"/>
           </a:p>
           <a:p>
-            <a:pPr algn="l" indent="0" marL="0">
+            <a:pPr marL="0" indent="0" algn="l">
               <a:buNone/>
             </a:pPr>
             <a:r>
@@ -5803,7 +6079,7 @@
           <a:bodyPr wrap="square" lIns="0" tIns="0" rIns="0" bIns="0" rtlCol="0" anchor="ctr"/>
           <a:lstStyle/>
           <a:p>
-            <a:pPr algn="l" indent="0" marL="0">
+            <a:pPr marL="0" indent="0" algn="l">
               <a:buNone/>
             </a:pPr>
             <a:r>
@@ -5820,7 +6096,7 @@
             <a:endParaRPr lang="en-US" sz="1400" dirty="0"/>
           </a:p>
           <a:p>
-            <a:pPr algn="l" indent="0" marL="0">
+            <a:pPr marL="0" indent="0" algn="l">
               <a:buNone/>
             </a:pPr>
             <a:r>
@@ -5864,6 +6140,13 @@
             <a:prstDash val="solid"/>
           </a:ln>
         </p:spPr>
+        <p:txBody>
+          <a:bodyPr/>
+          <a:lstStyle/>
+          <a:p>
+            <a:endParaRPr lang="ko-KR" altLang="en-US"/>
+          </a:p>
+        </p:txBody>
       </p:sp>
       <p:sp>
         <p:nvSpPr>
@@ -5886,6 +6169,13 @@
           </a:solidFill>
           <a:ln/>
         </p:spPr>
+        <p:txBody>
+          <a:bodyPr/>
+          <a:lstStyle/>
+          <a:p>
+            <a:endParaRPr lang="ko-KR" altLang="en-US"/>
+          </a:p>
+        </p:txBody>
       </p:sp>
       <p:sp>
         <p:nvSpPr>
@@ -5908,7 +6198,7 @@
           <a:bodyPr wrap="square" lIns="1016" tIns="1016" rIns="1016" bIns="1016" rtlCol="0" anchor="ctr"/>
           <a:lstStyle/>
           <a:p>
-            <a:pPr algn="ctr" indent="0" marL="0">
+            <a:pPr marL="0" indent="0" algn="ctr">
               <a:buNone/>
             </a:pPr>
             <a:r>
@@ -5947,7 +6237,7 @@
           <a:bodyPr wrap="square" lIns="0" tIns="0" rIns="0" bIns="0" rtlCol="0" anchor="ctr"/>
           <a:lstStyle/>
           <a:p>
-            <a:pPr algn="l" indent="0" marL="0">
+            <a:pPr marL="0" indent="0" algn="l">
               <a:buNone/>
             </a:pPr>
             <a:r>
@@ -5986,7 +6276,7 @@
           <a:bodyPr wrap="square" lIns="0" tIns="0" rIns="0" bIns="0" rtlCol="0" anchor="ctr"/>
           <a:lstStyle/>
           <a:p>
-            <a:pPr algn="l" indent="0" marL="0">
+            <a:pPr marL="0" indent="0" algn="l">
               <a:buNone/>
             </a:pPr>
             <a:r>
@@ -6003,7 +6293,7 @@
             <a:endParaRPr lang="en-US" sz="1400" dirty="0"/>
           </a:p>
           <a:p>
-            <a:pPr algn="l" indent="0" marL="0">
+            <a:pPr marL="0" indent="0" algn="l">
               <a:buNone/>
             </a:pPr>
             <a:r>
@@ -6042,7 +6332,7 @@
           <a:bodyPr wrap="square" lIns="0" tIns="0" rIns="0" bIns="0" rtlCol="0" anchor="ctr"/>
           <a:lstStyle/>
           <a:p>
-            <a:pPr algn="l" indent="0" marL="0">
+            <a:pPr marL="0" indent="0" algn="l">
               <a:buNone/>
             </a:pPr>
             <a:r>
@@ -6086,6 +6376,13 @@
             <a:prstDash val="solid"/>
           </a:ln>
         </p:spPr>
+        <p:txBody>
+          <a:bodyPr/>
+          <a:lstStyle/>
+          <a:p>
+            <a:endParaRPr lang="ko-KR" altLang="en-US"/>
+          </a:p>
+        </p:txBody>
       </p:sp>
       <p:sp>
         <p:nvSpPr>
@@ -6108,6 +6405,13 @@
           </a:solidFill>
           <a:ln/>
         </p:spPr>
+        <p:txBody>
+          <a:bodyPr/>
+          <a:lstStyle/>
+          <a:p>
+            <a:endParaRPr lang="ko-KR" altLang="en-US"/>
+          </a:p>
+        </p:txBody>
       </p:sp>
       <p:sp>
         <p:nvSpPr>
@@ -6130,7 +6434,7 @@
           <a:bodyPr wrap="square" lIns="1016" tIns="1016" rIns="1016" bIns="1016" rtlCol="0" anchor="ctr"/>
           <a:lstStyle/>
           <a:p>
-            <a:pPr algn="ctr" indent="0" marL="0">
+            <a:pPr marL="0" indent="0" algn="ctr">
               <a:buNone/>
             </a:pPr>
             <a:r>
@@ -6169,7 +6473,7 @@
           <a:bodyPr wrap="square" lIns="0" tIns="0" rIns="0" bIns="0" rtlCol="0" anchor="ctr"/>
           <a:lstStyle/>
           <a:p>
-            <a:pPr algn="l" indent="0" marL="0">
+            <a:pPr marL="0" indent="0" algn="l">
               <a:buNone/>
             </a:pPr>
             <a:r>
@@ -6208,7 +6512,7 @@
           <a:bodyPr wrap="square" lIns="0" tIns="0" rIns="0" bIns="0" rtlCol="0" anchor="ctr"/>
           <a:lstStyle/>
           <a:p>
-            <a:pPr algn="l" indent="0" marL="0">
+            <a:pPr marL="0" indent="0" algn="l">
               <a:buNone/>
             </a:pPr>
             <a:r>
@@ -6225,7 +6529,7 @@
             <a:endParaRPr lang="en-US" sz="1400" dirty="0"/>
           </a:p>
           <a:p>
-            <a:pPr algn="l" indent="0" marL="0">
+            <a:pPr marL="0" indent="0" algn="l">
               <a:buNone/>
             </a:pPr>
             <a:r>
@@ -6242,7 +6546,7 @@
             <a:endParaRPr lang="en-US" sz="1400" dirty="0"/>
           </a:p>
           <a:p>
-            <a:pPr algn="l" indent="0" marL="0">
+            <a:pPr marL="0" indent="0" algn="l">
               <a:buNone/>
             </a:pPr>
             <a:r>
@@ -6281,7 +6585,7 @@
           <a:bodyPr wrap="square" lIns="0" tIns="0" rIns="0" bIns="0" rtlCol="0" anchor="ctr"/>
           <a:lstStyle/>
           <a:p>
-            <a:pPr algn="l" indent="0" marL="0">
+            <a:pPr marL="0" indent="0" algn="l">
               <a:buNone/>
             </a:pPr>
             <a:r>
@@ -6320,7 +6624,7 @@
           <a:bodyPr wrap="square" lIns="0" tIns="0" rIns="0" bIns="0" rtlCol="0" anchor="ctr"/>
           <a:lstStyle/>
           <a:p>
-            <a:pPr algn="l" indent="0" marL="0">
+            <a:pPr marL="0" indent="0" algn="l">
               <a:buNone/>
             </a:pPr>
             <a:r>
@@ -6364,6 +6668,13 @@
             <a:prstDash val="solid"/>
           </a:ln>
         </p:spPr>
+        <p:txBody>
+          <a:bodyPr/>
+          <a:lstStyle/>
+          <a:p>
+            <a:endParaRPr lang="ko-KR" altLang="en-US"/>
+          </a:p>
+        </p:txBody>
       </p:sp>
       <p:sp>
         <p:nvSpPr>
@@ -6391,6 +6702,13 @@
             <a:prstDash val="solid"/>
           </a:ln>
         </p:spPr>
+        <p:txBody>
+          <a:bodyPr/>
+          <a:lstStyle/>
+          <a:p>
+            <a:endParaRPr lang="ko-KR" altLang="en-US"/>
+          </a:p>
+        </p:txBody>
       </p:sp>
       <p:sp>
         <p:nvSpPr>
@@ -6413,6 +6731,13 @@
           </a:solidFill>
           <a:ln/>
         </p:spPr>
+        <p:txBody>
+          <a:bodyPr/>
+          <a:lstStyle/>
+          <a:p>
+            <a:endParaRPr lang="ko-KR" altLang="en-US"/>
+          </a:p>
+        </p:txBody>
       </p:sp>
       <p:sp>
         <p:nvSpPr>
@@ -6435,7 +6760,7 @@
           <a:bodyPr wrap="square" lIns="1016" tIns="1016" rIns="1016" bIns="1016" rtlCol="0" anchor="ctr"/>
           <a:lstStyle/>
           <a:p>
-            <a:pPr algn="ctr" indent="0" marL="0">
+            <a:pPr marL="0" indent="0" algn="ctr">
               <a:buNone/>
             </a:pPr>
             <a:r>
@@ -6474,7 +6799,7 @@
           <a:bodyPr wrap="square" lIns="0" tIns="0" rIns="0" bIns="0" rtlCol="0" anchor="t"/>
           <a:lstStyle/>
           <a:p>
-            <a:pPr algn="l" indent="0" marL="0">
+            <a:pPr marL="0" indent="0" algn="l">
               <a:buNone/>
             </a:pPr>
             <a:r>
@@ -6491,7 +6816,7 @@
             <a:endParaRPr lang="en-US" sz="1400" dirty="0"/>
           </a:p>
           <a:p>
-            <a:pPr algn="l" indent="0" marL="0">
+            <a:pPr marL="0" indent="0" algn="l">
               <a:buNone/>
             </a:pPr>
             <a:r>
@@ -6535,6 +6860,13 @@
             <a:prstDash val="solid"/>
           </a:ln>
         </p:spPr>
+        <p:txBody>
+          <a:bodyPr/>
+          <a:lstStyle/>
+          <a:p>
+            <a:endParaRPr lang="ko-KR" altLang="en-US"/>
+          </a:p>
+        </p:txBody>
       </p:sp>
       <p:sp>
         <p:nvSpPr>
@@ -6557,6 +6889,13 @@
           </a:solidFill>
           <a:ln/>
         </p:spPr>
+        <p:txBody>
+          <a:bodyPr/>
+          <a:lstStyle/>
+          <a:p>
+            <a:endParaRPr lang="ko-KR" altLang="en-US"/>
+          </a:p>
+        </p:txBody>
       </p:sp>
       <p:sp>
         <p:nvSpPr>
@@ -6579,7 +6918,7 @@
           <a:bodyPr wrap="square" lIns="1016" tIns="1016" rIns="1016" bIns="1016" rtlCol="0" anchor="ctr"/>
           <a:lstStyle/>
           <a:p>
-            <a:pPr algn="ctr" indent="0" marL="0">
+            <a:pPr marL="0" indent="0" algn="ctr">
               <a:buNone/>
             </a:pPr>
             <a:r>
@@ -6618,7 +6957,7 @@
           <a:bodyPr wrap="square" lIns="0" tIns="0" rIns="0" bIns="0" rtlCol="0" anchor="t"/>
           <a:lstStyle/>
           <a:p>
-            <a:pPr algn="l" indent="0" marL="0">
+            <a:pPr marL="0" indent="0" algn="l">
               <a:buNone/>
             </a:pPr>
             <a:r>
@@ -6635,7 +6974,7 @@
             <a:endParaRPr lang="en-US" sz="1400" dirty="0"/>
           </a:p>
           <a:p>
-            <a:pPr algn="l" indent="0" marL="0">
+            <a:pPr marL="0" indent="0" algn="l">
               <a:buNone/>
             </a:pPr>
             <a:r>
@@ -6676,6 +7015,13 @@
             <a:tailEnd type="triangle"/>
           </a:ln>
         </p:spPr>
+        <p:txBody>
+          <a:bodyPr/>
+          <a:lstStyle/>
+          <a:p>
+            <a:endParaRPr lang="ko-KR" altLang="en-US"/>
+          </a:p>
+        </p:txBody>
       </p:sp>
       <p:sp>
         <p:nvSpPr>
@@ -6698,7 +7044,7 @@
           <a:bodyPr wrap="square" lIns="0" tIns="0" rIns="0" bIns="0" rtlCol="0" anchor="ctr"/>
           <a:lstStyle/>
           <a:p>
-            <a:pPr algn="ctr" indent="0" marL="0">
+            <a:pPr marL="0" indent="0" algn="ctr">
               <a:buNone/>
             </a:pPr>
             <a:r>
@@ -6737,7 +7083,7 @@
           <a:bodyPr wrap="square" lIns="0" tIns="0" rIns="0" bIns="0" rtlCol="0" anchor="ctr"/>
           <a:lstStyle/>
           <a:p>
-            <a:pPr algn="ctr" indent="0" marL="0">
+            <a:pPr marL="0" indent="0" algn="ctr">
               <a:buNone/>
             </a:pPr>
             <a:r>
@@ -6776,6 +7122,13 @@
           </a:solidFill>
           <a:ln/>
         </p:spPr>
+        <p:txBody>
+          <a:bodyPr/>
+          <a:lstStyle/>
+          <a:p>
+            <a:endParaRPr lang="ko-KR" altLang="en-US"/>
+          </a:p>
+        </p:txBody>
       </p:sp>
       <p:sp>
         <p:nvSpPr>
@@ -6798,7 +7151,7 @@
           <a:bodyPr wrap="square" lIns="1016" tIns="1016" rIns="1016" bIns="1016" rtlCol="0" anchor="ctr"/>
           <a:lstStyle/>
           <a:p>
-            <a:pPr algn="ctr" indent="0" marL="0">
+            <a:pPr marL="0" indent="0" algn="ctr">
               <a:buNone/>
             </a:pPr>
             <a:r>
@@ -6837,6 +7190,13 @@
           </a:solidFill>
           <a:ln/>
         </p:spPr>
+        <p:txBody>
+          <a:bodyPr/>
+          <a:lstStyle/>
+          <a:p>
+            <a:endParaRPr lang="ko-KR" altLang="en-US"/>
+          </a:p>
+        </p:txBody>
       </p:sp>
       <p:sp>
         <p:nvSpPr>
@@ -6859,7 +7219,7 @@
           <a:bodyPr wrap="square" lIns="1016" tIns="1016" rIns="1016" bIns="1016" rtlCol="0" anchor="ctr"/>
           <a:lstStyle/>
           <a:p>
-            <a:pPr algn="ctr" indent="0" marL="0">
+            <a:pPr marL="0" indent="0" algn="ctr">
               <a:buNone/>
             </a:pPr>
             <a:r>
@@ -6898,6 +7258,13 @@
           </a:solidFill>
           <a:ln/>
         </p:spPr>
+        <p:txBody>
+          <a:bodyPr/>
+          <a:lstStyle/>
+          <a:p>
+            <a:endParaRPr lang="ko-KR" altLang="en-US"/>
+          </a:p>
+        </p:txBody>
       </p:sp>
       <p:sp>
         <p:nvSpPr>
@@ -6920,7 +7287,7 @@
           <a:bodyPr wrap="square" lIns="1016" tIns="1016" rIns="1016" bIns="1016" rtlCol="0" anchor="ctr"/>
           <a:lstStyle/>
           <a:p>
-            <a:pPr algn="ctr" indent="0" marL="0">
+            <a:pPr marL="0" indent="0" algn="ctr">
               <a:buNone/>
             </a:pPr>
             <a:r>
@@ -6959,6 +7326,13 @@
           </a:solidFill>
           <a:ln/>
         </p:spPr>
+        <p:txBody>
+          <a:bodyPr/>
+          <a:lstStyle/>
+          <a:p>
+            <a:endParaRPr lang="ko-KR" altLang="en-US"/>
+          </a:p>
+        </p:txBody>
       </p:sp>
       <p:sp>
         <p:nvSpPr>
@@ -6981,7 +7355,7 @@
           <a:bodyPr wrap="square" lIns="1016" tIns="1016" rIns="1016" bIns="1016" rtlCol="0" anchor="ctr"/>
           <a:lstStyle/>
           <a:p>
-            <a:pPr algn="ctr" indent="0" marL="0">
+            <a:pPr marL="0" indent="0" algn="ctr">
               <a:buNone/>
             </a:pPr>
             <a:r>
@@ -7020,6 +7394,13 @@
           </a:solidFill>
           <a:ln/>
         </p:spPr>
+        <p:txBody>
+          <a:bodyPr/>
+          <a:lstStyle/>
+          <a:p>
+            <a:endParaRPr lang="ko-KR" altLang="en-US"/>
+          </a:p>
+        </p:txBody>
       </p:sp>
       <p:sp>
         <p:nvSpPr>
@@ -7042,7 +7423,7 @@
           <a:bodyPr wrap="square" lIns="1016" tIns="1016" rIns="1016" bIns="1016" rtlCol="0" anchor="ctr"/>
           <a:lstStyle/>
           <a:p>
-            <a:pPr algn="ctr" indent="0" marL="0">
+            <a:pPr marL="0" indent="0" algn="ctr">
               <a:buNone/>
             </a:pPr>
             <a:r>
@@ -7081,6 +7462,13 @@
           </a:solidFill>
           <a:ln/>
         </p:spPr>
+        <p:txBody>
+          <a:bodyPr/>
+          <a:lstStyle/>
+          <a:p>
+            <a:endParaRPr lang="ko-KR" altLang="en-US"/>
+          </a:p>
+        </p:txBody>
       </p:sp>
       <p:sp>
         <p:nvSpPr>
@@ -7103,7 +7491,7 @@
           <a:bodyPr wrap="square" lIns="1016" tIns="1016" rIns="1016" bIns="1016" rtlCol="0" anchor="ctr"/>
           <a:lstStyle/>
           <a:p>
-            <a:pPr algn="ctr" indent="0" marL="0">
+            <a:pPr marL="0" indent="0" algn="ctr">
               <a:buNone/>
             </a:pPr>
             <a:r>
@@ -7147,6 +7535,13 @@
             <a:prstDash val="solid"/>
           </a:ln>
         </p:spPr>
+        <p:txBody>
+          <a:bodyPr/>
+          <a:lstStyle/>
+          <a:p>
+            <a:endParaRPr lang="ko-KR" altLang="en-US"/>
+          </a:p>
+        </p:txBody>
       </p:sp>
       <p:sp>
         <p:nvSpPr>
@@ -7169,7 +7564,7 @@
           <a:bodyPr wrap="square" lIns="254" tIns="254" rIns="254" bIns="254" rtlCol="0" anchor="t"/>
           <a:lstStyle/>
           <a:p>
-            <a:pPr indent="0" marL="0">
+            <a:pPr marL="0" indent="0">
               <a:lnSpc>
                 <a:spcPct val="105000"/>
               </a:lnSpc>
@@ -7189,7 +7584,7 @@
             <a:endParaRPr lang="en-US" sz="1400" dirty="0"/>
           </a:p>
           <a:p>
-            <a:pPr indent="0" marL="0">
+            <a:pPr marL="0" indent="0">
               <a:lnSpc>
                 <a:spcPct val="105000"/>
               </a:lnSpc>
@@ -7209,7 +7604,7 @@
             <a:endParaRPr lang="en-US" sz="1400" dirty="0"/>
           </a:p>
           <a:p>
-            <a:pPr indent="0" marL="0">
+            <a:pPr marL="0" indent="0">
               <a:lnSpc>
                 <a:spcPct val="105000"/>
               </a:lnSpc>
@@ -7229,7 +7624,7 @@
             <a:endParaRPr lang="en-US" sz="1400" dirty="0"/>
           </a:p>
           <a:p>
-            <a:pPr indent="0" marL="0">
+            <a:pPr marL="0" indent="0">
               <a:lnSpc>
                 <a:spcPct val="105000"/>
               </a:lnSpc>
@@ -7249,7 +7644,7 @@
             <a:endParaRPr lang="en-US" sz="1400" dirty="0"/>
           </a:p>
           <a:p>
-            <a:pPr indent="0" marL="0">
+            <a:pPr marL="0" indent="0">
               <a:lnSpc>
                 <a:spcPct val="105000"/>
               </a:lnSpc>
@@ -7269,7 +7664,7 @@
             <a:endParaRPr lang="en-US" sz="1400" dirty="0"/>
           </a:p>
           <a:p>
-            <a:pPr indent="0" marL="0">
+            <a:pPr marL="0" indent="0">
               <a:lnSpc>
                 <a:spcPct val="105000"/>
               </a:lnSpc>
@@ -7289,7 +7684,7 @@
             <a:endParaRPr lang="en-US" sz="1400" dirty="0"/>
           </a:p>
           <a:p>
-            <a:pPr indent="0" marL="0">
+            <a:pPr marL="0" indent="0">
               <a:lnSpc>
                 <a:spcPct val="105000"/>
               </a:lnSpc>
@@ -7309,7 +7704,7 @@
             <a:endParaRPr lang="en-US" sz="1400" dirty="0"/>
           </a:p>
           <a:p>
-            <a:pPr indent="0" marL="0">
+            <a:pPr marL="0" indent="0">
               <a:lnSpc>
                 <a:spcPct val="105000"/>
               </a:lnSpc>
@@ -7329,7 +7724,7 @@
             <a:endParaRPr lang="en-US" sz="1400" dirty="0"/>
           </a:p>
           <a:p>
-            <a:pPr indent="0" marL="0">
+            <a:pPr marL="0" indent="0">
               <a:lnSpc>
                 <a:spcPct val="105000"/>
               </a:lnSpc>
@@ -7349,7 +7744,7 @@
             <a:endParaRPr lang="en-US" sz="1400" dirty="0"/>
           </a:p>
           <a:p>
-            <a:pPr indent="0" marL="0">
+            <a:pPr marL="0" indent="0">
               <a:lnSpc>
                 <a:spcPct val="105000"/>
               </a:lnSpc>
@@ -7369,7 +7764,7 @@
             <a:endParaRPr lang="en-US" sz="1400" dirty="0"/>
           </a:p>
           <a:p>
-            <a:pPr indent="0" marL="0">
+            <a:pPr marL="0" indent="0">
               <a:lnSpc>
                 <a:spcPct val="105000"/>
               </a:lnSpc>
@@ -7389,7 +7784,7 @@
             <a:endParaRPr lang="en-US" sz="1400" dirty="0"/>
           </a:p>
           <a:p>
-            <a:pPr indent="0" marL="0">
+            <a:pPr marL="0" indent="0">
               <a:lnSpc>
                 <a:spcPct val="105000"/>
               </a:lnSpc>
@@ -7431,7 +7826,7 @@
           <a:bodyPr wrap="square" lIns="0" tIns="0" rIns="0" bIns="0" rtlCol="0" anchor="ctr"/>
           <a:lstStyle/>
           <a:p>
-            <a:pPr algn="l" indent="0" marL="0">
+            <a:pPr marL="0" indent="0" algn="l">
               <a:buNone/>
             </a:pPr>
             <a:r>
@@ -7475,6 +7870,13 @@
             <a:prstDash val="solid"/>
           </a:ln>
         </p:spPr>
+        <p:txBody>
+          <a:bodyPr/>
+          <a:lstStyle/>
+          <a:p>
+            <a:endParaRPr lang="ko-KR" altLang="en-US"/>
+          </a:p>
+        </p:txBody>
       </p:sp>
       <p:sp>
         <p:nvSpPr>
@@ -7495,6 +7897,13 @@
           </a:solidFill>
           <a:ln/>
         </p:spPr>
+        <p:txBody>
+          <a:bodyPr/>
+          <a:lstStyle/>
+          <a:p>
+            <a:endParaRPr lang="ko-KR" altLang="en-US"/>
+          </a:p>
+        </p:txBody>
       </p:sp>
       <p:sp>
         <p:nvSpPr>
@@ -7517,7 +7926,7 @@
           <a:bodyPr wrap="square" lIns="0" tIns="0" rIns="0" bIns="0" rtlCol="0" anchor="ctr"/>
           <a:lstStyle/>
           <a:p>
-            <a:pPr algn="l" indent="0" marL="0">
+            <a:pPr marL="0" indent="0" algn="l">
               <a:buNone/>
             </a:pPr>
             <a:r>
@@ -7534,7 +7943,7 @@
             <a:endParaRPr lang="en-US" sz="1400" dirty="0"/>
           </a:p>
           <a:p>
-            <a:pPr algn="l" indent="0" marL="0">
+            <a:pPr marL="0" indent="0" algn="l">
               <a:buNone/>
             </a:pPr>
             <a:r>
@@ -7554,7 +7963,7 @@
       </p:sp>
       <p:sp>
         <p:nvSpPr>
-          <p:cNvPr id="25" name="Slide Number Placeholder 0"/>
+          <p:cNvPr id="4" name="Slide Number Placeholder 0"/>
           <p:cNvSpPr>
             <a:spLocks noGrp="1"/>
           </p:cNvSpPr>
@@ -7572,7 +7981,7 @@
           </a:prstGeom>
           <a:extLst>
             <a:ext uri="{C572A759-6A51-4108-AA02-DFA0A04FC94B}">
-              <ma14:wrappingTextBoxFlag xmlns:ma14="http://schemas.microsoft.com/office/mac/drawingml/2011/main" val="0"/>
+              <ma14:wrappingTextBoxFlag xmlns="" xmlns:ma14="http://schemas.microsoft.com/office/mac/drawingml/2011/main" val="0"/>
             </a:ext>
           </a:extLst>
         </p:spPr>
@@ -7593,7 +8002,7 @@
           <a:p>
             <a:pPr algn="r"/>
             <a:fld id="{F7021451-1387-4CA6-816F-3879F97B5CBC}" type="slidenum">
-              <a:rPr b="0" lang="en-US"/>
+              <a:rPr lang="en-US" b="0"/>
               <a:t>2</a:t>
             </a:fld>
             <a:endParaRPr lang="en-US"/>
@@ -7628,7 +8037,9 @@
       <p:sp>
         <p:nvSpPr>
           <p:cNvPr id="2" name="Text 2"/>
-          <p:cNvSpPr/>
+          <p:cNvSpPr>
+            <a:spLocks noGrp="1"/>
+          </p:cNvSpPr>
           <p:nvPr>
             <p:ph type="title"/>
           </p:nvPr>
@@ -7648,7 +8059,7 @@
           <a:bodyPr wrap="square" lIns="0" tIns="0" rIns="0" bIns="0" rtlCol="0" anchor="ctr"/>
           <a:lstStyle/>
           <a:p>
-            <a:pPr algn="l" indent="0" marL="0">
+            <a:pPr marL="0" indent="0" algn="l">
               <a:buNone/>
             </a:pPr>
             <a:r>
@@ -7687,7 +8098,7 @@
           <a:bodyPr wrap="square" lIns="0" tIns="0" rIns="0" bIns="0" rtlCol="0" anchor="ctr"/>
           <a:lstStyle/>
           <a:p>
-            <a:pPr indent="0" marL="0">
+            <a:pPr marL="0" indent="0">
               <a:buNone/>
             </a:pPr>
             <a:r>
@@ -7726,6 +8137,13 @@
           </a:solidFill>
           <a:ln/>
         </p:spPr>
+        <p:txBody>
+          <a:bodyPr/>
+          <a:lstStyle/>
+          <a:p>
+            <a:endParaRPr lang="ko-KR" altLang="en-US"/>
+          </a:p>
+        </p:txBody>
       </p:sp>
       <p:sp>
         <p:nvSpPr>
@@ -7748,7 +8166,7 @@
           <a:bodyPr wrap="square" lIns="1016" tIns="1016" rIns="1016" bIns="1016" rtlCol="0" anchor="ctr"/>
           <a:lstStyle/>
           <a:p>
-            <a:pPr algn="ctr" indent="0" marL="0">
+            <a:pPr marL="0" indent="0" algn="ctr">
               <a:buNone/>
             </a:pPr>
             <a:r>
@@ -7789,6 +8207,13 @@
             <a:tailEnd type="triangle"/>
           </a:ln>
         </p:spPr>
+        <p:txBody>
+          <a:bodyPr/>
+          <a:lstStyle/>
+          <a:p>
+            <a:endParaRPr lang="ko-KR" altLang="en-US"/>
+          </a:p>
+        </p:txBody>
       </p:sp>
       <p:sp>
         <p:nvSpPr>
@@ -7816,6 +8241,13 @@
             <a:prstDash val="solid"/>
           </a:ln>
         </p:spPr>
+        <p:txBody>
+          <a:bodyPr/>
+          <a:lstStyle/>
+          <a:p>
+            <a:endParaRPr lang="ko-KR" altLang="en-US"/>
+          </a:p>
+        </p:txBody>
       </p:sp>
       <p:sp>
         <p:nvSpPr>
@@ -7838,7 +8270,7 @@
           <a:bodyPr wrap="square" lIns="1016" tIns="1016" rIns="1016" bIns="1016" rtlCol="0" anchor="ctr"/>
           <a:lstStyle/>
           <a:p>
-            <a:pPr algn="ctr" indent="0" marL="0">
+            <a:pPr marL="0" indent="0" algn="ctr">
               <a:buNone/>
             </a:pPr>
             <a:r>
@@ -7879,6 +8311,13 @@
             <a:tailEnd type="triangle"/>
           </a:ln>
         </p:spPr>
+        <p:txBody>
+          <a:bodyPr/>
+          <a:lstStyle/>
+          <a:p>
+            <a:endParaRPr lang="ko-KR" altLang="en-US"/>
+          </a:p>
+        </p:txBody>
       </p:sp>
       <p:sp>
         <p:nvSpPr>
@@ -7901,7 +8340,7 @@
           <a:bodyPr wrap="square" lIns="0" tIns="0" rIns="0" bIns="0" rtlCol="0" anchor="ctr"/>
           <a:lstStyle/>
           <a:p>
-            <a:pPr algn="l" indent="0" marL="0">
+            <a:pPr marL="0" indent="0" algn="l">
               <a:buNone/>
             </a:pPr>
             <a:r>
@@ -7942,6 +8381,13 @@
             <a:tailEnd type="triangle"/>
           </a:ln>
         </p:spPr>
+        <p:txBody>
+          <a:bodyPr/>
+          <a:lstStyle/>
+          <a:p>
+            <a:endParaRPr lang="ko-KR" altLang="en-US"/>
+          </a:p>
+        </p:txBody>
       </p:sp>
       <p:sp>
         <p:nvSpPr>
@@ -7964,7 +8410,7 @@
           <a:bodyPr wrap="square" lIns="0" tIns="0" rIns="0" bIns="0" rtlCol="0" anchor="ctr"/>
           <a:lstStyle/>
           <a:p>
-            <a:pPr algn="l" indent="0" marL="0">
+            <a:pPr marL="0" indent="0" algn="l">
               <a:buNone/>
             </a:pPr>
             <a:r>
@@ -8003,6 +8449,13 @@
           </a:solidFill>
           <a:ln/>
         </p:spPr>
+        <p:txBody>
+          <a:bodyPr/>
+          <a:lstStyle/>
+          <a:p>
+            <a:endParaRPr lang="ko-KR" altLang="en-US"/>
+          </a:p>
+        </p:txBody>
       </p:sp>
       <p:sp>
         <p:nvSpPr>
@@ -8025,6 +8478,13 @@
           </a:solidFill>
           <a:ln/>
         </p:spPr>
+        <p:txBody>
+          <a:bodyPr/>
+          <a:lstStyle/>
+          <a:p>
+            <a:endParaRPr lang="ko-KR" altLang="en-US"/>
+          </a:p>
+        </p:txBody>
       </p:sp>
       <p:sp>
         <p:nvSpPr>
@@ -8047,7 +8507,7 @@
           <a:bodyPr wrap="square" lIns="1016" tIns="1016" rIns="1016" bIns="1016" rtlCol="0" anchor="ctr"/>
           <a:lstStyle/>
           <a:p>
-            <a:pPr algn="ctr" indent="0" marL="0">
+            <a:pPr marL="0" indent="0" algn="ctr">
               <a:buNone/>
             </a:pPr>
             <a:r>
@@ -8086,7 +8546,7 @@
           <a:bodyPr wrap="square" lIns="0" tIns="0" rIns="0" bIns="0" rtlCol="0" anchor="ctr"/>
           <a:lstStyle/>
           <a:p>
-            <a:pPr indent="0" marL="0">
+            <a:pPr marL="0" indent="0">
               <a:spcAft>
                 <a:spcPts val="400"/>
               </a:spcAft>
@@ -8106,7 +8566,7 @@
             <a:endParaRPr lang="en-US" sz="1800" dirty="0"/>
           </a:p>
           <a:p>
-            <a:pPr indent="0" marL="0">
+            <a:pPr marL="0" indent="0">
               <a:spcAft>
                 <a:spcPts val="400"/>
               </a:spcAft>
@@ -8126,7 +8586,7 @@
             <a:endParaRPr lang="en-US" sz="1800" dirty="0"/>
           </a:p>
           <a:p>
-            <a:pPr indent="0" marL="0">
+            <a:pPr marL="0" indent="0">
               <a:spcAft>
                 <a:spcPts val="400"/>
               </a:spcAft>
@@ -8146,7 +8606,7 @@
             <a:endParaRPr lang="en-US" sz="1800" dirty="0"/>
           </a:p>
           <a:p>
-            <a:pPr indent="0" marL="0">
+            <a:pPr marL="0" indent="0">
               <a:spcAft>
                 <a:spcPts val="400"/>
               </a:spcAft>
@@ -8188,7 +8648,7 @@
           <a:bodyPr wrap="square" lIns="0" tIns="0" rIns="0" bIns="0" rtlCol="0" anchor="ctr"/>
           <a:lstStyle/>
           <a:p>
-            <a:pPr algn="ctr" indent="0" marL="0">
+            <a:pPr marL="0" indent="0" algn="ctr">
               <a:buNone/>
             </a:pPr>
             <a:r>
@@ -8205,7 +8665,7 @@
             <a:endParaRPr lang="en-US" sz="1400" dirty="0"/>
           </a:p>
           <a:p>
-            <a:pPr algn="ctr" indent="0" marL="0">
+            <a:pPr marL="0" indent="0" algn="ctr">
               <a:buNone/>
             </a:pPr>
             <a:r>
@@ -8249,6 +8709,13 @@
             <a:prstDash val="solid"/>
           </a:ln>
         </p:spPr>
+        <p:txBody>
+          <a:bodyPr/>
+          <a:lstStyle/>
+          <a:p>
+            <a:endParaRPr lang="ko-KR" altLang="en-US"/>
+          </a:p>
+        </p:txBody>
       </p:sp>
       <p:sp>
         <p:nvSpPr>
@@ -8271,7 +8738,7 @@
           <a:bodyPr wrap="square" lIns="1016" tIns="1016" rIns="1016" bIns="1016" rtlCol="0" anchor="ctr"/>
           <a:lstStyle/>
           <a:p>
-            <a:pPr algn="ctr" indent="0" marL="0">
+            <a:pPr marL="0" indent="0" algn="ctr">
               <a:buNone/>
             </a:pPr>
             <a:r>
@@ -8315,6 +8782,13 @@
             <a:prstDash val="solid"/>
           </a:ln>
         </p:spPr>
+        <p:txBody>
+          <a:bodyPr/>
+          <a:lstStyle/>
+          <a:p>
+            <a:endParaRPr lang="ko-KR" altLang="en-US"/>
+          </a:p>
+        </p:txBody>
       </p:sp>
       <p:sp>
         <p:nvSpPr>
@@ -8337,6 +8811,13 @@
           </a:solidFill>
           <a:ln/>
         </p:spPr>
+        <p:txBody>
+          <a:bodyPr/>
+          <a:lstStyle/>
+          <a:p>
+            <a:endParaRPr lang="ko-KR" altLang="en-US"/>
+          </a:p>
+        </p:txBody>
       </p:sp>
       <p:sp>
         <p:nvSpPr>
@@ -8359,7 +8840,7 @@
           <a:bodyPr wrap="square" lIns="1016" tIns="1016" rIns="1016" bIns="1016" rtlCol="0" anchor="ctr"/>
           <a:lstStyle/>
           <a:p>
-            <a:pPr algn="ctr" indent="0" marL="0">
+            <a:pPr marL="0" indent="0" algn="ctr">
               <a:buNone/>
             </a:pPr>
             <a:r>
@@ -8398,7 +8879,7 @@
           <a:bodyPr wrap="square" lIns="0" tIns="0" rIns="0" bIns="0" rtlCol="0" anchor="ctr"/>
           <a:lstStyle/>
           <a:p>
-            <a:pPr indent="0" marL="0">
+            <a:pPr marL="0" indent="0">
               <a:buNone/>
             </a:pPr>
             <a:r>
@@ -8415,7 +8896,7 @@
             <a:endParaRPr lang="en-US" sz="1400" dirty="0"/>
           </a:p>
           <a:p>
-            <a:pPr indent="0" marL="0">
+            <a:pPr marL="0" indent="0">
               <a:buNone/>
             </a:pPr>
             <a:r>
@@ -8459,6 +8940,13 @@
             <a:prstDash val="solid"/>
           </a:ln>
         </p:spPr>
+        <p:txBody>
+          <a:bodyPr/>
+          <a:lstStyle/>
+          <a:p>
+            <a:endParaRPr lang="ko-KR" altLang="en-US"/>
+          </a:p>
+        </p:txBody>
       </p:sp>
       <p:sp>
         <p:nvSpPr>
@@ -8481,6 +8969,13 @@
           </a:solidFill>
           <a:ln/>
         </p:spPr>
+        <p:txBody>
+          <a:bodyPr/>
+          <a:lstStyle/>
+          <a:p>
+            <a:endParaRPr lang="ko-KR" altLang="en-US"/>
+          </a:p>
+        </p:txBody>
       </p:sp>
       <p:sp>
         <p:nvSpPr>
@@ -8503,7 +8998,7 @@
           <a:bodyPr wrap="square" lIns="1016" tIns="1016" rIns="1016" bIns="1016" rtlCol="0" anchor="ctr"/>
           <a:lstStyle/>
           <a:p>
-            <a:pPr algn="ctr" indent="0" marL="0">
+            <a:pPr marL="0" indent="0" algn="ctr">
               <a:buNone/>
             </a:pPr>
             <a:r>
@@ -8542,7 +9037,7 @@
           <a:bodyPr wrap="square" lIns="0" tIns="0" rIns="0" bIns="0" rtlCol="0" anchor="ctr"/>
           <a:lstStyle/>
           <a:p>
-            <a:pPr indent="0" marL="0">
+            <a:pPr marL="0" indent="0">
               <a:buNone/>
             </a:pPr>
             <a:r>
@@ -8559,7 +9054,7 @@
             <a:endParaRPr lang="en-US" sz="1400" dirty="0"/>
           </a:p>
           <a:p>
-            <a:pPr indent="0" marL="0">
+            <a:pPr marL="0" indent="0">
               <a:buNone/>
             </a:pPr>
             <a:r>
@@ -8576,7 +9071,7 @@
             <a:endParaRPr lang="en-US" sz="1400" dirty="0"/>
           </a:p>
           <a:p>
-            <a:pPr indent="0" marL="0">
+            <a:pPr marL="0" indent="0">
               <a:buNone/>
             </a:pPr>
             <a:r>
@@ -8615,6 +9110,13 @@
           </a:solidFill>
           <a:ln/>
         </p:spPr>
+        <p:txBody>
+          <a:bodyPr/>
+          <a:lstStyle/>
+          <a:p>
+            <a:endParaRPr lang="ko-KR" altLang="en-US"/>
+          </a:p>
+        </p:txBody>
       </p:sp>
       <p:sp>
         <p:nvSpPr>
@@ -8637,6 +9139,13 @@
           </a:solidFill>
           <a:ln/>
         </p:spPr>
+        <p:txBody>
+          <a:bodyPr/>
+          <a:lstStyle/>
+          <a:p>
+            <a:endParaRPr lang="ko-KR" altLang="en-US"/>
+          </a:p>
+        </p:txBody>
       </p:sp>
       <p:sp>
         <p:nvSpPr>
@@ -8659,7 +9168,7 @@
           <a:bodyPr wrap="square" lIns="1016" tIns="1016" rIns="1016" bIns="1016" rtlCol="0" anchor="ctr"/>
           <a:lstStyle/>
           <a:p>
-            <a:pPr algn="ctr" indent="0" marL="0">
+            <a:pPr marL="0" indent="0" algn="ctr">
               <a:buNone/>
             </a:pPr>
             <a:r>
@@ -8698,7 +9207,7 @@
           <a:bodyPr wrap="square" lIns="0" tIns="0" rIns="0" bIns="0" rtlCol="0" anchor="ctr"/>
           <a:lstStyle/>
           <a:p>
-            <a:pPr indent="0" marL="0">
+            <a:pPr marL="0" indent="0">
               <a:buNone/>
             </a:pPr>
             <a:r>
@@ -8715,7 +9224,7 @@
             <a:endParaRPr lang="en-US" sz="1400" dirty="0"/>
           </a:p>
           <a:p>
-            <a:pPr indent="0" marL="0">
+            <a:pPr marL="0" indent="0">
               <a:buNone/>
             </a:pPr>
             <a:r>
@@ -8759,6 +9268,13 @@
             <a:prstDash val="solid"/>
           </a:ln>
         </p:spPr>
+        <p:txBody>
+          <a:bodyPr/>
+          <a:lstStyle/>
+          <a:p>
+            <a:endParaRPr lang="ko-KR" altLang="en-US"/>
+          </a:p>
+        </p:txBody>
       </p:sp>
       <p:sp>
         <p:nvSpPr>
@@ -8781,7 +9297,7 @@
           <a:bodyPr wrap="square" lIns="0" tIns="0" rIns="0" bIns="0" rtlCol="0" anchor="ctr"/>
           <a:lstStyle/>
           <a:p>
-            <a:pPr algn="l" indent="0" marL="0">
+            <a:pPr marL="0" indent="0" algn="l">
               <a:buNone/>
             </a:pPr>
             <a:r>
@@ -8825,6 +9341,13 @@
             <a:prstDash val="solid"/>
           </a:ln>
         </p:spPr>
+        <p:txBody>
+          <a:bodyPr/>
+          <a:lstStyle/>
+          <a:p>
+            <a:endParaRPr lang="ko-KR" altLang="en-US"/>
+          </a:p>
+        </p:txBody>
       </p:sp>
       <p:sp>
         <p:nvSpPr>
@@ -8847,6 +9370,13 @@
           </a:solidFill>
           <a:ln/>
         </p:spPr>
+        <p:txBody>
+          <a:bodyPr/>
+          <a:lstStyle/>
+          <a:p>
+            <a:endParaRPr lang="ko-KR" altLang="en-US"/>
+          </a:p>
+        </p:txBody>
       </p:sp>
       <p:sp>
         <p:nvSpPr>
@@ -8869,7 +9399,7 @@
           <a:bodyPr wrap="square" lIns="1016" tIns="1016" rIns="1016" bIns="1016" rtlCol="0" anchor="ctr"/>
           <a:lstStyle/>
           <a:p>
-            <a:pPr algn="ctr" indent="0" marL="0">
+            <a:pPr marL="0" indent="0" algn="ctr">
               <a:buNone/>
             </a:pPr>
             <a:r>
@@ -8913,6 +9443,13 @@
             <a:prstDash val="solid"/>
           </a:ln>
         </p:spPr>
+        <p:txBody>
+          <a:bodyPr/>
+          <a:lstStyle/>
+          <a:p>
+            <a:endParaRPr lang="ko-KR" altLang="en-US"/>
+          </a:p>
+        </p:txBody>
       </p:sp>
       <p:sp>
         <p:nvSpPr>
@@ -8935,7 +9472,7 @@
           <a:bodyPr wrap="square" lIns="508" tIns="508" rIns="508" bIns="508" rtlCol="0" anchor="ctr"/>
           <a:lstStyle/>
           <a:p>
-            <a:pPr algn="l" indent="0" marL="0">
+            <a:pPr marL="0" indent="0" algn="l">
               <a:buNone/>
             </a:pPr>
             <a:r>
@@ -8952,7 +9489,7 @@
             <a:endParaRPr lang="en-US" sz="1400" dirty="0"/>
           </a:p>
           <a:p>
-            <a:pPr algn="l" indent="0" marL="0">
+            <a:pPr marL="0" indent="0" algn="l">
               <a:buNone/>
             </a:pPr>
             <a:r>
@@ -8993,6 +9530,13 @@
             <a:tailEnd type="triangle"/>
           </a:ln>
         </p:spPr>
+        <p:txBody>
+          <a:bodyPr/>
+          <a:lstStyle/>
+          <a:p>
+            <a:endParaRPr lang="ko-KR" altLang="en-US"/>
+          </a:p>
+        </p:txBody>
       </p:sp>
       <p:sp>
         <p:nvSpPr>
@@ -9020,6 +9564,13 @@
             <a:prstDash val="solid"/>
           </a:ln>
         </p:spPr>
+        <p:txBody>
+          <a:bodyPr/>
+          <a:lstStyle/>
+          <a:p>
+            <a:endParaRPr lang="ko-KR" altLang="en-US"/>
+          </a:p>
+        </p:txBody>
       </p:sp>
       <p:sp>
         <p:nvSpPr>
@@ -9042,7 +9593,7 @@
           <a:bodyPr wrap="square" lIns="1016" tIns="1016" rIns="1016" bIns="1016" rtlCol="0" anchor="ctr"/>
           <a:lstStyle/>
           <a:p>
-            <a:pPr algn="ctr" indent="0" marL="0">
+            <a:pPr marL="0" indent="0" algn="ctr">
               <a:buNone/>
             </a:pPr>
             <a:r>
@@ -9081,6 +9632,13 @@
           </a:solidFill>
           <a:ln/>
         </p:spPr>
+        <p:txBody>
+          <a:bodyPr/>
+          <a:lstStyle/>
+          <a:p>
+            <a:endParaRPr lang="ko-KR" altLang="en-US"/>
+          </a:p>
+        </p:txBody>
       </p:sp>
       <p:sp>
         <p:nvSpPr>
@@ -9103,7 +9661,7 @@
           <a:bodyPr wrap="square" lIns="1016" tIns="1016" rIns="1016" bIns="1016" rtlCol="0" anchor="ctr"/>
           <a:lstStyle/>
           <a:p>
-            <a:pPr algn="ctr" indent="0" marL="0">
+            <a:pPr marL="0" indent="0" algn="ctr">
               <a:buNone/>
             </a:pPr>
             <a:r>
@@ -9147,6 +9705,13 @@
             <a:prstDash val="solid"/>
           </a:ln>
         </p:spPr>
+        <p:txBody>
+          <a:bodyPr/>
+          <a:lstStyle/>
+          <a:p>
+            <a:endParaRPr lang="ko-KR" altLang="en-US"/>
+          </a:p>
+        </p:txBody>
       </p:sp>
       <p:sp>
         <p:nvSpPr>
@@ -9169,7 +9734,7 @@
           <a:bodyPr wrap="square" lIns="1016" tIns="1016" rIns="1016" bIns="1016" rtlCol="0" anchor="ctr"/>
           <a:lstStyle/>
           <a:p>
-            <a:pPr algn="ctr" indent="0" marL="0">
+            <a:pPr marL="0" indent="0" algn="ctr">
               <a:buNone/>
             </a:pPr>
             <a:r>
@@ -9210,6 +9775,13 @@
             <a:tailEnd type="triangle"/>
           </a:ln>
         </p:spPr>
+        <p:txBody>
+          <a:bodyPr/>
+          <a:lstStyle/>
+          <a:p>
+            <a:endParaRPr lang="ko-KR" altLang="en-US"/>
+          </a:p>
+        </p:txBody>
       </p:sp>
       <p:sp>
         <p:nvSpPr>
@@ -9232,7 +9804,7 @@
           <a:bodyPr wrap="square" lIns="0" tIns="0" rIns="0" bIns="0" rtlCol="0" anchor="ctr"/>
           <a:lstStyle/>
           <a:p>
-            <a:pPr algn="ctr" indent="0" marL="0">
+            <a:pPr marL="0" indent="0" algn="ctr">
               <a:buNone/>
             </a:pPr>
             <a:r>
@@ -9273,6 +9845,13 @@
             <a:tailEnd type="triangle"/>
           </a:ln>
         </p:spPr>
+        <p:txBody>
+          <a:bodyPr/>
+          <a:lstStyle/>
+          <a:p>
+            <a:endParaRPr lang="ko-KR" altLang="en-US"/>
+          </a:p>
+        </p:txBody>
       </p:sp>
       <p:sp>
         <p:nvSpPr>
@@ -9295,7 +9874,7 @@
           <a:bodyPr wrap="square" lIns="0" tIns="0" rIns="0" bIns="0" rtlCol="0" anchor="ctr"/>
           <a:lstStyle/>
           <a:p>
-            <a:pPr algn="ctr" indent="0" marL="0">
+            <a:pPr marL="0" indent="0" algn="ctr">
               <a:buNone/>
             </a:pPr>
             <a:r>
@@ -9334,7 +9913,7 @@
           <a:bodyPr wrap="square" lIns="0" tIns="0" rIns="0" bIns="0" rtlCol="0" anchor="ctr"/>
           <a:lstStyle/>
           <a:p>
-            <a:pPr algn="l" indent="0" marL="0">
+            <a:pPr marL="0" indent="0" algn="l">
               <a:buNone/>
             </a:pPr>
             <a:r>
@@ -9378,6 +9957,13 @@
             <a:prstDash val="solid"/>
           </a:ln>
         </p:spPr>
+        <p:txBody>
+          <a:bodyPr/>
+          <a:lstStyle/>
+          <a:p>
+            <a:endParaRPr lang="ko-KR" altLang="en-US"/>
+          </a:p>
+        </p:txBody>
       </p:sp>
       <p:sp>
         <p:nvSpPr>
@@ -9400,6 +9986,13 @@
           </a:solidFill>
           <a:ln/>
         </p:spPr>
+        <p:txBody>
+          <a:bodyPr/>
+          <a:lstStyle/>
+          <a:p>
+            <a:endParaRPr lang="ko-KR" altLang="en-US"/>
+          </a:p>
+        </p:txBody>
       </p:sp>
       <p:sp>
         <p:nvSpPr>
@@ -9422,7 +10015,7 @@
           <a:bodyPr wrap="square" lIns="1016" tIns="1016" rIns="1016" bIns="1016" rtlCol="0" anchor="ctr"/>
           <a:lstStyle/>
           <a:p>
-            <a:pPr algn="ctr" indent="0" marL="0">
+            <a:pPr marL="0" indent="0" algn="ctr">
               <a:buNone/>
             </a:pPr>
             <a:r>
@@ -9466,6 +10059,13 @@
             <a:prstDash val="solid"/>
           </a:ln>
         </p:spPr>
+        <p:txBody>
+          <a:bodyPr/>
+          <a:lstStyle/>
+          <a:p>
+            <a:endParaRPr lang="ko-KR" altLang="en-US"/>
+          </a:p>
+        </p:txBody>
       </p:sp>
       <p:sp>
         <p:nvSpPr>
@@ -9488,7 +10088,7 @@
           <a:bodyPr wrap="square" lIns="508" tIns="508" rIns="508" bIns="508" rtlCol="0" anchor="ctr"/>
           <a:lstStyle/>
           <a:p>
-            <a:pPr algn="l" indent="0" marL="0">
+            <a:pPr marL="0" indent="0" algn="l">
               <a:buNone/>
             </a:pPr>
             <a:r>
@@ -9505,7 +10105,7 @@
             <a:endParaRPr lang="en-US" sz="1400" dirty="0"/>
           </a:p>
           <a:p>
-            <a:pPr algn="l" indent="0" marL="0">
+            <a:pPr marL="0" indent="0" algn="l">
               <a:buNone/>
             </a:pPr>
             <a:r>
@@ -9546,6 +10146,13 @@
             <a:tailEnd type="triangle"/>
           </a:ln>
         </p:spPr>
+        <p:txBody>
+          <a:bodyPr/>
+          <a:lstStyle/>
+          <a:p>
+            <a:endParaRPr lang="ko-KR" altLang="en-US"/>
+          </a:p>
+        </p:txBody>
       </p:sp>
       <p:sp>
         <p:nvSpPr>
@@ -9573,6 +10180,13 @@
             <a:prstDash val="solid"/>
           </a:ln>
         </p:spPr>
+        <p:txBody>
+          <a:bodyPr/>
+          <a:lstStyle/>
+          <a:p>
+            <a:endParaRPr lang="ko-KR" altLang="en-US"/>
+          </a:p>
+        </p:txBody>
       </p:sp>
       <p:sp>
         <p:nvSpPr>
@@ -9595,7 +10209,7 @@
           <a:bodyPr wrap="square" lIns="1016" tIns="1016" rIns="1016" bIns="1016" rtlCol="0" anchor="ctr"/>
           <a:lstStyle/>
           <a:p>
-            <a:pPr algn="ctr" indent="0" marL="0">
+            <a:pPr marL="0" indent="0" algn="ctr">
               <a:buNone/>
             </a:pPr>
             <a:r>
@@ -9639,6 +10253,13 @@
             <a:prstDash val="solid"/>
           </a:ln>
         </p:spPr>
+        <p:txBody>
+          <a:bodyPr/>
+          <a:lstStyle/>
+          <a:p>
+            <a:endParaRPr lang="ko-KR" altLang="en-US"/>
+          </a:p>
+        </p:txBody>
       </p:sp>
       <p:sp>
         <p:nvSpPr>
@@ -9661,7 +10282,7 @@
           <a:bodyPr wrap="square" lIns="1016" tIns="1016" rIns="1016" bIns="1016" rtlCol="0" anchor="ctr"/>
           <a:lstStyle/>
           <a:p>
-            <a:pPr algn="ctr" indent="0" marL="0">
+            <a:pPr marL="0" indent="0" algn="ctr">
               <a:buNone/>
             </a:pPr>
             <a:r>
@@ -9702,6 +10323,13 @@
             <a:tailEnd type="triangle"/>
           </a:ln>
         </p:spPr>
+        <p:txBody>
+          <a:bodyPr/>
+          <a:lstStyle/>
+          <a:p>
+            <a:endParaRPr lang="ko-KR" altLang="en-US"/>
+          </a:p>
+        </p:txBody>
       </p:sp>
       <p:sp>
         <p:nvSpPr>
@@ -9724,7 +10352,7 @@
           <a:bodyPr wrap="square" lIns="0" tIns="0" rIns="0" bIns="0" rtlCol="0" anchor="ctr"/>
           <a:lstStyle/>
           <a:p>
-            <a:pPr algn="ctr" indent="0" marL="0">
+            <a:pPr marL="0" indent="0" algn="ctr">
               <a:buNone/>
             </a:pPr>
             <a:r>
@@ -9763,7 +10391,7 @@
           <a:bodyPr wrap="square" lIns="0" tIns="0" rIns="0" bIns="0" rtlCol="0" anchor="ctr"/>
           <a:lstStyle/>
           <a:p>
-            <a:pPr algn="l" indent="0" marL="0">
+            <a:pPr marL="0" indent="0" algn="l">
               <a:buNone/>
             </a:pPr>
             <a:r>
@@ -9807,6 +10435,13 @@
             <a:prstDash val="solid"/>
           </a:ln>
         </p:spPr>
+        <p:txBody>
+          <a:bodyPr/>
+          <a:lstStyle/>
+          <a:p>
+            <a:endParaRPr lang="ko-KR" altLang="en-US"/>
+          </a:p>
+        </p:txBody>
       </p:sp>
       <p:sp>
         <p:nvSpPr>
@@ -9829,6 +10464,13 @@
           </a:solidFill>
           <a:ln/>
         </p:spPr>
+        <p:txBody>
+          <a:bodyPr/>
+          <a:lstStyle/>
+          <a:p>
+            <a:endParaRPr lang="ko-KR" altLang="en-US"/>
+          </a:p>
+        </p:txBody>
       </p:sp>
       <p:sp>
         <p:nvSpPr>
@@ -9851,7 +10493,7 @@
           <a:bodyPr wrap="square" lIns="1016" tIns="1016" rIns="1016" bIns="1016" rtlCol="0" anchor="ctr"/>
           <a:lstStyle/>
           <a:p>
-            <a:pPr algn="ctr" indent="0" marL="0">
+            <a:pPr marL="0" indent="0" algn="ctr">
               <a:buNone/>
             </a:pPr>
             <a:r>
@@ -9895,6 +10537,13 @@
             <a:prstDash val="solid"/>
           </a:ln>
         </p:spPr>
+        <p:txBody>
+          <a:bodyPr/>
+          <a:lstStyle/>
+          <a:p>
+            <a:endParaRPr lang="ko-KR" altLang="en-US"/>
+          </a:p>
+        </p:txBody>
       </p:sp>
       <p:sp>
         <p:nvSpPr>
@@ -9917,7 +10566,7 @@
           <a:bodyPr wrap="square" lIns="508" tIns="508" rIns="508" bIns="508" rtlCol="0" anchor="ctr"/>
           <a:lstStyle/>
           <a:p>
-            <a:pPr algn="l" indent="0" marL="0">
+            <a:pPr marL="0" indent="0" algn="l">
               <a:buNone/>
             </a:pPr>
             <a:r>
@@ -9934,7 +10583,7 @@
             <a:endParaRPr lang="en-US" sz="1400" dirty="0"/>
           </a:p>
           <a:p>
-            <a:pPr algn="l" indent="0" marL="0">
+            <a:pPr marL="0" indent="0" algn="l">
               <a:buNone/>
             </a:pPr>
             <a:r>
@@ -9975,6 +10624,13 @@
             <a:tailEnd type="triangle"/>
           </a:ln>
         </p:spPr>
+        <p:txBody>
+          <a:bodyPr/>
+          <a:lstStyle/>
+          <a:p>
+            <a:endParaRPr lang="ko-KR" altLang="en-US"/>
+          </a:p>
+        </p:txBody>
       </p:sp>
       <p:sp>
         <p:nvSpPr>
@@ -10002,6 +10658,13 @@
             <a:prstDash val="solid"/>
           </a:ln>
         </p:spPr>
+        <p:txBody>
+          <a:bodyPr/>
+          <a:lstStyle/>
+          <a:p>
+            <a:endParaRPr lang="ko-KR" altLang="en-US"/>
+          </a:p>
+        </p:txBody>
       </p:sp>
       <p:sp>
         <p:nvSpPr>
@@ -10024,7 +10687,7 @@
           <a:bodyPr wrap="square" lIns="1016" tIns="1016" rIns="1016" bIns="1016" rtlCol="0" anchor="ctr"/>
           <a:lstStyle/>
           <a:p>
-            <a:pPr algn="ctr" indent="0" marL="0">
+            <a:pPr marL="0" indent="0" algn="ctr">
               <a:buNone/>
             </a:pPr>
             <a:r>
@@ -10068,6 +10731,13 @@
             <a:prstDash val="solid"/>
           </a:ln>
         </p:spPr>
+        <p:txBody>
+          <a:bodyPr/>
+          <a:lstStyle/>
+          <a:p>
+            <a:endParaRPr lang="ko-KR" altLang="en-US"/>
+          </a:p>
+        </p:txBody>
       </p:sp>
       <p:sp>
         <p:nvSpPr>
@@ -10090,7 +10760,7 @@
           <a:bodyPr wrap="square" lIns="1016" tIns="1016" rIns="1016" bIns="1016" rtlCol="0" anchor="ctr"/>
           <a:lstStyle/>
           <a:p>
-            <a:pPr algn="ctr" indent="0" marL="0">
+            <a:pPr marL="0" indent="0" algn="ctr">
               <a:buNone/>
             </a:pPr>
             <a:r>
@@ -10131,6 +10801,13 @@
             <a:tailEnd type="triangle"/>
           </a:ln>
         </p:spPr>
+        <p:txBody>
+          <a:bodyPr/>
+          <a:lstStyle/>
+          <a:p>
+            <a:endParaRPr lang="ko-KR" altLang="en-US"/>
+          </a:p>
+        </p:txBody>
       </p:sp>
       <p:sp>
         <p:nvSpPr>
@@ -10153,7 +10830,7 @@
           <a:bodyPr wrap="square" lIns="0" tIns="0" rIns="0" bIns="0" rtlCol="0" anchor="ctr"/>
           <a:lstStyle/>
           <a:p>
-            <a:pPr algn="ctr" indent="0" marL="0">
+            <a:pPr marL="0" indent="0" algn="ctr">
               <a:buNone/>
             </a:pPr>
             <a:r>
@@ -10192,7 +10869,7 @@
           <a:bodyPr wrap="square" lIns="0" tIns="0" rIns="0" bIns="0" rtlCol="0" anchor="ctr"/>
           <a:lstStyle/>
           <a:p>
-            <a:pPr algn="l" indent="0" marL="0">
+            <a:pPr marL="0" indent="0" algn="l">
               <a:buNone/>
             </a:pPr>
             <a:r>
@@ -10236,6 +10913,13 @@
             <a:prstDash val="solid"/>
           </a:ln>
         </p:spPr>
+        <p:txBody>
+          <a:bodyPr/>
+          <a:lstStyle/>
+          <a:p>
+            <a:endParaRPr lang="ko-KR" altLang="en-US"/>
+          </a:p>
+        </p:txBody>
       </p:sp>
       <p:sp>
         <p:nvSpPr>
@@ -10258,6 +10942,13 @@
           </a:solidFill>
           <a:ln/>
         </p:spPr>
+        <p:txBody>
+          <a:bodyPr/>
+          <a:lstStyle/>
+          <a:p>
+            <a:endParaRPr lang="ko-KR" altLang="en-US"/>
+          </a:p>
+        </p:txBody>
       </p:sp>
       <p:sp>
         <p:nvSpPr>
@@ -10280,7 +10971,7 @@
           <a:bodyPr wrap="square" lIns="1016" tIns="1016" rIns="1016" bIns="1016" rtlCol="0" anchor="ctr"/>
           <a:lstStyle/>
           <a:p>
-            <a:pPr algn="ctr" indent="0" marL="0">
+            <a:pPr marL="0" indent="0" algn="ctr">
               <a:buNone/>
             </a:pPr>
             <a:r>
@@ -10324,6 +11015,13 @@
             <a:prstDash val="solid"/>
           </a:ln>
         </p:spPr>
+        <p:txBody>
+          <a:bodyPr/>
+          <a:lstStyle/>
+          <a:p>
+            <a:endParaRPr lang="ko-KR" altLang="en-US"/>
+          </a:p>
+        </p:txBody>
       </p:sp>
       <p:sp>
         <p:nvSpPr>
@@ -10346,7 +11044,7 @@
           <a:bodyPr wrap="square" lIns="508" tIns="508" rIns="508" bIns="508" rtlCol="0" anchor="ctr"/>
           <a:lstStyle/>
           <a:p>
-            <a:pPr algn="l" indent="0" marL="0">
+            <a:pPr marL="0" indent="0" algn="l">
               <a:buNone/>
             </a:pPr>
             <a:r>
@@ -10363,7 +11061,7 @@
             <a:endParaRPr lang="en-US" sz="1400" dirty="0"/>
           </a:p>
           <a:p>
-            <a:pPr algn="l" indent="0" marL="0">
+            <a:pPr marL="0" indent="0" algn="l">
               <a:buNone/>
             </a:pPr>
             <a:r>
@@ -10404,6 +11102,13 @@
             <a:tailEnd type="triangle"/>
           </a:ln>
         </p:spPr>
+        <p:txBody>
+          <a:bodyPr/>
+          <a:lstStyle/>
+          <a:p>
+            <a:endParaRPr lang="ko-KR" altLang="en-US"/>
+          </a:p>
+        </p:txBody>
       </p:sp>
       <p:sp>
         <p:nvSpPr>
@@ -10431,6 +11136,13 @@
             <a:prstDash val="solid"/>
           </a:ln>
         </p:spPr>
+        <p:txBody>
+          <a:bodyPr/>
+          <a:lstStyle/>
+          <a:p>
+            <a:endParaRPr lang="ko-KR" altLang="en-US"/>
+          </a:p>
+        </p:txBody>
       </p:sp>
       <p:sp>
         <p:nvSpPr>
@@ -10453,7 +11165,7 @@
           <a:bodyPr wrap="square" lIns="1016" tIns="1016" rIns="1016" bIns="1016" rtlCol="0" anchor="ctr"/>
           <a:lstStyle/>
           <a:p>
-            <a:pPr algn="ctr" indent="0" marL="0">
+            <a:pPr marL="0" indent="0" algn="ctr">
               <a:buNone/>
             </a:pPr>
             <a:r>
@@ -10492,6 +11204,13 @@
           </a:solidFill>
           <a:ln/>
         </p:spPr>
+        <p:txBody>
+          <a:bodyPr/>
+          <a:lstStyle/>
+          <a:p>
+            <a:endParaRPr lang="ko-KR" altLang="en-US"/>
+          </a:p>
+        </p:txBody>
       </p:sp>
       <p:sp>
         <p:nvSpPr>
@@ -10514,7 +11233,7 @@
           <a:bodyPr wrap="square" lIns="1016" tIns="1016" rIns="1016" bIns="1016" rtlCol="0" anchor="ctr"/>
           <a:lstStyle/>
           <a:p>
-            <a:pPr algn="ctr" indent="0" marL="0">
+            <a:pPr marL="0" indent="0" algn="ctr">
               <a:buNone/>
             </a:pPr>
             <a:r>
@@ -10558,6 +11277,13 @@
             <a:prstDash val="solid"/>
           </a:ln>
         </p:spPr>
+        <p:txBody>
+          <a:bodyPr/>
+          <a:lstStyle/>
+          <a:p>
+            <a:endParaRPr lang="ko-KR" altLang="en-US"/>
+          </a:p>
+        </p:txBody>
       </p:sp>
       <p:sp>
         <p:nvSpPr>
@@ -10580,7 +11306,7 @@
           <a:bodyPr wrap="square" lIns="1016" tIns="1016" rIns="1016" bIns="1016" rtlCol="0" anchor="ctr"/>
           <a:lstStyle/>
           <a:p>
-            <a:pPr algn="ctr" indent="0" marL="0">
+            <a:pPr marL="0" indent="0" algn="ctr">
               <a:buNone/>
             </a:pPr>
             <a:r>
@@ -10621,6 +11347,13 @@
             <a:tailEnd type="triangle"/>
           </a:ln>
         </p:spPr>
+        <p:txBody>
+          <a:bodyPr/>
+          <a:lstStyle/>
+          <a:p>
+            <a:endParaRPr lang="ko-KR" altLang="en-US"/>
+          </a:p>
+        </p:txBody>
       </p:sp>
       <p:sp>
         <p:nvSpPr>
@@ -10643,7 +11376,7 @@
           <a:bodyPr wrap="square" lIns="0" tIns="0" rIns="0" bIns="0" rtlCol="0" anchor="ctr"/>
           <a:lstStyle/>
           <a:p>
-            <a:pPr algn="ctr" indent="0" marL="0">
+            <a:pPr marL="0" indent="0" algn="ctr">
               <a:buNone/>
             </a:pPr>
             <a:r>
@@ -10684,6 +11417,13 @@
             <a:tailEnd type="triangle"/>
           </a:ln>
         </p:spPr>
+        <p:txBody>
+          <a:bodyPr/>
+          <a:lstStyle/>
+          <a:p>
+            <a:endParaRPr lang="ko-KR" altLang="en-US"/>
+          </a:p>
+        </p:txBody>
       </p:sp>
       <p:sp>
         <p:nvSpPr>
@@ -10706,7 +11446,7 @@
           <a:bodyPr wrap="square" lIns="0" tIns="0" rIns="0" bIns="0" rtlCol="0" anchor="ctr"/>
           <a:lstStyle/>
           <a:p>
-            <a:pPr algn="ctr" indent="0" marL="0">
+            <a:pPr marL="0" indent="0" algn="ctr">
               <a:buNone/>
             </a:pPr>
             <a:r>
@@ -10745,7 +11485,7 @@
           <a:bodyPr wrap="square" lIns="0" tIns="0" rIns="0" bIns="0" rtlCol="0" anchor="ctr"/>
           <a:lstStyle/>
           <a:p>
-            <a:pPr algn="l" indent="0" marL="0">
+            <a:pPr marL="0" indent="0" algn="l">
               <a:buNone/>
             </a:pPr>
             <a:r>
@@ -10789,6 +11529,13 @@
             <a:prstDash val="solid"/>
           </a:ln>
         </p:spPr>
+        <p:txBody>
+          <a:bodyPr/>
+          <a:lstStyle/>
+          <a:p>
+            <a:endParaRPr lang="ko-KR" altLang="en-US"/>
+          </a:p>
+        </p:txBody>
       </p:sp>
       <p:sp>
         <p:nvSpPr>
@@ -10809,6 +11556,13 @@
           </a:solidFill>
           <a:ln/>
         </p:spPr>
+        <p:txBody>
+          <a:bodyPr/>
+          <a:lstStyle/>
+          <a:p>
+            <a:endParaRPr lang="ko-KR" altLang="en-US"/>
+          </a:p>
+        </p:txBody>
       </p:sp>
       <p:sp>
         <p:nvSpPr>
@@ -10831,7 +11585,7 @@
           <a:bodyPr wrap="square" lIns="0" tIns="0" rIns="0" bIns="0" rtlCol="0" anchor="ctr"/>
           <a:lstStyle/>
           <a:p>
-            <a:pPr algn="l" indent="0" marL="0">
+            <a:pPr marL="0" indent="0" algn="l">
               <a:buNone/>
             </a:pPr>
             <a:r>
@@ -10848,7 +11602,7 @@
             <a:endParaRPr lang="en-US" sz="1400" dirty="0"/>
           </a:p>
           <a:p>
-            <a:pPr algn="l" indent="0" marL="0">
+            <a:pPr marL="0" indent="0" algn="l">
               <a:buNone/>
             </a:pPr>
             <a:r>
@@ -10868,7 +11622,7 @@
       </p:sp>
       <p:sp>
         <p:nvSpPr>
-          <p:cNvPr id="25" name="Slide Number Placeholder 0"/>
+          <p:cNvPr id="4" name="Slide Number Placeholder 0"/>
           <p:cNvSpPr>
             <a:spLocks noGrp="1"/>
           </p:cNvSpPr>
@@ -10886,7 +11640,7 @@
           </a:prstGeom>
           <a:extLst>
             <a:ext uri="{C572A759-6A51-4108-AA02-DFA0A04FC94B}">
-              <ma14:wrappingTextBoxFlag xmlns:ma14="http://schemas.microsoft.com/office/mac/drawingml/2011/main" val="0"/>
+              <ma14:wrappingTextBoxFlag xmlns="" xmlns:ma14="http://schemas.microsoft.com/office/mac/drawingml/2011/main" val="0"/>
             </a:ext>
           </a:extLst>
         </p:spPr>
@@ -10907,7 +11661,7 @@
           <a:p>
             <a:pPr algn="r"/>
             <a:fld id="{F7021451-1387-4CA6-816F-3879F97B5CBC}" type="slidenum">
-              <a:rPr b="0" lang="en-US"/>
+              <a:rPr lang="en-US" b="0"/>
               <a:t>3</a:t>
             </a:fld>
             <a:endParaRPr lang="en-US"/>
@@ -10942,7 +11696,9 @@
       <p:sp>
         <p:nvSpPr>
           <p:cNvPr id="2" name="Text 2"/>
-          <p:cNvSpPr/>
+          <p:cNvSpPr>
+            <a:spLocks noGrp="1"/>
+          </p:cNvSpPr>
           <p:nvPr>
             <p:ph type="title"/>
           </p:nvPr>
@@ -10962,7 +11718,7 @@
           <a:bodyPr wrap="square" lIns="0" tIns="0" rIns="0" bIns="0" rtlCol="0" anchor="ctr"/>
           <a:lstStyle/>
           <a:p>
-            <a:pPr algn="l" indent="0" marL="0">
+            <a:pPr marL="0" indent="0" algn="l">
               <a:buNone/>
             </a:pPr>
             <a:r>
@@ -10974,7 +11730,7 @@
                 <a:ea typeface="Pretendard" pitchFamily="34" charset="-122"/>
                 <a:cs typeface="Pretendard" pitchFamily="34" charset="-120"/>
               </a:rPr>
-              <a:t>1. 스키마 도출: 소스 문서 → 노드 타입과 관계: 표본 → 후보 → 사람 확정</a:t>
+              <a:t>1. 스키마 도출: 프롬프트로 정형 테이블의 스키마 도출</a:t>
             </a:r>
             <a:endParaRPr lang="en-US" sz="3200" dirty="0"/>
           </a:p>
@@ -11001,7 +11757,7 @@
           <a:bodyPr wrap="square" lIns="0" tIns="0" rIns="0" bIns="0" rtlCol="0" anchor="ctr"/>
           <a:lstStyle/>
           <a:p>
-            <a:pPr indent="0" marL="0">
+            <a:pPr marL="0" indent="0">
               <a:buNone/>
             </a:pPr>
             <a:r>
@@ -11013,7 +11769,7 @@
                 <a:ea typeface="Pretendard SemiBold" pitchFamily="34" charset="-122"/>
                 <a:cs typeface="Pretendard SemiBold" pitchFamily="34" charset="-120"/>
               </a:rPr>
-              <a:t>LLM은 표본에서 후보만 뽑고 확정은 사람이 함 — 확정한 목록을 GraphSchema로 고정해 추출기에 넘김</a:t>
+              <a:t>변환 규칙을 프롬프트에 담아 바이브 코딩 도구에 맡김 — AI는 읽고 판정하고 그리며, 사람은 세 번 답하고 승인함</a:t>
             </a:r>
             <a:endParaRPr lang="en-US" sz="1800" dirty="0"/>
           </a:p>
@@ -11027,12 +11783,322 @@
         </p:nvSpPr>
         <p:spPr>
           <a:xfrm>
-            <a:off x="509321" y="1737360"/>
-            <a:ext cx="2505456" cy="566928"/>
+            <a:off x="2127809" y="1700784"/>
+            <a:ext cx="12006072" cy="749808"/>
           </a:xfrm>
           <a:prstGeom prst="roundRect">
             <a:avLst>
-              <a:gd name="adj" fmla="val 12903"/>
+              <a:gd name="adj" fmla="val 7317"/>
+            </a:avLst>
+          </a:prstGeom>
+          <a:solidFill>
+            <a:srgbClr val="F5F8FC"/>
+          </a:solidFill>
+          <a:ln/>
+        </p:spPr>
+        <p:txBody>
+          <a:bodyPr/>
+          <a:lstStyle/>
+          <a:p>
+            <a:endParaRPr lang="ko-KR" altLang="en-US"/>
+          </a:p>
+        </p:txBody>
+      </p:sp>
+      <p:sp>
+        <p:nvSpPr>
+          <p:cNvPr id="6" name="Shape 3"/>
+          <p:cNvSpPr/>
+          <p:nvPr/>
+        </p:nvSpPr>
+        <p:spPr>
+          <a:xfrm>
+            <a:off x="509321" y="1700784"/>
+            <a:ext cx="1554480" cy="749808"/>
+          </a:xfrm>
+          <a:prstGeom prst="roundRect">
+            <a:avLst>
+              <a:gd name="adj" fmla="val 7317"/>
+            </a:avLst>
+          </a:prstGeom>
+          <a:solidFill>
+            <a:srgbClr val="2E74C6"/>
+          </a:solidFill>
+          <a:ln/>
+        </p:spPr>
+        <p:txBody>
+          <a:bodyPr/>
+          <a:lstStyle/>
+          <a:p>
+            <a:endParaRPr lang="ko-KR" altLang="en-US"/>
+          </a:p>
+        </p:txBody>
+      </p:sp>
+      <p:sp>
+        <p:nvSpPr>
+          <p:cNvPr id="7" name="Text 4"/>
+          <p:cNvSpPr txBox="1"/>
+          <p:nvPr/>
+        </p:nvSpPr>
+        <p:spPr>
+          <a:xfrm>
+            <a:off x="509321" y="1700784"/>
+            <a:ext cx="1554480" cy="749808"/>
+          </a:xfrm>
+          <a:prstGeom prst="rect">
+            <a:avLst/>
+          </a:prstGeom>
+          <a:noFill/>
+          <a:ln/>
+        </p:spPr>
+        <p:txBody>
+          <a:bodyPr wrap="square" lIns="1016" tIns="1016" rIns="1016" bIns="1016" rtlCol="0" anchor="ctr"/>
+          <a:lstStyle/>
+          <a:p>
+            <a:pPr marL="0" indent="0" algn="ctr">
+              <a:buNone/>
+            </a:pPr>
+            <a:r>
+              <a:rPr lang="en-US" sz="1400" b="1" dirty="0">
+                <a:solidFill>
+                  <a:srgbClr val="FFFFFF"/>
+                </a:solidFill>
+                <a:latin typeface="Pretendard" pitchFamily="34" charset="0"/>
+                <a:ea typeface="Pretendard" pitchFamily="34" charset="-122"/>
+                <a:cs typeface="Pretendard" pitchFamily="34" charset="-120"/>
+              </a:rPr>
+              <a:t>사람</a:t>
+            </a:r>
+            <a:endParaRPr lang="en-US" sz="1400" dirty="0"/>
+          </a:p>
+        </p:txBody>
+      </p:sp>
+      <p:sp>
+        <p:nvSpPr>
+          <p:cNvPr id="8" name="Shape 5"/>
+          <p:cNvSpPr/>
+          <p:nvPr/>
+        </p:nvSpPr>
+        <p:spPr>
+          <a:xfrm>
+            <a:off x="2127809" y="2615184"/>
+            <a:ext cx="12006072" cy="749808"/>
+          </a:xfrm>
+          <a:prstGeom prst="roundRect">
+            <a:avLst>
+              <a:gd name="adj" fmla="val 7317"/>
+            </a:avLst>
+          </a:prstGeom>
+          <a:solidFill>
+            <a:srgbClr val="F5F8FC"/>
+          </a:solidFill>
+          <a:ln/>
+        </p:spPr>
+        <p:txBody>
+          <a:bodyPr/>
+          <a:lstStyle/>
+          <a:p>
+            <a:endParaRPr lang="ko-KR" altLang="en-US"/>
+          </a:p>
+        </p:txBody>
+      </p:sp>
+      <p:sp>
+        <p:nvSpPr>
+          <p:cNvPr id="9" name="Shape 6"/>
+          <p:cNvSpPr/>
+          <p:nvPr/>
+        </p:nvSpPr>
+        <p:spPr>
+          <a:xfrm>
+            <a:off x="509321" y="2615184"/>
+            <a:ext cx="1554480" cy="749808"/>
+          </a:xfrm>
+          <a:prstGeom prst="roundRect">
+            <a:avLst>
+              <a:gd name="adj" fmla="val 7317"/>
+            </a:avLst>
+          </a:prstGeom>
+          <a:solidFill>
+            <a:srgbClr val="1E2A5C"/>
+          </a:solidFill>
+          <a:ln/>
+        </p:spPr>
+        <p:txBody>
+          <a:bodyPr/>
+          <a:lstStyle/>
+          <a:p>
+            <a:endParaRPr lang="ko-KR" altLang="en-US"/>
+          </a:p>
+        </p:txBody>
+      </p:sp>
+      <p:sp>
+        <p:nvSpPr>
+          <p:cNvPr id="10" name="Text 7"/>
+          <p:cNvSpPr txBox="1"/>
+          <p:nvPr/>
+        </p:nvSpPr>
+        <p:spPr>
+          <a:xfrm>
+            <a:off x="509321" y="2615184"/>
+            <a:ext cx="1554480" cy="749808"/>
+          </a:xfrm>
+          <a:prstGeom prst="rect">
+            <a:avLst/>
+          </a:prstGeom>
+          <a:noFill/>
+          <a:ln/>
+        </p:spPr>
+        <p:txBody>
+          <a:bodyPr wrap="square" lIns="1016" tIns="1016" rIns="1016" bIns="1016" rtlCol="0" anchor="ctr"/>
+          <a:lstStyle/>
+          <a:p>
+            <a:pPr marL="0" indent="0" algn="ctr">
+              <a:buNone/>
+            </a:pPr>
+            <a:r>
+              <a:rPr lang="en-US" sz="1400" b="1" dirty="0">
+                <a:solidFill>
+                  <a:srgbClr val="FFFFFF"/>
+                </a:solidFill>
+                <a:latin typeface="Pretendard" pitchFamily="34" charset="0"/>
+                <a:ea typeface="Pretendard" pitchFamily="34" charset="-122"/>
+                <a:cs typeface="Pretendard" pitchFamily="34" charset="-120"/>
+              </a:rPr>
+              <a:t>AI</a:t>
+            </a:r>
+            <a:endParaRPr lang="en-US" sz="1400" dirty="0"/>
+          </a:p>
+          <a:p>
+            <a:pPr marL="0" indent="0" algn="ctr">
+              <a:buNone/>
+            </a:pPr>
+            <a:r>
+              <a:rPr lang="en-US" sz="1400" b="1" dirty="0">
+                <a:solidFill>
+                  <a:srgbClr val="FFFFFF"/>
+                </a:solidFill>
+                <a:latin typeface="Pretendard" pitchFamily="34" charset="0"/>
+                <a:ea typeface="Pretendard" pitchFamily="34" charset="-122"/>
+                <a:cs typeface="Pretendard" pitchFamily="34" charset="-120"/>
+              </a:rPr>
+              <a:t>(바이브 코딩 도구)</a:t>
+            </a:r>
+            <a:endParaRPr lang="en-US" sz="1400" dirty="0"/>
+          </a:p>
+        </p:txBody>
+      </p:sp>
+      <p:sp>
+        <p:nvSpPr>
+          <p:cNvPr id="11" name="Shape 8"/>
+          <p:cNvSpPr/>
+          <p:nvPr/>
+        </p:nvSpPr>
+        <p:spPr>
+          <a:xfrm>
+            <a:off x="2200961" y="1755648"/>
+            <a:ext cx="1163320" cy="640080"/>
+          </a:xfrm>
+          <a:prstGeom prst="roundRect">
+            <a:avLst>
+              <a:gd name="adj" fmla="val 11429"/>
+            </a:avLst>
+          </a:prstGeom>
+          <a:solidFill>
+            <a:srgbClr val="2E74C6"/>
+          </a:solidFill>
+          <a:ln/>
+        </p:spPr>
+        <p:txBody>
+          <a:bodyPr/>
+          <a:lstStyle/>
+          <a:p>
+            <a:endParaRPr lang="ko-KR" altLang="en-US"/>
+          </a:p>
+        </p:txBody>
+      </p:sp>
+      <p:sp>
+        <p:nvSpPr>
+          <p:cNvPr id="12" name="Text 9"/>
+          <p:cNvSpPr txBox="1"/>
+          <p:nvPr/>
+        </p:nvSpPr>
+        <p:spPr>
+          <a:xfrm>
+            <a:off x="2200961" y="1755648"/>
+            <a:ext cx="1163320" cy="640080"/>
+          </a:xfrm>
+          <a:prstGeom prst="rect">
+            <a:avLst/>
+          </a:prstGeom>
+          <a:noFill/>
+          <a:ln/>
+        </p:spPr>
+        <p:txBody>
+          <a:bodyPr wrap="square" lIns="1016" tIns="1016" rIns="1016" bIns="1016" rtlCol="0" anchor="ctr"/>
+          <a:lstStyle/>
+          <a:p>
+            <a:pPr marL="0" indent="0" algn="ctr">
+              <a:buNone/>
+            </a:pPr>
+            <a:r>
+              <a:rPr lang="en-US" sz="1400" b="1" dirty="0">
+                <a:solidFill>
+                  <a:srgbClr val="FFFFFF"/>
+                </a:solidFill>
+                <a:latin typeface="Pretendard" pitchFamily="34" charset="0"/>
+                <a:ea typeface="Pretendard" pitchFamily="34" charset="-122"/>
+                <a:cs typeface="Pretendard" pitchFamily="34" charset="-120"/>
+              </a:rPr>
+              <a:t>1. 입력 받기</a:t>
+            </a:r>
+            <a:endParaRPr lang="en-US" sz="1400" dirty="0"/>
+          </a:p>
+        </p:txBody>
+      </p:sp>
+      <p:sp>
+        <p:nvSpPr>
+          <p:cNvPr id="13" name="Shape 10"/>
+          <p:cNvSpPr/>
+          <p:nvPr/>
+        </p:nvSpPr>
+        <p:spPr>
+          <a:xfrm>
+            <a:off x="3391713" y="2350008"/>
+            <a:ext cx="128016" cy="365760"/>
+          </a:xfrm>
+          <a:prstGeom prst="line">
+            <a:avLst/>
+          </a:prstGeom>
+          <a:noFill/>
+          <a:ln w="22225">
+            <a:solidFill>
+              <a:srgbClr val="4A5364"/>
+            </a:solidFill>
+            <a:prstDash val="solid"/>
+            <a:tailEnd type="triangle"/>
+          </a:ln>
+        </p:spPr>
+        <p:txBody>
+          <a:bodyPr/>
+          <a:lstStyle/>
+          <a:p>
+            <a:endParaRPr lang="ko-KR" altLang="en-US"/>
+          </a:p>
+        </p:txBody>
+      </p:sp>
+      <p:sp>
+        <p:nvSpPr>
+          <p:cNvPr id="14" name="Shape 11"/>
+          <p:cNvSpPr/>
+          <p:nvPr/>
+        </p:nvSpPr>
+        <p:spPr>
+          <a:xfrm>
+            <a:off x="3547161" y="2670048"/>
+            <a:ext cx="1163320" cy="640080"/>
+          </a:xfrm>
+          <a:prstGeom prst="roundRect">
+            <a:avLst>
+              <a:gd name="adj" fmla="val 11429"/>
             </a:avLst>
           </a:prstGeom>
           <a:solidFill>
@@ -11045,17 +12111,24 @@
             <a:prstDash val="solid"/>
           </a:ln>
         </p:spPr>
-      </p:sp>
-      <p:sp>
-        <p:nvSpPr>
-          <p:cNvPr id="6" name="Text 3"/>
-          <p:cNvSpPr txBox="1"/>
-          <p:nvPr/>
-        </p:nvSpPr>
-        <p:spPr>
-          <a:xfrm>
-            <a:off x="509321" y="1737360"/>
-            <a:ext cx="2505456" cy="566928"/>
+        <p:txBody>
+          <a:bodyPr/>
+          <a:lstStyle/>
+          <a:p>
+            <a:endParaRPr lang="ko-KR" altLang="en-US"/>
+          </a:p>
+        </p:txBody>
+      </p:sp>
+      <p:sp>
+        <p:nvSpPr>
+          <p:cNvPr id="15" name="Text 12"/>
+          <p:cNvSpPr txBox="1"/>
+          <p:nvPr/>
+        </p:nvSpPr>
+        <p:spPr>
+          <a:xfrm>
+            <a:off x="3547161" y="2670048"/>
+            <a:ext cx="1163320" cy="640080"/>
           </a:xfrm>
           <a:prstGeom prst="rect">
             <a:avLst/>
@@ -11067,7 +12140,7 @@
           <a:bodyPr wrap="square" lIns="1016" tIns="1016" rIns="1016" bIns="1016" rtlCol="0" anchor="ctr"/>
           <a:lstStyle/>
           <a:p>
-            <a:pPr algn="ctr" indent="0" marL="0">
+            <a:pPr marL="0" indent="0" algn="ctr">
               <a:buNone/>
             </a:pPr>
             <a:r>
@@ -11079,22 +12152,58 @@
                 <a:ea typeface="Pretendard" pitchFamily="34" charset="-122"/>
                 <a:cs typeface="Pretendard" pitchFamily="34" charset="-120"/>
               </a:rPr>
-              <a:t>문서 종류별 표본 N건</a:t>
-            </a:r>
-            <a:endParaRPr lang="en-US" sz="1400" dirty="0"/>
-          </a:p>
-        </p:txBody>
-      </p:sp>
-      <p:sp>
-        <p:nvSpPr>
-          <p:cNvPr id="7" name="Shape 4"/>
-          <p:cNvSpPr/>
-          <p:nvPr/>
-        </p:nvSpPr>
-        <p:spPr>
-          <a:xfrm>
-            <a:off x="3042209" y="2020824"/>
-            <a:ext cx="219456" cy="0"/>
+              <a:t>2. DB</a:t>
+            </a:r>
+            <a:br>
+              <a:rPr lang="en-US" sz="1400" b="1" dirty="0">
+                <a:solidFill>
+                  <a:srgbClr val="2B3242"/>
+                </a:solidFill>
+                <a:latin typeface="Pretendard" pitchFamily="34" charset="0"/>
+                <a:ea typeface="Pretendard" pitchFamily="34" charset="-122"/>
+                <a:cs typeface="Pretendard" pitchFamily="34" charset="-120"/>
+              </a:rPr>
+            </a:br>
+            <a:r>
+              <a:rPr lang="en-US" sz="1400" b="1" dirty="0" err="1">
+                <a:solidFill>
+                  <a:srgbClr val="2B3242"/>
+                </a:solidFill>
+                <a:latin typeface="Pretendard" pitchFamily="34" charset="0"/>
+                <a:ea typeface="Pretendard" pitchFamily="34" charset="-122"/>
+                <a:cs typeface="Pretendard" pitchFamily="34" charset="-120"/>
+              </a:rPr>
+              <a:t>카탈로그</a:t>
+            </a:r>
+            <a:r>
+              <a:rPr lang="en-US" sz="1400" dirty="0"/>
+              <a:t> </a:t>
+            </a:r>
+            <a:r>
+              <a:rPr lang="en-US" sz="1400" b="1" dirty="0" err="1">
+                <a:solidFill>
+                  <a:srgbClr val="2B3242"/>
+                </a:solidFill>
+                <a:latin typeface="Pretendard" pitchFamily="34" charset="0"/>
+                <a:ea typeface="Pretendard" pitchFamily="34" charset="-122"/>
+                <a:cs typeface="Pretendard" pitchFamily="34" charset="-120"/>
+              </a:rPr>
+              <a:t>읽기</a:t>
+            </a:r>
+            <a:endParaRPr lang="en-US" sz="1400" dirty="0"/>
+          </a:p>
+        </p:txBody>
+      </p:sp>
+      <p:sp>
+        <p:nvSpPr>
+          <p:cNvPr id="16" name="Shape 13"/>
+          <p:cNvSpPr/>
+          <p:nvPr/>
+        </p:nvSpPr>
+        <p:spPr>
+          <a:xfrm>
+            <a:off x="4737913" y="2990088"/>
+            <a:ext cx="128016" cy="0"/>
           </a:xfrm>
           <a:prstGeom prst="line">
             <a:avLst/>
@@ -11108,6 +12217,2841 @@
             <a:tailEnd type="triangle"/>
           </a:ln>
         </p:spPr>
+        <p:txBody>
+          <a:bodyPr/>
+          <a:lstStyle/>
+          <a:p>
+            <a:endParaRPr lang="ko-KR" altLang="en-US"/>
+          </a:p>
+        </p:txBody>
+      </p:sp>
+      <p:sp>
+        <p:nvSpPr>
+          <p:cNvPr id="17" name="Shape 14"/>
+          <p:cNvSpPr/>
+          <p:nvPr/>
+        </p:nvSpPr>
+        <p:spPr>
+          <a:xfrm>
+            <a:off x="4893361" y="2670048"/>
+            <a:ext cx="1163320" cy="640080"/>
+          </a:xfrm>
+          <a:prstGeom prst="roundRect">
+            <a:avLst>
+              <a:gd name="adj" fmla="val 11429"/>
+            </a:avLst>
+          </a:prstGeom>
+          <a:solidFill>
+            <a:srgbClr val="FFFFFF"/>
+          </a:solidFill>
+          <a:ln w="15875">
+            <a:solidFill>
+              <a:srgbClr val="4A5364"/>
+            </a:solidFill>
+            <a:prstDash val="solid"/>
+          </a:ln>
+        </p:spPr>
+        <p:txBody>
+          <a:bodyPr/>
+          <a:lstStyle/>
+          <a:p>
+            <a:endParaRPr lang="ko-KR" altLang="en-US"/>
+          </a:p>
+        </p:txBody>
+      </p:sp>
+      <p:sp>
+        <p:nvSpPr>
+          <p:cNvPr id="18" name="Text 15"/>
+          <p:cNvSpPr txBox="1"/>
+          <p:nvPr/>
+        </p:nvSpPr>
+        <p:spPr>
+          <a:xfrm>
+            <a:off x="4893361" y="2670048"/>
+            <a:ext cx="1163320" cy="640080"/>
+          </a:xfrm>
+          <a:prstGeom prst="rect">
+            <a:avLst/>
+          </a:prstGeom>
+          <a:noFill/>
+          <a:ln/>
+        </p:spPr>
+        <p:txBody>
+          <a:bodyPr wrap="square" lIns="1016" tIns="1016" rIns="1016" bIns="1016" rtlCol="0" anchor="ctr"/>
+          <a:lstStyle/>
+          <a:p>
+            <a:pPr marL="0" indent="0" algn="ctr">
+              <a:buNone/>
+            </a:pPr>
+            <a:r>
+              <a:rPr lang="en-US" sz="1400" b="1" dirty="0">
+                <a:solidFill>
+                  <a:srgbClr val="2B3242"/>
+                </a:solidFill>
+                <a:latin typeface="Pretendard" pitchFamily="34" charset="0"/>
+                <a:ea typeface="Pretendard" pitchFamily="34" charset="-122"/>
+                <a:cs typeface="Pretendard" pitchFamily="34" charset="-120"/>
+              </a:rPr>
+              <a:t>3. 규칙 판정</a:t>
+            </a:r>
+            <a:endParaRPr lang="en-US" sz="1400" dirty="0"/>
+          </a:p>
+          <a:p>
+            <a:pPr marL="0" indent="0" algn="ctr">
+              <a:buNone/>
+            </a:pPr>
+            <a:r>
+              <a:rPr lang="en-US" sz="1400" b="1" dirty="0">
+                <a:solidFill>
+                  <a:srgbClr val="2B3242"/>
+                </a:solidFill>
+                <a:latin typeface="Pretendard" pitchFamily="34" charset="0"/>
+                <a:ea typeface="Pretendard" pitchFamily="34" charset="-122"/>
+                <a:cs typeface="Pretendard" pitchFamily="34" charset="-120"/>
+              </a:rPr>
+              <a:t>(②③④)</a:t>
+            </a:r>
+            <a:endParaRPr lang="en-US" sz="1400" dirty="0"/>
+          </a:p>
+        </p:txBody>
+      </p:sp>
+      <p:sp>
+        <p:nvSpPr>
+          <p:cNvPr id="19" name="Shape 16"/>
+          <p:cNvSpPr/>
+          <p:nvPr/>
+        </p:nvSpPr>
+        <p:spPr>
+          <a:xfrm flipV="1">
+            <a:off x="6084113" y="2350008"/>
+            <a:ext cx="128016" cy="365760"/>
+          </a:xfrm>
+          <a:prstGeom prst="line">
+            <a:avLst/>
+          </a:prstGeom>
+          <a:noFill/>
+          <a:ln w="22225">
+            <a:solidFill>
+              <a:srgbClr val="4A5364"/>
+            </a:solidFill>
+            <a:prstDash val="solid"/>
+            <a:tailEnd type="triangle"/>
+          </a:ln>
+        </p:spPr>
+        <p:txBody>
+          <a:bodyPr/>
+          <a:lstStyle/>
+          <a:p>
+            <a:endParaRPr lang="ko-KR" altLang="en-US"/>
+          </a:p>
+        </p:txBody>
+      </p:sp>
+      <p:sp>
+        <p:nvSpPr>
+          <p:cNvPr id="20" name="Shape 17"/>
+          <p:cNvSpPr/>
+          <p:nvPr/>
+        </p:nvSpPr>
+        <p:spPr>
+          <a:xfrm>
+            <a:off x="6239561" y="1755648"/>
+            <a:ext cx="1163320" cy="640080"/>
+          </a:xfrm>
+          <a:prstGeom prst="roundRect">
+            <a:avLst>
+              <a:gd name="adj" fmla="val 11429"/>
+            </a:avLst>
+          </a:prstGeom>
+          <a:solidFill>
+            <a:srgbClr val="2E74C6"/>
+          </a:solidFill>
+          <a:ln/>
+        </p:spPr>
+        <p:txBody>
+          <a:bodyPr/>
+          <a:lstStyle/>
+          <a:p>
+            <a:endParaRPr lang="ko-KR" altLang="en-US"/>
+          </a:p>
+        </p:txBody>
+      </p:sp>
+      <p:sp>
+        <p:nvSpPr>
+          <p:cNvPr id="21" name="Text 18"/>
+          <p:cNvSpPr txBox="1"/>
+          <p:nvPr/>
+        </p:nvSpPr>
+        <p:spPr>
+          <a:xfrm>
+            <a:off x="6239561" y="1755648"/>
+            <a:ext cx="1163320" cy="640080"/>
+          </a:xfrm>
+          <a:prstGeom prst="rect">
+            <a:avLst/>
+          </a:prstGeom>
+          <a:noFill/>
+          <a:ln/>
+        </p:spPr>
+        <p:txBody>
+          <a:bodyPr wrap="square" lIns="1016" tIns="1016" rIns="1016" bIns="1016" rtlCol="0" anchor="ctr"/>
+          <a:lstStyle/>
+          <a:p>
+            <a:pPr marL="0" indent="0" algn="ctr">
+              <a:buNone/>
+            </a:pPr>
+            <a:r>
+              <a:rPr lang="en-US" sz="1400" b="1" dirty="0">
+                <a:solidFill>
+                  <a:srgbClr val="FFFFFF"/>
+                </a:solidFill>
+                <a:latin typeface="Pretendard" pitchFamily="34" charset="0"/>
+                <a:ea typeface="Pretendard" pitchFamily="34" charset="-122"/>
+                <a:cs typeface="Pretendard" pitchFamily="34" charset="-120"/>
+              </a:rPr>
+              <a:t>4. 규칙 ①과</a:t>
+            </a:r>
+            <a:endParaRPr lang="en-US" sz="1400" dirty="0"/>
+          </a:p>
+          <a:p>
+            <a:pPr marL="0" indent="0" algn="ctr">
+              <a:buNone/>
+            </a:pPr>
+            <a:r>
+              <a:rPr lang="en-US" sz="1400" b="1" dirty="0">
+                <a:solidFill>
+                  <a:srgbClr val="FFFFFF"/>
+                </a:solidFill>
+                <a:latin typeface="Pretendard" pitchFamily="34" charset="0"/>
+                <a:ea typeface="Pretendard" pitchFamily="34" charset="-122"/>
+                <a:cs typeface="Pretendard" pitchFamily="34" charset="-120"/>
+              </a:rPr>
+              <a:t>이름 답</a:t>
+            </a:r>
+            <a:endParaRPr lang="en-US" sz="1400" dirty="0"/>
+          </a:p>
+        </p:txBody>
+      </p:sp>
+      <p:sp>
+        <p:nvSpPr>
+          <p:cNvPr id="22" name="Shape 19"/>
+          <p:cNvSpPr/>
+          <p:nvPr/>
+        </p:nvSpPr>
+        <p:spPr>
+          <a:xfrm>
+            <a:off x="7430313" y="2350008"/>
+            <a:ext cx="128016" cy="365760"/>
+          </a:xfrm>
+          <a:prstGeom prst="line">
+            <a:avLst/>
+          </a:prstGeom>
+          <a:noFill/>
+          <a:ln w="22225">
+            <a:solidFill>
+              <a:srgbClr val="4A5364"/>
+            </a:solidFill>
+            <a:prstDash val="solid"/>
+            <a:tailEnd type="triangle"/>
+          </a:ln>
+        </p:spPr>
+        <p:txBody>
+          <a:bodyPr/>
+          <a:lstStyle/>
+          <a:p>
+            <a:endParaRPr lang="ko-KR" altLang="en-US"/>
+          </a:p>
+        </p:txBody>
+      </p:sp>
+      <p:sp>
+        <p:nvSpPr>
+          <p:cNvPr id="23" name="Shape 20"/>
+          <p:cNvSpPr/>
+          <p:nvPr/>
+        </p:nvSpPr>
+        <p:spPr>
+          <a:xfrm>
+            <a:off x="7585761" y="2670048"/>
+            <a:ext cx="1163320" cy="640080"/>
+          </a:xfrm>
+          <a:prstGeom prst="roundRect">
+            <a:avLst>
+              <a:gd name="adj" fmla="val 11429"/>
+            </a:avLst>
+          </a:prstGeom>
+          <a:solidFill>
+            <a:srgbClr val="FFFFFF"/>
+          </a:solidFill>
+          <a:ln w="15875">
+            <a:solidFill>
+              <a:srgbClr val="4A5364"/>
+            </a:solidFill>
+            <a:prstDash val="solid"/>
+          </a:ln>
+        </p:spPr>
+        <p:txBody>
+          <a:bodyPr/>
+          <a:lstStyle/>
+          <a:p>
+            <a:endParaRPr lang="ko-KR" altLang="en-US"/>
+          </a:p>
+        </p:txBody>
+      </p:sp>
+      <p:sp>
+        <p:nvSpPr>
+          <p:cNvPr id="24" name="Text 21"/>
+          <p:cNvSpPr txBox="1"/>
+          <p:nvPr/>
+        </p:nvSpPr>
+        <p:spPr>
+          <a:xfrm>
+            <a:off x="7585761" y="2670048"/>
+            <a:ext cx="1163320" cy="640080"/>
+          </a:xfrm>
+          <a:prstGeom prst="rect">
+            <a:avLst/>
+          </a:prstGeom>
+          <a:noFill/>
+          <a:ln/>
+        </p:spPr>
+        <p:txBody>
+          <a:bodyPr wrap="square" lIns="1016" tIns="1016" rIns="1016" bIns="1016" rtlCol="0" anchor="ctr"/>
+          <a:lstStyle/>
+          <a:p>
+            <a:pPr marL="0" indent="0" algn="ctr">
+              <a:buNone/>
+            </a:pPr>
+            <a:r>
+              <a:rPr lang="en-US" sz="1400" b="1" dirty="0">
+                <a:solidFill>
+                  <a:srgbClr val="2B3242"/>
+                </a:solidFill>
+                <a:latin typeface="Pretendard" pitchFamily="34" charset="0"/>
+                <a:ea typeface="Pretendard" pitchFamily="34" charset="-122"/>
+                <a:cs typeface="Pretendard" pitchFamily="34" charset="-120"/>
+              </a:rPr>
+              <a:t>5. 스키마</a:t>
+            </a:r>
+            <a:endParaRPr lang="en-US" sz="1400" dirty="0"/>
+          </a:p>
+          <a:p>
+            <a:pPr marL="0" indent="0" algn="ctr">
+              <a:buNone/>
+            </a:pPr>
+            <a:r>
+              <a:rPr lang="en-US" sz="1400" b="1" dirty="0">
+                <a:solidFill>
+                  <a:srgbClr val="2B3242"/>
+                </a:solidFill>
+                <a:latin typeface="Pretendard" pitchFamily="34" charset="0"/>
+                <a:ea typeface="Pretendard" pitchFamily="34" charset="-122"/>
+                <a:cs typeface="Pretendard" pitchFamily="34" charset="-120"/>
+              </a:rPr>
+              <a:t>초안</a:t>
+            </a:r>
+            <a:endParaRPr lang="en-US" sz="1400" dirty="0"/>
+          </a:p>
+        </p:txBody>
+      </p:sp>
+      <p:sp>
+        <p:nvSpPr>
+          <p:cNvPr id="25" name="Shape 22"/>
+          <p:cNvSpPr/>
+          <p:nvPr/>
+        </p:nvSpPr>
+        <p:spPr>
+          <a:xfrm>
+            <a:off x="8776513" y="2990088"/>
+            <a:ext cx="128016" cy="0"/>
+          </a:xfrm>
+          <a:prstGeom prst="line">
+            <a:avLst/>
+          </a:prstGeom>
+          <a:noFill/>
+          <a:ln w="22225">
+            <a:solidFill>
+              <a:srgbClr val="4A5364"/>
+            </a:solidFill>
+            <a:prstDash val="solid"/>
+            <a:tailEnd type="triangle"/>
+          </a:ln>
+        </p:spPr>
+        <p:txBody>
+          <a:bodyPr/>
+          <a:lstStyle/>
+          <a:p>
+            <a:endParaRPr lang="ko-KR" altLang="en-US"/>
+          </a:p>
+        </p:txBody>
+      </p:sp>
+      <p:sp>
+        <p:nvSpPr>
+          <p:cNvPr id="26" name="Shape 23"/>
+          <p:cNvSpPr/>
+          <p:nvPr/>
+        </p:nvSpPr>
+        <p:spPr>
+          <a:xfrm>
+            <a:off x="8931961" y="2670048"/>
+            <a:ext cx="1163320" cy="640080"/>
+          </a:xfrm>
+          <a:prstGeom prst="roundRect">
+            <a:avLst>
+              <a:gd name="adj" fmla="val 11429"/>
+            </a:avLst>
+          </a:prstGeom>
+          <a:solidFill>
+            <a:srgbClr val="FFFFFF"/>
+          </a:solidFill>
+          <a:ln w="15875">
+            <a:solidFill>
+              <a:srgbClr val="4A5364"/>
+            </a:solidFill>
+            <a:prstDash val="solid"/>
+          </a:ln>
+        </p:spPr>
+        <p:txBody>
+          <a:bodyPr/>
+          <a:lstStyle/>
+          <a:p>
+            <a:endParaRPr lang="ko-KR" altLang="en-US"/>
+          </a:p>
+        </p:txBody>
+      </p:sp>
+      <p:sp>
+        <p:nvSpPr>
+          <p:cNvPr id="27" name="Text 24"/>
+          <p:cNvSpPr txBox="1"/>
+          <p:nvPr/>
+        </p:nvSpPr>
+        <p:spPr>
+          <a:xfrm>
+            <a:off x="8931961" y="2670048"/>
+            <a:ext cx="1163320" cy="640080"/>
+          </a:xfrm>
+          <a:prstGeom prst="rect">
+            <a:avLst/>
+          </a:prstGeom>
+          <a:noFill/>
+          <a:ln/>
+        </p:spPr>
+        <p:txBody>
+          <a:bodyPr wrap="square" lIns="1016" tIns="1016" rIns="1016" bIns="1016" rtlCol="0" anchor="ctr"/>
+          <a:lstStyle/>
+          <a:p>
+            <a:pPr marL="0" indent="0" algn="ctr">
+              <a:buNone/>
+            </a:pPr>
+            <a:r>
+              <a:rPr lang="en-US" sz="1400" b="1" dirty="0">
+                <a:solidFill>
+                  <a:srgbClr val="2B3242"/>
+                </a:solidFill>
+                <a:latin typeface="Pretendard" pitchFamily="34" charset="0"/>
+                <a:ea typeface="Pretendard" pitchFamily="34" charset="-122"/>
+                <a:cs typeface="Pretendard" pitchFamily="34" charset="-120"/>
+              </a:rPr>
+              <a:t>6. 기계 검증</a:t>
+            </a:r>
+            <a:endParaRPr lang="en-US" sz="1400" dirty="0"/>
+          </a:p>
+        </p:txBody>
+      </p:sp>
+      <p:sp>
+        <p:nvSpPr>
+          <p:cNvPr id="28" name="Shape 25"/>
+          <p:cNvSpPr/>
+          <p:nvPr/>
+        </p:nvSpPr>
+        <p:spPr>
+          <a:xfrm>
+            <a:off x="10122713" y="2990088"/>
+            <a:ext cx="128016" cy="0"/>
+          </a:xfrm>
+          <a:prstGeom prst="line">
+            <a:avLst/>
+          </a:prstGeom>
+          <a:noFill/>
+          <a:ln w="22225">
+            <a:solidFill>
+              <a:srgbClr val="4A5364"/>
+            </a:solidFill>
+            <a:prstDash val="solid"/>
+            <a:tailEnd type="triangle"/>
+          </a:ln>
+        </p:spPr>
+        <p:txBody>
+          <a:bodyPr/>
+          <a:lstStyle/>
+          <a:p>
+            <a:endParaRPr lang="ko-KR" altLang="en-US"/>
+          </a:p>
+        </p:txBody>
+      </p:sp>
+      <p:sp>
+        <p:nvSpPr>
+          <p:cNvPr id="29" name="Shape 26"/>
+          <p:cNvSpPr/>
+          <p:nvPr/>
+        </p:nvSpPr>
+        <p:spPr>
+          <a:xfrm>
+            <a:off x="10278161" y="2670048"/>
+            <a:ext cx="1163320" cy="640080"/>
+          </a:xfrm>
+          <a:prstGeom prst="roundRect">
+            <a:avLst>
+              <a:gd name="adj" fmla="val 11429"/>
+            </a:avLst>
+          </a:prstGeom>
+          <a:solidFill>
+            <a:srgbClr val="FFFFFF"/>
+          </a:solidFill>
+          <a:ln w="15875">
+            <a:solidFill>
+              <a:srgbClr val="4A5364"/>
+            </a:solidFill>
+            <a:prstDash val="solid"/>
+          </a:ln>
+        </p:spPr>
+        <p:txBody>
+          <a:bodyPr/>
+          <a:lstStyle/>
+          <a:p>
+            <a:endParaRPr lang="ko-KR" altLang="en-US"/>
+          </a:p>
+        </p:txBody>
+      </p:sp>
+      <p:sp>
+        <p:nvSpPr>
+          <p:cNvPr id="30" name="Text 27"/>
+          <p:cNvSpPr txBox="1"/>
+          <p:nvPr/>
+        </p:nvSpPr>
+        <p:spPr>
+          <a:xfrm>
+            <a:off x="10278161" y="2670048"/>
+            <a:ext cx="1163320" cy="640080"/>
+          </a:xfrm>
+          <a:prstGeom prst="rect">
+            <a:avLst/>
+          </a:prstGeom>
+          <a:noFill/>
+          <a:ln/>
+        </p:spPr>
+        <p:txBody>
+          <a:bodyPr wrap="square" lIns="1016" tIns="1016" rIns="1016" bIns="1016" rtlCol="0" anchor="ctr"/>
+          <a:lstStyle/>
+          <a:p>
+            <a:pPr marL="0" indent="0" algn="ctr">
+              <a:buNone/>
+            </a:pPr>
+            <a:r>
+              <a:rPr lang="en-US" sz="1400" b="1" dirty="0">
+                <a:solidFill>
+                  <a:srgbClr val="2B3242"/>
+                </a:solidFill>
+                <a:latin typeface="Pretendard" pitchFamily="34" charset="0"/>
+                <a:ea typeface="Pretendard" pitchFamily="34" charset="-122"/>
+                <a:cs typeface="Pretendard" pitchFamily="34" charset="-120"/>
+              </a:rPr>
+              <a:t>7. Mermaid</a:t>
+            </a:r>
+            <a:endParaRPr lang="en-US" sz="1400" dirty="0"/>
+          </a:p>
+          <a:p>
+            <a:pPr marL="0" indent="0" algn="ctr">
+              <a:buNone/>
+            </a:pPr>
+            <a:r>
+              <a:rPr lang="en-US" sz="1400" b="1" dirty="0">
+                <a:solidFill>
+                  <a:srgbClr val="2B3242"/>
+                </a:solidFill>
+                <a:latin typeface="Pretendard" pitchFamily="34" charset="0"/>
+                <a:ea typeface="Pretendard" pitchFamily="34" charset="-122"/>
+                <a:cs typeface="Pretendard" pitchFamily="34" charset="-120"/>
+              </a:rPr>
+              <a:t>그림</a:t>
+            </a:r>
+            <a:endParaRPr lang="en-US" sz="1400" dirty="0"/>
+          </a:p>
+        </p:txBody>
+      </p:sp>
+      <p:sp>
+        <p:nvSpPr>
+          <p:cNvPr id="31" name="Shape 28"/>
+          <p:cNvSpPr/>
+          <p:nvPr/>
+        </p:nvSpPr>
+        <p:spPr>
+          <a:xfrm flipV="1">
+            <a:off x="11468913" y="2350008"/>
+            <a:ext cx="128016" cy="365760"/>
+          </a:xfrm>
+          <a:prstGeom prst="line">
+            <a:avLst/>
+          </a:prstGeom>
+          <a:noFill/>
+          <a:ln w="22225">
+            <a:solidFill>
+              <a:srgbClr val="4A5364"/>
+            </a:solidFill>
+            <a:prstDash val="solid"/>
+            <a:tailEnd type="triangle"/>
+          </a:ln>
+        </p:spPr>
+        <p:txBody>
+          <a:bodyPr/>
+          <a:lstStyle/>
+          <a:p>
+            <a:endParaRPr lang="ko-KR" altLang="en-US"/>
+          </a:p>
+        </p:txBody>
+      </p:sp>
+      <p:sp>
+        <p:nvSpPr>
+          <p:cNvPr id="32" name="Shape 29"/>
+          <p:cNvSpPr/>
+          <p:nvPr/>
+        </p:nvSpPr>
+        <p:spPr>
+          <a:xfrm>
+            <a:off x="11624361" y="1755648"/>
+            <a:ext cx="1163320" cy="640080"/>
+          </a:xfrm>
+          <a:prstGeom prst="roundRect">
+            <a:avLst>
+              <a:gd name="adj" fmla="val 11429"/>
+            </a:avLst>
+          </a:prstGeom>
+          <a:solidFill>
+            <a:srgbClr val="2E74C6"/>
+          </a:solidFill>
+          <a:ln/>
+        </p:spPr>
+        <p:txBody>
+          <a:bodyPr/>
+          <a:lstStyle/>
+          <a:p>
+            <a:endParaRPr lang="ko-KR" altLang="en-US"/>
+          </a:p>
+        </p:txBody>
+      </p:sp>
+      <p:sp>
+        <p:nvSpPr>
+          <p:cNvPr id="33" name="Text 30"/>
+          <p:cNvSpPr txBox="1"/>
+          <p:nvPr/>
+        </p:nvSpPr>
+        <p:spPr>
+          <a:xfrm>
+            <a:off x="11624361" y="1755648"/>
+            <a:ext cx="1163320" cy="640080"/>
+          </a:xfrm>
+          <a:prstGeom prst="rect">
+            <a:avLst/>
+          </a:prstGeom>
+          <a:noFill/>
+          <a:ln/>
+        </p:spPr>
+        <p:txBody>
+          <a:bodyPr wrap="square" lIns="1016" tIns="1016" rIns="1016" bIns="1016" rtlCol="0" anchor="ctr"/>
+          <a:lstStyle/>
+          <a:p>
+            <a:pPr marL="0" indent="0" algn="ctr">
+              <a:buNone/>
+            </a:pPr>
+            <a:r>
+              <a:rPr lang="en-US" sz="1400" b="1" dirty="0">
+                <a:solidFill>
+                  <a:srgbClr val="FFFFFF"/>
+                </a:solidFill>
+                <a:latin typeface="Pretendard" pitchFamily="34" charset="0"/>
+                <a:ea typeface="Pretendard" pitchFamily="34" charset="-122"/>
+                <a:cs typeface="Pretendard" pitchFamily="34" charset="-120"/>
+              </a:rPr>
+              <a:t>8. 검증과</a:t>
+            </a:r>
+            <a:endParaRPr lang="en-US" sz="1400" dirty="0"/>
+          </a:p>
+          <a:p>
+            <a:pPr marL="0" indent="0" algn="ctr">
+              <a:buNone/>
+            </a:pPr>
+            <a:r>
+              <a:rPr lang="en-US" sz="1400" b="1" dirty="0">
+                <a:solidFill>
+                  <a:srgbClr val="FFFFFF"/>
+                </a:solidFill>
+                <a:latin typeface="Pretendard" pitchFamily="34" charset="0"/>
+                <a:ea typeface="Pretendard" pitchFamily="34" charset="-122"/>
+                <a:cs typeface="Pretendard" pitchFamily="34" charset="-120"/>
+              </a:rPr>
+              <a:t>승인</a:t>
+            </a:r>
+            <a:endParaRPr lang="en-US" sz="1400" dirty="0"/>
+          </a:p>
+        </p:txBody>
+      </p:sp>
+      <p:sp>
+        <p:nvSpPr>
+          <p:cNvPr id="34" name="Shape 31"/>
+          <p:cNvSpPr/>
+          <p:nvPr/>
+        </p:nvSpPr>
+        <p:spPr>
+          <a:xfrm>
+            <a:off x="12815113" y="2350008"/>
+            <a:ext cx="128016" cy="365760"/>
+          </a:xfrm>
+          <a:prstGeom prst="line">
+            <a:avLst/>
+          </a:prstGeom>
+          <a:noFill/>
+          <a:ln w="22225">
+            <a:solidFill>
+              <a:srgbClr val="4A5364"/>
+            </a:solidFill>
+            <a:prstDash val="solid"/>
+            <a:tailEnd type="triangle"/>
+          </a:ln>
+        </p:spPr>
+        <p:txBody>
+          <a:bodyPr/>
+          <a:lstStyle/>
+          <a:p>
+            <a:endParaRPr lang="ko-KR" altLang="en-US"/>
+          </a:p>
+        </p:txBody>
+      </p:sp>
+      <p:sp>
+        <p:nvSpPr>
+          <p:cNvPr id="35" name="Shape 32"/>
+          <p:cNvSpPr/>
+          <p:nvPr/>
+        </p:nvSpPr>
+        <p:spPr>
+          <a:xfrm>
+            <a:off x="12970561" y="2670048"/>
+            <a:ext cx="1163320" cy="640080"/>
+          </a:xfrm>
+          <a:prstGeom prst="roundRect">
+            <a:avLst>
+              <a:gd name="adj" fmla="val 11429"/>
+            </a:avLst>
+          </a:prstGeom>
+          <a:solidFill>
+            <a:srgbClr val="FFFFFF"/>
+          </a:solidFill>
+          <a:ln w="15875">
+            <a:solidFill>
+              <a:srgbClr val="4A5364"/>
+            </a:solidFill>
+            <a:prstDash val="solid"/>
+          </a:ln>
+        </p:spPr>
+        <p:txBody>
+          <a:bodyPr/>
+          <a:lstStyle/>
+          <a:p>
+            <a:endParaRPr lang="ko-KR" altLang="en-US"/>
+          </a:p>
+        </p:txBody>
+      </p:sp>
+      <p:sp>
+        <p:nvSpPr>
+          <p:cNvPr id="36" name="Text 33"/>
+          <p:cNvSpPr txBox="1"/>
+          <p:nvPr/>
+        </p:nvSpPr>
+        <p:spPr>
+          <a:xfrm>
+            <a:off x="12970561" y="2670048"/>
+            <a:ext cx="1163320" cy="640080"/>
+          </a:xfrm>
+          <a:prstGeom prst="rect">
+            <a:avLst/>
+          </a:prstGeom>
+          <a:noFill/>
+          <a:ln/>
+        </p:spPr>
+        <p:txBody>
+          <a:bodyPr wrap="square" lIns="1016" tIns="1016" rIns="1016" bIns="1016" rtlCol="0" anchor="ctr"/>
+          <a:lstStyle/>
+          <a:p>
+            <a:pPr marL="0" indent="0" algn="ctr">
+              <a:buNone/>
+            </a:pPr>
+            <a:r>
+              <a:rPr lang="en-US" sz="1400" b="1" dirty="0">
+                <a:solidFill>
+                  <a:srgbClr val="2B3242"/>
+                </a:solidFill>
+                <a:latin typeface="Pretendard" pitchFamily="34" charset="0"/>
+                <a:ea typeface="Pretendard" pitchFamily="34" charset="-122"/>
+                <a:cs typeface="Pretendard" pitchFamily="34" charset="-120"/>
+              </a:rPr>
+              <a:t>9. 저장과</a:t>
+            </a:r>
+            <a:endParaRPr lang="en-US" sz="1400" dirty="0"/>
+          </a:p>
+          <a:p>
+            <a:pPr marL="0" indent="0" algn="ctr">
+              <a:buNone/>
+            </a:pPr>
+            <a:r>
+              <a:rPr lang="en-US" sz="1400" b="1" dirty="0">
+                <a:solidFill>
+                  <a:srgbClr val="2B3242"/>
+                </a:solidFill>
+                <a:latin typeface="Pretendard" pitchFamily="34" charset="0"/>
+                <a:ea typeface="Pretendard" pitchFamily="34" charset="-122"/>
+                <a:cs typeface="Pretendard" pitchFamily="34" charset="-120"/>
+              </a:rPr>
+              <a:t>다시 읽기</a:t>
+            </a:r>
+            <a:endParaRPr lang="en-US" sz="1400" dirty="0"/>
+          </a:p>
+        </p:txBody>
+      </p:sp>
+      <p:sp>
+        <p:nvSpPr>
+          <p:cNvPr id="37" name="Shape 34"/>
+          <p:cNvSpPr/>
+          <p:nvPr/>
+        </p:nvSpPr>
+        <p:spPr>
+          <a:xfrm>
+            <a:off x="12206021" y="2414016"/>
+            <a:ext cx="0" cy="1078992"/>
+          </a:xfrm>
+          <a:prstGeom prst="line">
+            <a:avLst/>
+          </a:prstGeom>
+          <a:noFill/>
+          <a:ln w="19050">
+            <a:solidFill>
+              <a:srgbClr val="2E74C6"/>
+            </a:solidFill>
+            <a:prstDash val="dash"/>
+            <a:tailEnd type="none"/>
+          </a:ln>
+        </p:spPr>
+        <p:txBody>
+          <a:bodyPr/>
+          <a:lstStyle/>
+          <a:p>
+            <a:endParaRPr lang="ko-KR" altLang="en-US"/>
+          </a:p>
+        </p:txBody>
+      </p:sp>
+      <p:sp>
+        <p:nvSpPr>
+          <p:cNvPr id="38" name="Shape 35"/>
+          <p:cNvSpPr/>
+          <p:nvPr/>
+        </p:nvSpPr>
+        <p:spPr>
+          <a:xfrm>
+            <a:off x="8167421" y="3493008"/>
+            <a:ext cx="4038600" cy="0"/>
+          </a:xfrm>
+          <a:prstGeom prst="line">
+            <a:avLst/>
+          </a:prstGeom>
+          <a:noFill/>
+          <a:ln w="19050">
+            <a:solidFill>
+              <a:srgbClr val="2E74C6"/>
+            </a:solidFill>
+            <a:prstDash val="dash"/>
+          </a:ln>
+        </p:spPr>
+        <p:txBody>
+          <a:bodyPr/>
+          <a:lstStyle/>
+          <a:p>
+            <a:endParaRPr lang="ko-KR" altLang="en-US"/>
+          </a:p>
+        </p:txBody>
+      </p:sp>
+      <p:sp>
+        <p:nvSpPr>
+          <p:cNvPr id="39" name="Shape 36"/>
+          <p:cNvSpPr/>
+          <p:nvPr/>
+        </p:nvSpPr>
+        <p:spPr>
+          <a:xfrm flipV="1">
+            <a:off x="8167421" y="3328416"/>
+            <a:ext cx="0" cy="164592"/>
+          </a:xfrm>
+          <a:prstGeom prst="line">
+            <a:avLst/>
+          </a:prstGeom>
+          <a:noFill/>
+          <a:ln w="19050">
+            <a:solidFill>
+              <a:srgbClr val="2E74C6"/>
+            </a:solidFill>
+            <a:prstDash val="dash"/>
+            <a:tailEnd type="triangle"/>
+          </a:ln>
+        </p:spPr>
+        <p:txBody>
+          <a:bodyPr/>
+          <a:lstStyle/>
+          <a:p>
+            <a:endParaRPr lang="ko-KR" altLang="en-US"/>
+          </a:p>
+        </p:txBody>
+      </p:sp>
+      <p:sp>
+        <p:nvSpPr>
+          <p:cNvPr id="40" name="Text 37"/>
+          <p:cNvSpPr txBox="1"/>
+          <p:nvPr/>
+        </p:nvSpPr>
+        <p:spPr>
+          <a:xfrm>
+            <a:off x="8258861" y="3511296"/>
+            <a:ext cx="3855720" cy="274320"/>
+          </a:xfrm>
+          <a:prstGeom prst="rect">
+            <a:avLst/>
+          </a:prstGeom>
+          <a:noFill/>
+          <a:ln/>
+        </p:spPr>
+        <p:txBody>
+          <a:bodyPr wrap="square" lIns="0" tIns="0" rIns="0" bIns="0" rtlCol="0" anchor="ctr"/>
+          <a:lstStyle/>
+          <a:p>
+            <a:pPr marL="0" indent="0" algn="ctr">
+              <a:buNone/>
+            </a:pPr>
+            <a:r>
+              <a:rPr lang="en-US" sz="1400" b="1" dirty="0">
+                <a:solidFill>
+                  <a:srgbClr val="2E74C6"/>
+                </a:solidFill>
+                <a:latin typeface="Pretendard" pitchFamily="34" charset="0"/>
+                <a:ea typeface="Pretendard" pitchFamily="34" charset="-122"/>
+                <a:cs typeface="Pretendard" pitchFamily="34" charset="-120"/>
+              </a:rPr>
+              <a:t>수정 요청 시 5단계부터 다시(최대 5회)</a:t>
+            </a:r>
+            <a:endParaRPr lang="en-US" sz="1400" dirty="0"/>
+          </a:p>
+        </p:txBody>
+      </p:sp>
+      <p:sp>
+        <p:nvSpPr>
+          <p:cNvPr id="41" name="Shape 38"/>
+          <p:cNvSpPr/>
+          <p:nvPr/>
+        </p:nvSpPr>
+        <p:spPr>
+          <a:xfrm>
+            <a:off x="509321" y="3858768"/>
+            <a:ext cx="4343400" cy="365760"/>
+          </a:xfrm>
+          <a:prstGeom prst="roundRect">
+            <a:avLst>
+              <a:gd name="adj" fmla="val 12500"/>
+            </a:avLst>
+          </a:prstGeom>
+          <a:solidFill>
+            <a:srgbClr val="2E74C6"/>
+          </a:solidFill>
+          <a:ln/>
+        </p:spPr>
+        <p:txBody>
+          <a:bodyPr/>
+          <a:lstStyle/>
+          <a:p>
+            <a:endParaRPr lang="ko-KR" altLang="en-US"/>
+          </a:p>
+        </p:txBody>
+      </p:sp>
+      <p:sp>
+        <p:nvSpPr>
+          <p:cNvPr id="42" name="Text 39"/>
+          <p:cNvSpPr txBox="1"/>
+          <p:nvPr/>
+        </p:nvSpPr>
+        <p:spPr>
+          <a:xfrm>
+            <a:off x="509321" y="3858768"/>
+            <a:ext cx="4343400" cy="365760"/>
+          </a:xfrm>
+          <a:prstGeom prst="rect">
+            <a:avLst/>
+          </a:prstGeom>
+          <a:noFill/>
+          <a:ln/>
+        </p:spPr>
+        <p:txBody>
+          <a:bodyPr wrap="square" lIns="1016" tIns="1016" rIns="1016" bIns="1016" rtlCol="0" anchor="ctr"/>
+          <a:lstStyle/>
+          <a:p>
+            <a:pPr marL="0" indent="0" algn="ctr">
+              <a:buNone/>
+            </a:pPr>
+            <a:r>
+              <a:rPr lang="en-US" sz="1600" b="1" dirty="0">
+                <a:solidFill>
+                  <a:srgbClr val="FFFFFF"/>
+                </a:solidFill>
+                <a:latin typeface="Pretendard" pitchFamily="34" charset="0"/>
+                <a:ea typeface="Pretendard" pitchFamily="34" charset="-122"/>
+                <a:cs typeface="Pretendard" pitchFamily="34" charset="-120"/>
+              </a:rPr>
+              <a:t>사람이 답하는 곳 3번</a:t>
+            </a:r>
+            <a:endParaRPr lang="en-US" sz="1600" dirty="0"/>
+          </a:p>
+        </p:txBody>
+      </p:sp>
+      <p:sp>
+        <p:nvSpPr>
+          <p:cNvPr id="43" name="Shape 40"/>
+          <p:cNvSpPr/>
+          <p:nvPr/>
+        </p:nvSpPr>
+        <p:spPr>
+          <a:xfrm>
+            <a:off x="509321" y="4297680"/>
+            <a:ext cx="4343400" cy="585216"/>
+          </a:xfrm>
+          <a:prstGeom prst="roundRect">
+            <a:avLst>
+              <a:gd name="adj" fmla="val 9375"/>
+            </a:avLst>
+          </a:prstGeom>
+          <a:solidFill>
+            <a:srgbClr val="EEF3FA"/>
+          </a:solidFill>
+          <a:ln w="12700">
+            <a:solidFill>
+              <a:srgbClr val="2E74C6"/>
+            </a:solidFill>
+            <a:prstDash val="solid"/>
+          </a:ln>
+        </p:spPr>
+        <p:txBody>
+          <a:bodyPr/>
+          <a:lstStyle/>
+          <a:p>
+            <a:endParaRPr lang="ko-KR" altLang="en-US"/>
+          </a:p>
+        </p:txBody>
+      </p:sp>
+      <p:sp>
+        <p:nvSpPr>
+          <p:cNvPr id="44" name="Shape 41"/>
+          <p:cNvSpPr/>
+          <p:nvPr/>
+        </p:nvSpPr>
+        <p:spPr>
+          <a:xfrm>
+            <a:off x="600761" y="4416552"/>
+            <a:ext cx="347472" cy="347472"/>
+          </a:xfrm>
+          <a:prstGeom prst="roundRect">
+            <a:avLst>
+              <a:gd name="adj" fmla="val 13158"/>
+            </a:avLst>
+          </a:prstGeom>
+          <a:solidFill>
+            <a:srgbClr val="2E74C6"/>
+          </a:solidFill>
+          <a:ln/>
+        </p:spPr>
+        <p:txBody>
+          <a:bodyPr/>
+          <a:lstStyle/>
+          <a:p>
+            <a:endParaRPr lang="ko-KR" altLang="en-US"/>
+          </a:p>
+        </p:txBody>
+      </p:sp>
+      <p:sp>
+        <p:nvSpPr>
+          <p:cNvPr id="45" name="Text 42"/>
+          <p:cNvSpPr txBox="1"/>
+          <p:nvPr/>
+        </p:nvSpPr>
+        <p:spPr>
+          <a:xfrm>
+            <a:off x="600761" y="4416552"/>
+            <a:ext cx="347472" cy="347472"/>
+          </a:xfrm>
+          <a:prstGeom prst="rect">
+            <a:avLst/>
+          </a:prstGeom>
+          <a:noFill/>
+          <a:ln/>
+        </p:spPr>
+        <p:txBody>
+          <a:bodyPr wrap="square" lIns="1016" tIns="1016" rIns="1016" bIns="1016" rtlCol="0" anchor="ctr"/>
+          <a:lstStyle/>
+          <a:p>
+            <a:pPr marL="0" indent="0" algn="ctr">
+              <a:buNone/>
+            </a:pPr>
+            <a:r>
+              <a:rPr lang="en-US" sz="1600" b="1" dirty="0">
+                <a:solidFill>
+                  <a:srgbClr val="FFFFFF"/>
+                </a:solidFill>
+                <a:latin typeface="Pretendard" pitchFamily="34" charset="0"/>
+                <a:ea typeface="Pretendard" pitchFamily="34" charset="-122"/>
+                <a:cs typeface="Pretendard" pitchFamily="34" charset="-120"/>
+              </a:rPr>
+              <a:t>1</a:t>
+            </a:r>
+            <a:endParaRPr lang="en-US" sz="1600" dirty="0"/>
+          </a:p>
+        </p:txBody>
+      </p:sp>
+      <p:sp>
+        <p:nvSpPr>
+          <p:cNvPr id="46" name="Text 43"/>
+          <p:cNvSpPr txBox="1"/>
+          <p:nvPr/>
+        </p:nvSpPr>
+        <p:spPr>
+          <a:xfrm>
+            <a:off x="1057961" y="4297680"/>
+            <a:ext cx="3703320" cy="585216"/>
+          </a:xfrm>
+          <a:prstGeom prst="rect">
+            <a:avLst/>
+          </a:prstGeom>
+          <a:noFill/>
+          <a:ln/>
+        </p:spPr>
+        <p:txBody>
+          <a:bodyPr wrap="square" lIns="0" tIns="0" rIns="0" bIns="0" rtlCol="0" anchor="ctr"/>
+          <a:lstStyle/>
+          <a:p>
+            <a:pPr marL="0" indent="0" algn="l">
+              <a:buNone/>
+            </a:pPr>
+            <a:r>
+              <a:rPr lang="en-US" sz="1400" b="1" dirty="0">
+                <a:solidFill>
+                  <a:srgbClr val="1E2A5C"/>
+                </a:solidFill>
+                <a:latin typeface="Pretendard" pitchFamily="34" charset="0"/>
+                <a:ea typeface="Pretendard" pitchFamily="34" charset="-122"/>
+                <a:cs typeface="Pretendard" pitchFamily="34" charset="-120"/>
+              </a:rPr>
+              <a:t>출력 폴더와 DB 접속 정보</a:t>
+            </a:r>
+            <a:endParaRPr lang="en-US" sz="1400" dirty="0"/>
+          </a:p>
+          <a:p>
+            <a:pPr marL="0" indent="0" algn="l">
+              <a:buNone/>
+            </a:pPr>
+            <a:r>
+              <a:rPr lang="en-US" sz="1400" b="1" dirty="0">
+                <a:solidFill>
+                  <a:srgbClr val="1E2A5C"/>
+                </a:solidFill>
+                <a:latin typeface="Pretendard" pitchFamily="34" charset="0"/>
+                <a:ea typeface="Pretendard" pitchFamily="34" charset="-122"/>
+                <a:cs typeface="Pretendard" pitchFamily="34" charset="-120"/>
+              </a:rPr>
+              <a:t>비밀번호는 .env에 직접 등록</a:t>
+            </a:r>
+            <a:endParaRPr lang="en-US" sz="1400" dirty="0"/>
+          </a:p>
+        </p:txBody>
+      </p:sp>
+      <p:sp>
+        <p:nvSpPr>
+          <p:cNvPr id="47" name="Shape 44"/>
+          <p:cNvSpPr/>
+          <p:nvPr/>
+        </p:nvSpPr>
+        <p:spPr>
+          <a:xfrm>
+            <a:off x="509321" y="4946904"/>
+            <a:ext cx="4343400" cy="804672"/>
+          </a:xfrm>
+          <a:prstGeom prst="roundRect">
+            <a:avLst>
+              <a:gd name="adj" fmla="val 6818"/>
+            </a:avLst>
+          </a:prstGeom>
+          <a:solidFill>
+            <a:srgbClr val="EEF3FA"/>
+          </a:solidFill>
+          <a:ln w="12700">
+            <a:solidFill>
+              <a:srgbClr val="2E74C6"/>
+            </a:solidFill>
+            <a:prstDash val="solid"/>
+          </a:ln>
+        </p:spPr>
+        <p:txBody>
+          <a:bodyPr/>
+          <a:lstStyle/>
+          <a:p>
+            <a:endParaRPr lang="ko-KR" altLang="en-US"/>
+          </a:p>
+        </p:txBody>
+      </p:sp>
+      <p:sp>
+        <p:nvSpPr>
+          <p:cNvPr id="48" name="Shape 45"/>
+          <p:cNvSpPr/>
+          <p:nvPr/>
+        </p:nvSpPr>
+        <p:spPr>
+          <a:xfrm>
+            <a:off x="600761" y="5175504"/>
+            <a:ext cx="347472" cy="347472"/>
+          </a:xfrm>
+          <a:prstGeom prst="roundRect">
+            <a:avLst>
+              <a:gd name="adj" fmla="val 13158"/>
+            </a:avLst>
+          </a:prstGeom>
+          <a:solidFill>
+            <a:srgbClr val="2E74C6"/>
+          </a:solidFill>
+          <a:ln/>
+        </p:spPr>
+        <p:txBody>
+          <a:bodyPr/>
+          <a:lstStyle/>
+          <a:p>
+            <a:endParaRPr lang="ko-KR" altLang="en-US"/>
+          </a:p>
+        </p:txBody>
+      </p:sp>
+      <p:sp>
+        <p:nvSpPr>
+          <p:cNvPr id="49" name="Text 46"/>
+          <p:cNvSpPr txBox="1"/>
+          <p:nvPr/>
+        </p:nvSpPr>
+        <p:spPr>
+          <a:xfrm>
+            <a:off x="600761" y="5175504"/>
+            <a:ext cx="347472" cy="347472"/>
+          </a:xfrm>
+          <a:prstGeom prst="rect">
+            <a:avLst/>
+          </a:prstGeom>
+          <a:noFill/>
+          <a:ln/>
+        </p:spPr>
+        <p:txBody>
+          <a:bodyPr wrap="square" lIns="1016" tIns="1016" rIns="1016" bIns="1016" rtlCol="0" anchor="ctr"/>
+          <a:lstStyle/>
+          <a:p>
+            <a:pPr marL="0" indent="0" algn="ctr">
+              <a:buNone/>
+            </a:pPr>
+            <a:r>
+              <a:rPr lang="en-US" sz="1600" b="1" dirty="0">
+                <a:solidFill>
+                  <a:srgbClr val="FFFFFF"/>
+                </a:solidFill>
+                <a:latin typeface="Pretendard" pitchFamily="34" charset="0"/>
+                <a:ea typeface="Pretendard" pitchFamily="34" charset="-122"/>
+                <a:cs typeface="Pretendard" pitchFamily="34" charset="-120"/>
+              </a:rPr>
+              <a:t>4</a:t>
+            </a:r>
+            <a:endParaRPr lang="en-US" sz="1600" dirty="0"/>
+          </a:p>
+        </p:txBody>
+      </p:sp>
+      <p:sp>
+        <p:nvSpPr>
+          <p:cNvPr id="50" name="Text 47"/>
+          <p:cNvSpPr txBox="1"/>
+          <p:nvPr/>
+        </p:nvSpPr>
+        <p:spPr>
+          <a:xfrm>
+            <a:off x="1057961" y="4946904"/>
+            <a:ext cx="3703320" cy="804672"/>
+          </a:xfrm>
+          <a:prstGeom prst="rect">
+            <a:avLst/>
+          </a:prstGeom>
+          <a:noFill/>
+          <a:ln/>
+        </p:spPr>
+        <p:txBody>
+          <a:bodyPr wrap="square" lIns="0" tIns="0" rIns="0" bIns="0" rtlCol="0" anchor="ctr"/>
+          <a:lstStyle/>
+          <a:p>
+            <a:pPr marL="0" indent="0" algn="l">
+              <a:buNone/>
+            </a:pPr>
+            <a:r>
+              <a:rPr lang="en-US" sz="1400" b="1" dirty="0">
+                <a:solidFill>
+                  <a:srgbClr val="1E2A5C"/>
+                </a:solidFill>
+                <a:latin typeface="Pretendard" pitchFamily="34" charset="0"/>
+                <a:ea typeface="Pretendard" pitchFamily="34" charset="-122"/>
+                <a:cs typeface="Pretendard" pitchFamily="34" charset="-120"/>
+              </a:rPr>
+              <a:t>규칙 ① 후보(FK 2개 + 업무 열)를 노드 타입</a:t>
+            </a:r>
+            <a:endParaRPr lang="en-US" sz="1400" dirty="0"/>
+          </a:p>
+          <a:p>
+            <a:pPr marL="0" indent="0" algn="l">
+              <a:buNone/>
+            </a:pPr>
+            <a:r>
+              <a:rPr lang="en-US" sz="1400" b="1" dirty="0">
+                <a:solidFill>
+                  <a:srgbClr val="1E2A5C"/>
+                </a:solidFill>
+                <a:latin typeface="Pretendard" pitchFamily="34" charset="0"/>
+                <a:ea typeface="Pretendard" pitchFamily="34" charset="-122"/>
+                <a:cs typeface="Pretendard" pitchFamily="34" charset="-120"/>
+              </a:rPr>
+              <a:t>또는 관계 + 관계 속성으로 정함</a:t>
+            </a:r>
+            <a:endParaRPr lang="en-US" sz="1400" dirty="0"/>
+          </a:p>
+          <a:p>
+            <a:pPr marL="0" indent="0" algn="l">
+              <a:buNone/>
+            </a:pPr>
+            <a:r>
+              <a:rPr lang="en-US" sz="1400" b="1" dirty="0">
+                <a:solidFill>
+                  <a:srgbClr val="1E2A5C"/>
+                </a:solidFill>
+                <a:latin typeface="Pretendard" pitchFamily="34" charset="0"/>
+                <a:ea typeface="Pretendard" pitchFamily="34" charset="-122"/>
+                <a:cs typeface="Pretendard" pitchFamily="34" charset="-120"/>
+              </a:rPr>
+              <a:t>뺄 테이블, 이름 후보 승인</a:t>
+            </a:r>
+            <a:endParaRPr lang="en-US" sz="1400" dirty="0"/>
+          </a:p>
+        </p:txBody>
+      </p:sp>
+      <p:sp>
+        <p:nvSpPr>
+          <p:cNvPr id="51" name="Shape 48"/>
+          <p:cNvSpPr/>
+          <p:nvPr/>
+        </p:nvSpPr>
+        <p:spPr>
+          <a:xfrm>
+            <a:off x="509321" y="5815584"/>
+            <a:ext cx="4343400" cy="585216"/>
+          </a:xfrm>
+          <a:prstGeom prst="roundRect">
+            <a:avLst>
+              <a:gd name="adj" fmla="val 9375"/>
+            </a:avLst>
+          </a:prstGeom>
+          <a:solidFill>
+            <a:srgbClr val="EEF3FA"/>
+          </a:solidFill>
+          <a:ln w="12700">
+            <a:solidFill>
+              <a:srgbClr val="2E74C6"/>
+            </a:solidFill>
+            <a:prstDash val="solid"/>
+          </a:ln>
+        </p:spPr>
+        <p:txBody>
+          <a:bodyPr/>
+          <a:lstStyle/>
+          <a:p>
+            <a:endParaRPr lang="ko-KR" altLang="en-US"/>
+          </a:p>
+        </p:txBody>
+      </p:sp>
+      <p:sp>
+        <p:nvSpPr>
+          <p:cNvPr id="52" name="Shape 49"/>
+          <p:cNvSpPr/>
+          <p:nvPr/>
+        </p:nvSpPr>
+        <p:spPr>
+          <a:xfrm>
+            <a:off x="600761" y="5934456"/>
+            <a:ext cx="347472" cy="347472"/>
+          </a:xfrm>
+          <a:prstGeom prst="roundRect">
+            <a:avLst>
+              <a:gd name="adj" fmla="val 13158"/>
+            </a:avLst>
+          </a:prstGeom>
+          <a:solidFill>
+            <a:srgbClr val="2E74C6"/>
+          </a:solidFill>
+          <a:ln/>
+        </p:spPr>
+        <p:txBody>
+          <a:bodyPr/>
+          <a:lstStyle/>
+          <a:p>
+            <a:endParaRPr lang="ko-KR" altLang="en-US"/>
+          </a:p>
+        </p:txBody>
+      </p:sp>
+      <p:sp>
+        <p:nvSpPr>
+          <p:cNvPr id="53" name="Text 50"/>
+          <p:cNvSpPr txBox="1"/>
+          <p:nvPr/>
+        </p:nvSpPr>
+        <p:spPr>
+          <a:xfrm>
+            <a:off x="600761" y="5934456"/>
+            <a:ext cx="347472" cy="347472"/>
+          </a:xfrm>
+          <a:prstGeom prst="rect">
+            <a:avLst/>
+          </a:prstGeom>
+          <a:noFill/>
+          <a:ln/>
+        </p:spPr>
+        <p:txBody>
+          <a:bodyPr wrap="square" lIns="1016" tIns="1016" rIns="1016" bIns="1016" rtlCol="0" anchor="ctr"/>
+          <a:lstStyle/>
+          <a:p>
+            <a:pPr marL="0" indent="0" algn="ctr">
+              <a:buNone/>
+            </a:pPr>
+            <a:r>
+              <a:rPr lang="en-US" sz="1600" b="1" dirty="0">
+                <a:solidFill>
+                  <a:srgbClr val="FFFFFF"/>
+                </a:solidFill>
+                <a:latin typeface="Pretendard" pitchFamily="34" charset="0"/>
+                <a:ea typeface="Pretendard" pitchFamily="34" charset="-122"/>
+                <a:cs typeface="Pretendard" pitchFamily="34" charset="-120"/>
+              </a:rPr>
+              <a:t>8</a:t>
+            </a:r>
+            <a:endParaRPr lang="en-US" sz="1600" dirty="0"/>
+          </a:p>
+        </p:txBody>
+      </p:sp>
+      <p:sp>
+        <p:nvSpPr>
+          <p:cNvPr id="54" name="Text 51"/>
+          <p:cNvSpPr txBox="1"/>
+          <p:nvPr/>
+        </p:nvSpPr>
+        <p:spPr>
+          <a:xfrm>
+            <a:off x="1057961" y="5815584"/>
+            <a:ext cx="3703320" cy="585216"/>
+          </a:xfrm>
+          <a:prstGeom prst="rect">
+            <a:avLst/>
+          </a:prstGeom>
+          <a:noFill/>
+          <a:ln/>
+        </p:spPr>
+        <p:txBody>
+          <a:bodyPr wrap="square" lIns="0" tIns="0" rIns="0" bIns="0" rtlCol="0" anchor="ctr"/>
+          <a:lstStyle/>
+          <a:p>
+            <a:pPr marL="0" indent="0" algn="l">
+              <a:buNone/>
+            </a:pPr>
+            <a:r>
+              <a:rPr lang="en-US" sz="1400" b="1" dirty="0">
+                <a:solidFill>
+                  <a:srgbClr val="1E2A5C"/>
+                </a:solidFill>
+                <a:latin typeface="Pretendard" pitchFamily="34" charset="0"/>
+                <a:ea typeface="Pretendard" pitchFamily="34" charset="-122"/>
+                <a:cs typeface="Pretendard" pitchFamily="34" charset="-120"/>
+              </a:rPr>
+              <a:t>Mermaid 그림과 판정표를 보고 승인</a:t>
+            </a:r>
+            <a:endParaRPr lang="en-US" sz="1400" dirty="0"/>
+          </a:p>
+          <a:p>
+            <a:pPr marL="0" indent="0" algn="l">
+              <a:buNone/>
+            </a:pPr>
+            <a:r>
+              <a:rPr lang="en-US" sz="1400" b="1" dirty="0">
+                <a:solidFill>
+                  <a:srgbClr val="1E2A5C"/>
+                </a:solidFill>
+                <a:latin typeface="Pretendard" pitchFamily="34" charset="0"/>
+                <a:ea typeface="Pretendard" pitchFamily="34" charset="-122"/>
+                <a:cs typeface="Pretendard" pitchFamily="34" charset="-120"/>
+              </a:rPr>
+              <a:t>(승인자와 일시를 기록)</a:t>
+            </a:r>
+            <a:endParaRPr lang="en-US" sz="1400" dirty="0"/>
+          </a:p>
+        </p:txBody>
+      </p:sp>
+      <p:sp>
+        <p:nvSpPr>
+          <p:cNvPr id="55" name="Shape 52"/>
+          <p:cNvSpPr/>
+          <p:nvPr/>
+        </p:nvSpPr>
+        <p:spPr>
+          <a:xfrm>
+            <a:off x="5081321" y="3858768"/>
+            <a:ext cx="4572000" cy="365760"/>
+          </a:xfrm>
+          <a:prstGeom prst="roundRect">
+            <a:avLst>
+              <a:gd name="adj" fmla="val 12500"/>
+            </a:avLst>
+          </a:prstGeom>
+          <a:solidFill>
+            <a:srgbClr val="1E2A5C"/>
+          </a:solidFill>
+          <a:ln/>
+        </p:spPr>
+        <p:txBody>
+          <a:bodyPr/>
+          <a:lstStyle/>
+          <a:p>
+            <a:endParaRPr lang="ko-KR" altLang="en-US"/>
+          </a:p>
+        </p:txBody>
+      </p:sp>
+      <p:sp>
+        <p:nvSpPr>
+          <p:cNvPr id="56" name="Text 53"/>
+          <p:cNvSpPr txBox="1"/>
+          <p:nvPr/>
+        </p:nvSpPr>
+        <p:spPr>
+          <a:xfrm>
+            <a:off x="5081321" y="3858768"/>
+            <a:ext cx="4572000" cy="365760"/>
+          </a:xfrm>
+          <a:prstGeom prst="rect">
+            <a:avLst/>
+          </a:prstGeom>
+          <a:noFill/>
+          <a:ln/>
+        </p:spPr>
+        <p:txBody>
+          <a:bodyPr wrap="square" lIns="1016" tIns="1016" rIns="1016" bIns="1016" rtlCol="0" anchor="ctr"/>
+          <a:lstStyle/>
+          <a:p>
+            <a:pPr marL="0" indent="0" algn="ctr">
+              <a:buNone/>
+            </a:pPr>
+            <a:r>
+              <a:rPr lang="en-US" sz="1600" b="1" dirty="0">
+                <a:solidFill>
+                  <a:srgbClr val="FFFFFF"/>
+                </a:solidFill>
+                <a:latin typeface="Pretendard" pitchFamily="34" charset="0"/>
+                <a:ea typeface="Pretendard" pitchFamily="34" charset="-122"/>
+                <a:cs typeface="Pretendard" pitchFamily="34" charset="-120"/>
+              </a:rPr>
+              <a:t>AI가 지키는 규칙</a:t>
+            </a:r>
+            <a:endParaRPr lang="en-US" sz="1600" dirty="0"/>
+          </a:p>
+        </p:txBody>
+      </p:sp>
+      <p:sp>
+        <p:nvSpPr>
+          <p:cNvPr id="57" name="Shape 54"/>
+          <p:cNvSpPr/>
+          <p:nvPr/>
+        </p:nvSpPr>
+        <p:spPr>
+          <a:xfrm>
+            <a:off x="5081321" y="4297680"/>
+            <a:ext cx="4572000" cy="2103120"/>
+          </a:xfrm>
+          <a:prstGeom prst="roundRect">
+            <a:avLst>
+              <a:gd name="adj" fmla="val 3478"/>
+            </a:avLst>
+          </a:prstGeom>
+          <a:solidFill>
+            <a:srgbClr val="FFFFFF"/>
+          </a:solidFill>
+          <a:ln w="12700">
+            <a:solidFill>
+              <a:srgbClr val="D9E0EC"/>
+            </a:solidFill>
+            <a:prstDash val="solid"/>
+          </a:ln>
+        </p:spPr>
+        <p:txBody>
+          <a:bodyPr/>
+          <a:lstStyle/>
+          <a:p>
+            <a:endParaRPr lang="ko-KR" altLang="en-US"/>
+          </a:p>
+        </p:txBody>
+      </p:sp>
+      <p:sp>
+        <p:nvSpPr>
+          <p:cNvPr id="58" name="Text 55"/>
+          <p:cNvSpPr txBox="1"/>
+          <p:nvPr/>
+        </p:nvSpPr>
+        <p:spPr>
+          <a:xfrm>
+            <a:off x="5264201" y="4352544"/>
+            <a:ext cx="4297680" cy="1993392"/>
+          </a:xfrm>
+          <a:prstGeom prst="rect">
+            <a:avLst/>
+          </a:prstGeom>
+          <a:noFill/>
+          <a:ln/>
+        </p:spPr>
+        <p:txBody>
+          <a:bodyPr wrap="square" lIns="0" tIns="0" rIns="0" bIns="0" rtlCol="0" anchor="ctr"/>
+          <a:lstStyle/>
+          <a:p>
+            <a:pPr marL="0" indent="0">
+              <a:spcAft>
+                <a:spcPts val="700"/>
+              </a:spcAft>
+              <a:buNone/>
+            </a:pPr>
+            <a:r>
+              <a:rPr lang="en-US" sz="1400" dirty="0">
+                <a:solidFill>
+                  <a:srgbClr val="2B3242"/>
+                </a:solidFill>
+                <a:latin typeface="Pretendard" pitchFamily="34" charset="0"/>
+                <a:ea typeface="Pretendard" pitchFamily="34" charset="-122"/>
+                <a:cs typeface="Pretendard" pitchFamily="34" charset="-120"/>
+              </a:rPr>
+              <a:t>• FK 개수는 열 수가 아니라 제약 수로 셈</a:t>
+            </a:r>
+            <a:endParaRPr lang="en-US" sz="1400" dirty="0"/>
+          </a:p>
+          <a:p>
+            <a:pPr marL="0" indent="0">
+              <a:spcAft>
+                <a:spcPts val="700"/>
+              </a:spcAft>
+              <a:buNone/>
+            </a:pPr>
+            <a:r>
+              <a:rPr lang="en-US" sz="1400" dirty="0">
+                <a:solidFill>
+                  <a:srgbClr val="2B3242"/>
+                </a:solidFill>
+                <a:latin typeface="Pretendard" pitchFamily="34" charset="0"/>
+                <a:ea typeface="Pretendard" pitchFamily="34" charset="-122"/>
+                <a:cs typeface="Pretendard" pitchFamily="34" charset="-120"/>
+              </a:rPr>
+              <a:t>• DB는 읽기 전용, 비밀번호는 .env에만 둠</a:t>
+            </a:r>
+            <a:endParaRPr lang="en-US" sz="1400" dirty="0"/>
+          </a:p>
+          <a:p>
+            <a:pPr marL="0" indent="0">
+              <a:spcAft>
+                <a:spcPts val="700"/>
+              </a:spcAft>
+              <a:buNone/>
+            </a:pPr>
+            <a:r>
+              <a:rPr lang="en-US" sz="1400" dirty="0">
+                <a:solidFill>
+                  <a:srgbClr val="2B3242"/>
+                </a:solidFill>
+                <a:latin typeface="Pretendard" pitchFamily="34" charset="0"/>
+                <a:ea typeface="Pretendard" pitchFamily="34" charset="-122"/>
+                <a:cs typeface="Pretendard" pitchFamily="34" charset="-120"/>
+              </a:rPr>
+              <a:t>• 라벨은 영문, 한글 이름은 description에 넣음</a:t>
+            </a:r>
+            <a:endParaRPr lang="en-US" sz="1400" dirty="0"/>
+          </a:p>
+          <a:p>
+            <a:pPr marL="0" indent="0">
+              <a:spcAft>
+                <a:spcPts val="700"/>
+              </a:spcAft>
+              <a:buNone/>
+            </a:pPr>
+            <a:r>
+              <a:rPr lang="en-US" sz="1400" dirty="0">
+                <a:solidFill>
+                  <a:srgbClr val="2B3242"/>
+                </a:solidFill>
+                <a:latin typeface="Pretendard" pitchFamily="34" charset="0"/>
+                <a:ea typeface="Pretendard" pitchFamily="34" charset="-122"/>
+                <a:cs typeface="Pretendard" pitchFamily="34" charset="-120"/>
+              </a:rPr>
+              <a:t>• 그림은 Mermaid만 씀</a:t>
+            </a:r>
+            <a:endParaRPr lang="en-US" sz="1400" dirty="0"/>
+          </a:p>
+          <a:p>
+            <a:pPr marL="0" indent="0">
+              <a:spcAft>
+                <a:spcPts val="700"/>
+              </a:spcAft>
+              <a:buNone/>
+            </a:pPr>
+            <a:r>
+              <a:rPr lang="en-US" sz="1400" dirty="0">
+                <a:solidFill>
+                  <a:srgbClr val="2B3242"/>
+                </a:solidFill>
+                <a:latin typeface="Pretendard" pitchFamily="34" charset="0"/>
+                <a:ea typeface="Pretendard" pitchFamily="34" charset="-122"/>
+                <a:cs typeface="Pretendard" pitchFamily="34" charset="-120"/>
+              </a:rPr>
+              <a:t>• 규칙 ① 판정과 이름은 추측해 확정하지 않음</a:t>
+            </a:r>
+            <a:endParaRPr lang="en-US" sz="1400" dirty="0"/>
+          </a:p>
+          <a:p>
+            <a:pPr marL="0" indent="0">
+              <a:spcAft>
+                <a:spcPts val="700"/>
+              </a:spcAft>
+              <a:buNone/>
+            </a:pPr>
+            <a:r>
+              <a:rPr lang="en-US" sz="1400" dirty="0">
+                <a:solidFill>
+                  <a:srgbClr val="2B3242"/>
+                </a:solidFill>
+                <a:latin typeface="Pretendard" pitchFamily="34" charset="0"/>
+                <a:ea typeface="Pretendard" pitchFamily="34" charset="-122"/>
+                <a:cs typeface="Pretendard" pitchFamily="34" charset="-120"/>
+              </a:rPr>
+              <a:t>• 후보 표시가 남으면 스키마 파일을 만들지 않음</a:t>
+            </a:r>
+            <a:endParaRPr lang="en-US" sz="1400" dirty="0"/>
+          </a:p>
+        </p:txBody>
+      </p:sp>
+      <p:sp>
+        <p:nvSpPr>
+          <p:cNvPr id="59" name="Shape 56"/>
+          <p:cNvSpPr/>
+          <p:nvPr/>
+        </p:nvSpPr>
+        <p:spPr>
+          <a:xfrm>
+            <a:off x="9881921" y="3858768"/>
+            <a:ext cx="4251960" cy="365760"/>
+          </a:xfrm>
+          <a:prstGeom prst="roundRect">
+            <a:avLst>
+              <a:gd name="adj" fmla="val 12500"/>
+            </a:avLst>
+          </a:prstGeom>
+          <a:solidFill>
+            <a:srgbClr val="404155"/>
+          </a:solidFill>
+          <a:ln/>
+        </p:spPr>
+        <p:txBody>
+          <a:bodyPr/>
+          <a:lstStyle/>
+          <a:p>
+            <a:endParaRPr lang="ko-KR" altLang="en-US"/>
+          </a:p>
+        </p:txBody>
+      </p:sp>
+      <p:sp>
+        <p:nvSpPr>
+          <p:cNvPr id="60" name="Text 57"/>
+          <p:cNvSpPr txBox="1"/>
+          <p:nvPr/>
+        </p:nvSpPr>
+        <p:spPr>
+          <a:xfrm>
+            <a:off x="9881921" y="3858768"/>
+            <a:ext cx="4251960" cy="365760"/>
+          </a:xfrm>
+          <a:prstGeom prst="rect">
+            <a:avLst/>
+          </a:prstGeom>
+          <a:noFill/>
+          <a:ln/>
+        </p:spPr>
+        <p:txBody>
+          <a:bodyPr wrap="square" lIns="1016" tIns="1016" rIns="1016" bIns="1016" rtlCol="0" anchor="ctr"/>
+          <a:lstStyle/>
+          <a:p>
+            <a:pPr marL="0" indent="0" algn="ctr">
+              <a:buNone/>
+            </a:pPr>
+            <a:r>
+              <a:rPr lang="en-US" sz="1600" b="1" dirty="0">
+                <a:solidFill>
+                  <a:srgbClr val="FFFFFF"/>
+                </a:solidFill>
+                <a:latin typeface="Pretendard" pitchFamily="34" charset="0"/>
+                <a:ea typeface="Pretendard" pitchFamily="34" charset="-122"/>
+                <a:cs typeface="Pretendard" pitchFamily="34" charset="-120"/>
+              </a:rPr>
+              <a:t>승인 화면 예 (Mermaid 그림)</a:t>
+            </a:r>
+            <a:endParaRPr lang="en-US" sz="1600" dirty="0"/>
+          </a:p>
+        </p:txBody>
+      </p:sp>
+      <p:sp>
+        <p:nvSpPr>
+          <p:cNvPr id="61" name="Shape 58"/>
+          <p:cNvSpPr/>
+          <p:nvPr/>
+        </p:nvSpPr>
+        <p:spPr>
+          <a:xfrm>
+            <a:off x="9881921" y="4297680"/>
+            <a:ext cx="4251960" cy="2103120"/>
+          </a:xfrm>
+          <a:prstGeom prst="roundRect">
+            <a:avLst>
+              <a:gd name="adj" fmla="val 3478"/>
+            </a:avLst>
+          </a:prstGeom>
+          <a:solidFill>
+            <a:srgbClr val="FFFFFF"/>
+          </a:solidFill>
+          <a:ln w="12700">
+            <a:solidFill>
+              <a:srgbClr val="D9E0EC"/>
+            </a:solidFill>
+            <a:prstDash val="solid"/>
+          </a:ln>
+        </p:spPr>
+        <p:txBody>
+          <a:bodyPr/>
+          <a:lstStyle/>
+          <a:p>
+            <a:endParaRPr lang="ko-KR" altLang="en-US"/>
+          </a:p>
+        </p:txBody>
+      </p:sp>
+      <p:sp>
+        <p:nvSpPr>
+          <p:cNvPr id="62" name="Shape 59"/>
+          <p:cNvSpPr/>
+          <p:nvPr/>
+        </p:nvSpPr>
+        <p:spPr>
+          <a:xfrm>
+            <a:off x="10019081" y="4480560"/>
+            <a:ext cx="1417320" cy="1325880"/>
+          </a:xfrm>
+          <a:prstGeom prst="roundRect">
+            <a:avLst>
+              <a:gd name="adj" fmla="val 5517"/>
+            </a:avLst>
+          </a:prstGeom>
+          <a:solidFill>
+            <a:srgbClr val="EEF3FA"/>
+          </a:solidFill>
+          <a:ln w="19050">
+            <a:solidFill>
+              <a:srgbClr val="1E2A5C"/>
+            </a:solidFill>
+            <a:prstDash val="solid"/>
+          </a:ln>
+        </p:spPr>
+        <p:txBody>
+          <a:bodyPr/>
+          <a:lstStyle/>
+          <a:p>
+            <a:endParaRPr lang="ko-KR" altLang="en-US"/>
+          </a:p>
+        </p:txBody>
+      </p:sp>
+      <p:sp>
+        <p:nvSpPr>
+          <p:cNvPr id="63" name="Shape 60"/>
+          <p:cNvSpPr/>
+          <p:nvPr/>
+        </p:nvSpPr>
+        <p:spPr>
+          <a:xfrm>
+            <a:off x="10092233" y="4553712"/>
+            <a:ext cx="1271016" cy="329184"/>
+          </a:xfrm>
+          <a:prstGeom prst="roundRect">
+            <a:avLst>
+              <a:gd name="adj" fmla="val 13889"/>
+            </a:avLst>
+          </a:prstGeom>
+          <a:solidFill>
+            <a:srgbClr val="1E2A5C"/>
+          </a:solidFill>
+          <a:ln/>
+        </p:spPr>
+        <p:txBody>
+          <a:bodyPr/>
+          <a:lstStyle/>
+          <a:p>
+            <a:endParaRPr lang="ko-KR" altLang="en-US"/>
+          </a:p>
+        </p:txBody>
+      </p:sp>
+      <p:sp>
+        <p:nvSpPr>
+          <p:cNvPr id="64" name="Text 61"/>
+          <p:cNvSpPr txBox="1"/>
+          <p:nvPr/>
+        </p:nvSpPr>
+        <p:spPr>
+          <a:xfrm>
+            <a:off x="10092233" y="4553712"/>
+            <a:ext cx="1271016" cy="329184"/>
+          </a:xfrm>
+          <a:prstGeom prst="rect">
+            <a:avLst/>
+          </a:prstGeom>
+          <a:noFill/>
+          <a:ln/>
+        </p:spPr>
+        <p:txBody>
+          <a:bodyPr wrap="square" lIns="1016" tIns="1016" rIns="1016" bIns="1016" rtlCol="0" anchor="ctr"/>
+          <a:lstStyle/>
+          <a:p>
+            <a:pPr marL="0" indent="0" algn="ctr">
+              <a:buNone/>
+            </a:pPr>
+            <a:r>
+              <a:rPr lang="en-US" sz="1400" b="1" dirty="0">
+                <a:solidFill>
+                  <a:srgbClr val="FFFFFF"/>
+                </a:solidFill>
+                <a:latin typeface="Pretendard" pitchFamily="34" charset="0"/>
+                <a:ea typeface="Pretendard" pitchFamily="34" charset="-122"/>
+                <a:cs typeface="Pretendard" pitchFamily="34" charset="-120"/>
+              </a:rPr>
+              <a:t>:Member</a:t>
+            </a:r>
+            <a:endParaRPr lang="en-US" sz="1400" dirty="0"/>
+          </a:p>
+        </p:txBody>
+      </p:sp>
+      <p:sp>
+        <p:nvSpPr>
+          <p:cNvPr id="65" name="Text 62"/>
+          <p:cNvSpPr txBox="1"/>
+          <p:nvPr/>
+        </p:nvSpPr>
+        <p:spPr>
+          <a:xfrm>
+            <a:off x="10092233" y="4919472"/>
+            <a:ext cx="1271016" cy="832104"/>
+          </a:xfrm>
+          <a:prstGeom prst="rect">
+            <a:avLst/>
+          </a:prstGeom>
+          <a:noFill/>
+          <a:ln/>
+        </p:spPr>
+        <p:txBody>
+          <a:bodyPr wrap="square" lIns="0" tIns="0" rIns="0" bIns="0" rtlCol="0" anchor="t"/>
+          <a:lstStyle/>
+          <a:p>
+            <a:pPr marL="0" indent="0" algn="ctr">
+              <a:buNone/>
+            </a:pPr>
+            <a:r>
+              <a:rPr lang="en-US" sz="1400" dirty="0">
+                <a:solidFill>
+                  <a:srgbClr val="2B3242"/>
+                </a:solidFill>
+                <a:latin typeface="Pretendard" pitchFamily="34" charset="0"/>
+                <a:ea typeface="Pretendard" pitchFamily="34" charset="-122"/>
+                <a:cs typeface="Pretendard" pitchFamily="34" charset="-120"/>
+              </a:rPr>
+              <a:t>(회원)</a:t>
+            </a:r>
+            <a:endParaRPr lang="en-US" sz="1400" dirty="0"/>
+          </a:p>
+          <a:p>
+            <a:pPr marL="0" indent="0" algn="ctr">
+              <a:buNone/>
+            </a:pPr>
+            <a:r>
+              <a:rPr lang="en-US" sz="1400" dirty="0">
+                <a:solidFill>
+                  <a:srgbClr val="2B3242"/>
+                </a:solidFill>
+                <a:latin typeface="Pretendard" pitchFamily="34" charset="0"/>
+                <a:ea typeface="Pretendard" pitchFamily="34" charset="-122"/>
+                <a:cs typeface="Pretendard" pitchFamily="34" charset="-120"/>
+              </a:rPr>
+              <a:t>member_id (키)</a:t>
+            </a:r>
+            <a:endParaRPr lang="en-US" sz="1400" dirty="0"/>
+          </a:p>
+          <a:p>
+            <a:pPr marL="0" indent="0" algn="ctr">
+              <a:buNone/>
+            </a:pPr>
+            <a:r>
+              <a:rPr lang="en-US" sz="1400" dirty="0">
+                <a:solidFill>
+                  <a:srgbClr val="2B3242"/>
+                </a:solidFill>
+                <a:latin typeface="Pretendard" pitchFamily="34" charset="0"/>
+                <a:ea typeface="Pretendard" pitchFamily="34" charset="-122"/>
+                <a:cs typeface="Pretendard" pitchFamily="34" charset="-120"/>
+              </a:rPr>
+              <a:t>age_band</a:t>
+            </a:r>
+            <a:endParaRPr lang="en-US" sz="1400" dirty="0"/>
+          </a:p>
+        </p:txBody>
+      </p:sp>
+      <p:sp>
+        <p:nvSpPr>
+          <p:cNvPr id="66" name="Shape 63"/>
+          <p:cNvSpPr/>
+          <p:nvPr/>
+        </p:nvSpPr>
+        <p:spPr>
+          <a:xfrm>
+            <a:off x="12579401" y="4480560"/>
+            <a:ext cx="1417320" cy="1325880"/>
+          </a:xfrm>
+          <a:prstGeom prst="roundRect">
+            <a:avLst>
+              <a:gd name="adj" fmla="val 5517"/>
+            </a:avLst>
+          </a:prstGeom>
+          <a:solidFill>
+            <a:srgbClr val="EEF3FA"/>
+          </a:solidFill>
+          <a:ln w="19050">
+            <a:solidFill>
+              <a:srgbClr val="1E2A5C"/>
+            </a:solidFill>
+            <a:prstDash val="solid"/>
+          </a:ln>
+        </p:spPr>
+        <p:txBody>
+          <a:bodyPr/>
+          <a:lstStyle/>
+          <a:p>
+            <a:endParaRPr lang="ko-KR" altLang="en-US"/>
+          </a:p>
+        </p:txBody>
+      </p:sp>
+      <p:sp>
+        <p:nvSpPr>
+          <p:cNvPr id="67" name="Shape 64"/>
+          <p:cNvSpPr/>
+          <p:nvPr/>
+        </p:nvSpPr>
+        <p:spPr>
+          <a:xfrm>
+            <a:off x="12652553" y="4553712"/>
+            <a:ext cx="1271016" cy="329184"/>
+          </a:xfrm>
+          <a:prstGeom prst="roundRect">
+            <a:avLst>
+              <a:gd name="adj" fmla="val 13889"/>
+            </a:avLst>
+          </a:prstGeom>
+          <a:solidFill>
+            <a:srgbClr val="1E2A5C"/>
+          </a:solidFill>
+          <a:ln/>
+        </p:spPr>
+        <p:txBody>
+          <a:bodyPr/>
+          <a:lstStyle/>
+          <a:p>
+            <a:endParaRPr lang="ko-KR" altLang="en-US"/>
+          </a:p>
+        </p:txBody>
+      </p:sp>
+      <p:sp>
+        <p:nvSpPr>
+          <p:cNvPr id="68" name="Text 65"/>
+          <p:cNvSpPr txBox="1"/>
+          <p:nvPr/>
+        </p:nvSpPr>
+        <p:spPr>
+          <a:xfrm>
+            <a:off x="12652553" y="4553712"/>
+            <a:ext cx="1271016" cy="329184"/>
+          </a:xfrm>
+          <a:prstGeom prst="rect">
+            <a:avLst/>
+          </a:prstGeom>
+          <a:noFill/>
+          <a:ln/>
+        </p:spPr>
+        <p:txBody>
+          <a:bodyPr wrap="square" lIns="1016" tIns="1016" rIns="1016" bIns="1016" rtlCol="0" anchor="ctr"/>
+          <a:lstStyle/>
+          <a:p>
+            <a:pPr marL="0" indent="0" algn="ctr">
+              <a:buNone/>
+            </a:pPr>
+            <a:r>
+              <a:rPr lang="en-US" sz="1400" b="1" dirty="0">
+                <a:solidFill>
+                  <a:srgbClr val="FFFFFF"/>
+                </a:solidFill>
+                <a:latin typeface="Pretendard" pitchFamily="34" charset="0"/>
+                <a:ea typeface="Pretendard" pitchFamily="34" charset="-122"/>
+                <a:cs typeface="Pretendard" pitchFamily="34" charset="-120"/>
+              </a:rPr>
+              <a:t>:Card</a:t>
+            </a:r>
+            <a:endParaRPr lang="en-US" sz="1400" dirty="0"/>
+          </a:p>
+        </p:txBody>
+      </p:sp>
+      <p:sp>
+        <p:nvSpPr>
+          <p:cNvPr id="69" name="Text 66"/>
+          <p:cNvSpPr txBox="1"/>
+          <p:nvPr/>
+        </p:nvSpPr>
+        <p:spPr>
+          <a:xfrm>
+            <a:off x="12652553" y="4919472"/>
+            <a:ext cx="1271016" cy="832104"/>
+          </a:xfrm>
+          <a:prstGeom prst="rect">
+            <a:avLst/>
+          </a:prstGeom>
+          <a:noFill/>
+          <a:ln/>
+        </p:spPr>
+        <p:txBody>
+          <a:bodyPr wrap="square" lIns="0" tIns="0" rIns="0" bIns="0" rtlCol="0" anchor="t"/>
+          <a:lstStyle/>
+          <a:p>
+            <a:pPr marL="0" indent="0" algn="ctr">
+              <a:buNone/>
+            </a:pPr>
+            <a:r>
+              <a:rPr lang="en-US" sz="1400" dirty="0">
+                <a:solidFill>
+                  <a:srgbClr val="2B3242"/>
+                </a:solidFill>
+                <a:latin typeface="Pretendard" pitchFamily="34" charset="0"/>
+                <a:ea typeface="Pretendard" pitchFamily="34" charset="-122"/>
+                <a:cs typeface="Pretendard" pitchFamily="34" charset="-120"/>
+              </a:rPr>
+              <a:t>(카드)</a:t>
+            </a:r>
+            <a:endParaRPr lang="en-US" sz="1400" dirty="0"/>
+          </a:p>
+          <a:p>
+            <a:pPr marL="0" indent="0" algn="ctr">
+              <a:buNone/>
+            </a:pPr>
+            <a:r>
+              <a:rPr lang="en-US" sz="1400" dirty="0">
+                <a:solidFill>
+                  <a:srgbClr val="2B3242"/>
+                </a:solidFill>
+                <a:latin typeface="Pretendard" pitchFamily="34" charset="0"/>
+                <a:ea typeface="Pretendard" pitchFamily="34" charset="-122"/>
+                <a:cs typeface="Pretendard" pitchFamily="34" charset="-120"/>
+              </a:rPr>
+              <a:t>card_id (키)</a:t>
+            </a:r>
+            <a:endParaRPr lang="en-US" sz="1400" dirty="0"/>
+          </a:p>
+          <a:p>
+            <a:pPr marL="0" indent="0" algn="ctr">
+              <a:buNone/>
+            </a:pPr>
+            <a:r>
+              <a:rPr lang="en-US" sz="1400" dirty="0">
+                <a:solidFill>
+                  <a:srgbClr val="2B3242"/>
+                </a:solidFill>
+                <a:latin typeface="Pretendard" pitchFamily="34" charset="0"/>
+                <a:ea typeface="Pretendard" pitchFamily="34" charset="-122"/>
+                <a:cs typeface="Pretendard" pitchFamily="34" charset="-120"/>
+              </a:rPr>
+              <a:t>status</a:t>
+            </a:r>
+            <a:endParaRPr lang="en-US" sz="1400" dirty="0"/>
+          </a:p>
+        </p:txBody>
+      </p:sp>
+      <p:sp>
+        <p:nvSpPr>
+          <p:cNvPr id="70" name="Shape 67"/>
+          <p:cNvSpPr/>
+          <p:nvPr/>
+        </p:nvSpPr>
+        <p:spPr>
+          <a:xfrm>
+            <a:off x="11472977" y="5143500"/>
+            <a:ext cx="1069848" cy="0"/>
+          </a:xfrm>
+          <a:prstGeom prst="line">
+            <a:avLst/>
+          </a:prstGeom>
+          <a:noFill/>
+          <a:ln w="25400">
+            <a:solidFill>
+              <a:srgbClr val="1E2A5C"/>
+            </a:solidFill>
+            <a:prstDash val="solid"/>
+            <a:tailEnd type="triangle"/>
+          </a:ln>
+        </p:spPr>
+        <p:txBody>
+          <a:bodyPr/>
+          <a:lstStyle/>
+          <a:p>
+            <a:endParaRPr lang="ko-KR" altLang="en-US"/>
+          </a:p>
+        </p:txBody>
+      </p:sp>
+      <p:sp>
+        <p:nvSpPr>
+          <p:cNvPr id="71" name="Text 68"/>
+          <p:cNvSpPr txBox="1"/>
+          <p:nvPr/>
+        </p:nvSpPr>
+        <p:spPr>
+          <a:xfrm>
+            <a:off x="11436401" y="4814316"/>
+            <a:ext cx="1143000" cy="274320"/>
+          </a:xfrm>
+          <a:prstGeom prst="rect">
+            <a:avLst/>
+          </a:prstGeom>
+          <a:noFill/>
+          <a:ln/>
+        </p:spPr>
+        <p:txBody>
+          <a:bodyPr wrap="square" lIns="0" tIns="0" rIns="0" bIns="0" rtlCol="0" anchor="ctr"/>
+          <a:lstStyle/>
+          <a:p>
+            <a:pPr marL="0" indent="0" algn="ctr">
+              <a:buNone/>
+            </a:pPr>
+            <a:r>
+              <a:rPr lang="en-US" sz="1400" b="1" dirty="0">
+                <a:solidFill>
+                  <a:srgbClr val="2E74C6"/>
+                </a:solidFill>
+                <a:latin typeface="Pretendard" pitchFamily="34" charset="0"/>
+                <a:ea typeface="Pretendard" pitchFamily="34" charset="-122"/>
+                <a:cs typeface="Pretendard" pitchFamily="34" charset="-120"/>
+              </a:rPr>
+              <a:t>HAS_CARD</a:t>
+            </a:r>
+            <a:endParaRPr lang="en-US" sz="1400" dirty="0"/>
+          </a:p>
+        </p:txBody>
+      </p:sp>
+      <p:sp>
+        <p:nvSpPr>
+          <p:cNvPr id="72" name="Text 69"/>
+          <p:cNvSpPr txBox="1"/>
+          <p:nvPr/>
+        </p:nvSpPr>
+        <p:spPr>
+          <a:xfrm>
+            <a:off x="11436401" y="5198364"/>
+            <a:ext cx="1143000" cy="274320"/>
+          </a:xfrm>
+          <a:prstGeom prst="rect">
+            <a:avLst/>
+          </a:prstGeom>
+          <a:noFill/>
+          <a:ln/>
+        </p:spPr>
+        <p:txBody>
+          <a:bodyPr wrap="square" lIns="0" tIns="0" rIns="0" bIns="0" rtlCol="0" anchor="ctr"/>
+          <a:lstStyle/>
+          <a:p>
+            <a:pPr marL="0" indent="0" algn="ctr">
+              <a:buNone/>
+            </a:pPr>
+            <a:r>
+              <a:rPr lang="en-US" sz="1400" dirty="0">
+                <a:solidFill>
+                  <a:srgbClr val="2B3242"/>
+                </a:solidFill>
+                <a:latin typeface="Pretendard" pitchFamily="34" charset="0"/>
+                <a:ea typeface="Pretendard" pitchFamily="34" charset="-122"/>
+                <a:cs typeface="Pretendard" pitchFamily="34" charset="-120"/>
+              </a:rPr>
+              <a:t>(보유함)</a:t>
+            </a:r>
+            <a:endParaRPr lang="en-US" sz="1400" dirty="0"/>
+          </a:p>
+        </p:txBody>
+      </p:sp>
+      <p:sp>
+        <p:nvSpPr>
+          <p:cNvPr id="73" name="Text 70"/>
+          <p:cNvSpPr txBox="1"/>
+          <p:nvPr/>
+        </p:nvSpPr>
+        <p:spPr>
+          <a:xfrm>
+            <a:off x="10019081" y="5897880"/>
+            <a:ext cx="3977640" cy="448056"/>
+          </a:xfrm>
+          <a:prstGeom prst="rect">
+            <a:avLst/>
+          </a:prstGeom>
+          <a:noFill/>
+          <a:ln/>
+        </p:spPr>
+        <p:txBody>
+          <a:bodyPr wrap="square" lIns="0" tIns="0" rIns="0" bIns="0" rtlCol="0" anchor="ctr"/>
+          <a:lstStyle/>
+          <a:p>
+            <a:pPr marL="0" indent="0" algn="ctr">
+              <a:buNone/>
+            </a:pPr>
+            <a:r>
+              <a:rPr lang="en-US" sz="1400" dirty="0">
+                <a:solidFill>
+                  <a:srgbClr val="4A5364"/>
+                </a:solidFill>
+                <a:latin typeface="Pretendard" pitchFamily="34" charset="0"/>
+                <a:ea typeface="Pretendard" pitchFamily="34" charset="-122"/>
+                <a:cs typeface="Pretendard" pitchFamily="34" charset="-120"/>
+              </a:rPr>
+              <a:t>영문 라벨 아래에 한글 이름을 함께 적어</a:t>
+            </a:r>
+            <a:endParaRPr lang="en-US" sz="1400" dirty="0"/>
+          </a:p>
+          <a:p>
+            <a:pPr marL="0" indent="0" algn="ctr">
+              <a:buNone/>
+            </a:pPr>
+            <a:r>
+              <a:rPr lang="en-US" sz="1400" dirty="0">
+                <a:solidFill>
+                  <a:srgbClr val="4A5364"/>
+                </a:solidFill>
+                <a:latin typeface="Pretendard" pitchFamily="34" charset="0"/>
+                <a:ea typeface="Pretendard" pitchFamily="34" charset="-122"/>
+                <a:cs typeface="Pretendard" pitchFamily="34" charset="-120"/>
+              </a:rPr>
+              <a:t>검토하는 사람이 바로 읽게 함</a:t>
+            </a:r>
+            <a:endParaRPr lang="en-US" sz="1400" dirty="0"/>
+          </a:p>
+        </p:txBody>
+      </p:sp>
+      <p:sp>
+        <p:nvSpPr>
+          <p:cNvPr id="74" name="Shape 71"/>
+          <p:cNvSpPr/>
+          <p:nvPr/>
+        </p:nvSpPr>
+        <p:spPr>
+          <a:xfrm>
+            <a:off x="509321" y="6510528"/>
+            <a:ext cx="13624560" cy="694944"/>
+          </a:xfrm>
+          <a:prstGeom prst="roundRect">
+            <a:avLst>
+              <a:gd name="adj" fmla="val 10526"/>
+            </a:avLst>
+          </a:prstGeom>
+          <a:solidFill>
+            <a:srgbClr val="EEF3FA"/>
+          </a:solidFill>
+          <a:ln w="19050">
+            <a:solidFill>
+              <a:srgbClr val="2E74C6"/>
+            </a:solidFill>
+            <a:prstDash val="solid"/>
+          </a:ln>
+        </p:spPr>
+        <p:txBody>
+          <a:bodyPr/>
+          <a:lstStyle/>
+          <a:p>
+            <a:endParaRPr lang="ko-KR" altLang="en-US"/>
+          </a:p>
+        </p:txBody>
+      </p:sp>
+      <p:sp>
+        <p:nvSpPr>
+          <p:cNvPr id="75" name="Shape 72"/>
+          <p:cNvSpPr/>
+          <p:nvPr/>
+        </p:nvSpPr>
+        <p:spPr>
+          <a:xfrm>
+            <a:off x="509321" y="6510528"/>
+            <a:ext cx="82296" cy="694944"/>
+          </a:xfrm>
+          <a:prstGeom prst="rect">
+            <a:avLst/>
+          </a:prstGeom>
+          <a:solidFill>
+            <a:srgbClr val="2E74C6"/>
+          </a:solidFill>
+          <a:ln/>
+        </p:spPr>
+        <p:txBody>
+          <a:bodyPr/>
+          <a:lstStyle/>
+          <a:p>
+            <a:endParaRPr lang="ko-KR" altLang="en-US"/>
+          </a:p>
+        </p:txBody>
+      </p:sp>
+      <p:sp>
+        <p:nvSpPr>
+          <p:cNvPr id="76" name="Text 73"/>
+          <p:cNvSpPr txBox="1"/>
+          <p:nvPr/>
+        </p:nvSpPr>
+        <p:spPr>
+          <a:xfrm>
+            <a:off x="737921" y="6510528"/>
+            <a:ext cx="13258800" cy="694944"/>
+          </a:xfrm>
+          <a:prstGeom prst="rect">
+            <a:avLst/>
+          </a:prstGeom>
+          <a:noFill/>
+          <a:ln/>
+        </p:spPr>
+        <p:txBody>
+          <a:bodyPr wrap="square" lIns="0" tIns="0" rIns="0" bIns="0" rtlCol="0" anchor="ctr"/>
+          <a:lstStyle/>
+          <a:p>
+            <a:pPr marL="0" indent="0" algn="l">
+              <a:buNone/>
+            </a:pPr>
+            <a:r>
+              <a:rPr lang="en-US" sz="1500" b="1" dirty="0">
+                <a:solidFill>
+                  <a:srgbClr val="1E2A5C"/>
+                </a:solidFill>
+                <a:latin typeface="Pretendard" pitchFamily="34" charset="0"/>
+                <a:ea typeface="Pretendard" pitchFamily="34" charset="-122"/>
+                <a:cs typeface="Pretendard" pitchFamily="34" charset="-120"/>
+              </a:rPr>
+              <a:t>결과: graph_schema.json(승인본)과 approval.json(승인자, 승인 일시, 입력 파일 SHA-256). 인덱싱은 이 파일을 읽기만 함</a:t>
+            </a:r>
+            <a:endParaRPr lang="en-US" sz="1500" dirty="0"/>
+          </a:p>
+          <a:p>
+            <a:pPr marL="0" indent="0" algn="l">
+              <a:buNone/>
+            </a:pPr>
+            <a:r>
+              <a:rPr lang="en-US" sz="1500" b="1" dirty="0">
+                <a:solidFill>
+                  <a:srgbClr val="1E2A5C"/>
+                </a:solidFill>
+                <a:latin typeface="Pretendard" pitchFamily="34" charset="0"/>
+                <a:ea typeface="Pretendard" pitchFamily="34" charset="-122"/>
+                <a:cs typeface="Pretendard" pitchFamily="34" charset="-120"/>
+              </a:rPr>
+              <a:t>GraphSchema 검증, 저장, 다시 읽기는 Neo4j 서버 없이 됨(실행 확인)</a:t>
+            </a:r>
+            <a:endParaRPr lang="en-US" sz="1500" dirty="0"/>
+          </a:p>
+        </p:txBody>
+      </p:sp>
+      <p:sp>
+        <p:nvSpPr>
+          <p:cNvPr id="4" name="Slide Number Placeholder 0"/>
+          <p:cNvSpPr>
+            <a:spLocks noGrp="1"/>
+          </p:cNvSpPr>
+          <p:nvPr>
+            <p:ph type="sldNum" idx="4"/>
+          </p:nvPr>
+        </p:nvSpPr>
+        <p:spPr>
+          <a:xfrm>
+            <a:off x="10893247" y="7787945"/>
+            <a:ext cx="3291840" cy="228600"/>
+          </a:xfrm>
+          <a:prstGeom prst="rect">
+            <a:avLst/>
+          </a:prstGeom>
+          <a:extLst>
+            <a:ext uri="{C572A759-6A51-4108-AA02-DFA0A04FC94B}">
+              <ma14:wrappingTextBoxFlag xmlns="" xmlns:ma14="http://schemas.microsoft.com/office/mac/drawingml/2011/main" val="0"/>
+            </a:ext>
+          </a:extLst>
+        </p:spPr>
+        <p:txBody>
+          <a:bodyPr/>
+          <a:lstStyle>
+            <a:lvl1pPr>
+              <a:defRPr sz="1600">
+                <a:solidFill>
+                  <a:srgbClr val="6B6B7B"/>
+                </a:solidFill>
+                <a:latin typeface="Pretendard"/>
+                <a:ea typeface="Pretendard"/>
+                <a:cs typeface="Pretendard"/>
+              </a:defRPr>
+            </a:lvl1pPr>
+          </a:lstStyle>
+          <a:p>
+            <a:pPr algn="r"/>
+            <a:fld id="{F7021451-1387-4CA6-816F-3879F97B5CBC}" type="slidenum">
+              <a:rPr lang="en-US" b="0"/>
+              <a:t>4</a:t>
+            </a:fld>
+            <a:endParaRPr lang="en-US"/>
+          </a:p>
+        </p:txBody>
+      </p:sp>
+      <p:sp>
+        <p:nvSpPr>
+          <p:cNvPr id="78" name="TextBox 77">
+            <a:extLst>
+              <a:ext uri="{FF2B5EF4-FFF2-40B4-BE49-F238E27FC236}">
+                <a16:creationId xmlns:a16="http://schemas.microsoft.com/office/drawing/2014/main" id="{75912B89-EFB0-C682-B392-0084E8DB680B}"/>
+              </a:ext>
+            </a:extLst>
+          </p:cNvPr>
+          <p:cNvSpPr txBox="1"/>
+          <p:nvPr/>
+        </p:nvSpPr>
+        <p:spPr>
+          <a:xfrm>
+            <a:off x="471221" y="7341489"/>
+            <a:ext cx="13525500" cy="338554"/>
+          </a:xfrm>
+          <a:prstGeom prst="rect">
+            <a:avLst/>
+          </a:prstGeom>
+          <a:noFill/>
+        </p:spPr>
+        <p:txBody>
+          <a:bodyPr wrap="square">
+            <a:spAutoFit/>
+          </a:bodyPr>
+          <a:lstStyle/>
+          <a:p>
+            <a:r>
+              <a:rPr lang="en-US" altLang="ko-KR" sz="1600" dirty="0">
+                <a:latin typeface="Pretendard" panose="02000503000000020004" pitchFamily="50" charset="-127"/>
+                <a:ea typeface="Pretendard" panose="02000503000000020004" pitchFamily="50" charset="-127"/>
+                <a:cs typeface="Pretendard" panose="02000503000000020004" pitchFamily="50" charset="-127"/>
+              </a:rPr>
+              <a:t>※ DB </a:t>
+            </a:r>
+            <a:r>
+              <a:rPr lang="ko-KR" altLang="en-US" sz="1600" dirty="0">
+                <a:latin typeface="Pretendard" panose="02000503000000020004" pitchFamily="50" charset="-127"/>
+                <a:ea typeface="Pretendard" panose="02000503000000020004" pitchFamily="50" charset="-127"/>
+                <a:cs typeface="Pretendard" panose="02000503000000020004" pitchFamily="50" charset="-127"/>
+              </a:rPr>
+              <a:t>카탈로그를 </a:t>
+            </a:r>
+            <a:r>
+              <a:rPr lang="ko-KR" altLang="ko-KR" sz="1600" b="0" i="0" spc="0" dirty="0">
+                <a:solidFill>
+                  <a:schemeClr val="tx1"/>
+                </a:solidFill>
+                <a:effectLst/>
+                <a:latin typeface="Pretendard" panose="02000503000000020004" pitchFamily="50" charset="-127"/>
+                <a:ea typeface="Pretendard" panose="02000503000000020004" pitchFamily="50" charset="-127"/>
+                <a:cs typeface="Pretendard" panose="02000503000000020004" pitchFamily="50" charset="-127"/>
+              </a:rPr>
+              <a:t>읽을 스키마는 원본 테이블이 있는 스키마로 지정하고, 서비스용 뷰(</a:t>
+            </a:r>
+            <a:r>
+              <a:rPr lang="ko-KR" altLang="ko-KR" sz="1600" b="0" i="0" spc="0" dirty="0" err="1">
+                <a:solidFill>
+                  <a:schemeClr val="tx1"/>
+                </a:solidFill>
+                <a:effectLst/>
+                <a:latin typeface="Pretendard" panose="02000503000000020004" pitchFamily="50" charset="-127"/>
+                <a:ea typeface="Pretendard" panose="02000503000000020004" pitchFamily="50" charset="-127"/>
+                <a:cs typeface="Pretendard" panose="02000503000000020004" pitchFamily="50" charset="-127"/>
+              </a:rPr>
+              <a:t>View</a:t>
+            </a:r>
+            <a:r>
+              <a:rPr lang="ko-KR" altLang="ko-KR" sz="1600" b="0" i="0" spc="0" dirty="0">
+                <a:solidFill>
+                  <a:schemeClr val="tx1"/>
+                </a:solidFill>
+                <a:effectLst/>
+                <a:latin typeface="Pretendard" panose="02000503000000020004" pitchFamily="50" charset="-127"/>
+                <a:ea typeface="Pretendard" panose="02000503000000020004" pitchFamily="50" charset="-127"/>
+                <a:cs typeface="Pretendard" panose="02000503000000020004" pitchFamily="50" charset="-127"/>
+              </a:rPr>
+              <a:t>)가 정의된 스키마(예: </a:t>
+            </a:r>
+            <a:r>
+              <a:rPr lang="ko-KR" altLang="ko-KR" sz="1600" b="0" i="0" spc="0" dirty="0" err="1">
+                <a:solidFill>
+                  <a:schemeClr val="tx1"/>
+                </a:solidFill>
+                <a:effectLst/>
+                <a:latin typeface="Pretendard" panose="02000503000000020004" pitchFamily="50" charset="-127"/>
+                <a:ea typeface="Pretendard" panose="02000503000000020004" pitchFamily="50" charset="-127"/>
+                <a:cs typeface="Pretendard" panose="02000503000000020004" pitchFamily="50" charset="-127"/>
+              </a:rPr>
+              <a:t>app</a:t>
+            </a:r>
+            <a:r>
+              <a:rPr lang="ko-KR" altLang="ko-KR" sz="1600" b="0" i="0" spc="0" dirty="0">
+                <a:solidFill>
+                  <a:schemeClr val="tx1"/>
+                </a:solidFill>
+                <a:effectLst/>
+                <a:latin typeface="Pretendard" panose="02000503000000020004" pitchFamily="50" charset="-127"/>
+                <a:ea typeface="Pretendard" panose="02000503000000020004" pitchFamily="50" charset="-127"/>
+                <a:cs typeface="Pretendard" panose="02000503000000020004" pitchFamily="50" charset="-127"/>
+              </a:rPr>
+              <a:t>)는 쓰지 않음 </a:t>
+            </a:r>
+            <a:endParaRPr lang="ko-KR" altLang="en-US" sz="1600" dirty="0">
+              <a:latin typeface="Pretendard" panose="02000503000000020004" pitchFamily="50" charset="-127"/>
+              <a:ea typeface="Pretendard" panose="02000503000000020004" pitchFamily="50" charset="-127"/>
+              <a:cs typeface="Pretendard" panose="02000503000000020004" pitchFamily="50" charset="-127"/>
+            </a:endParaRPr>
+          </a:p>
+        </p:txBody>
+      </p:sp>
+    </p:spTree>
+  </p:cSld>
+  <p:clrMapOvr>
+    <a:masterClrMapping/>
+  </p:clrMapOvr>
+</p:sld>
+</file>
+
+<file path=ppt/slides/slide5.xml><?xml version="1.0" encoding="utf-8"?>
+<p:sld xmlns:a="http://schemas.openxmlformats.org/drawingml/2006/main" xmlns:r="http://schemas.openxmlformats.org/officeDocument/2006/relationships" xmlns:p="http://schemas.openxmlformats.org/presentationml/2006/main">
+  <p:cSld name="Slide 5">
+    <p:spTree>
+      <p:nvGrpSpPr>
+        <p:cNvPr id="1" name=""/>
+        <p:cNvGrpSpPr/>
+        <p:nvPr/>
+      </p:nvGrpSpPr>
+      <p:grpSpPr>
+        <a:xfrm>
+          <a:off x="0" y="0"/>
+          <a:ext cx="0" cy="0"/>
+          <a:chOff x="0" y="0"/>
+          <a:chExt cx="0" cy="0"/>
+        </a:xfrm>
+      </p:grpSpPr>
+      <p:sp>
+        <p:nvSpPr>
+          <p:cNvPr id="2" name="Text 2"/>
+          <p:cNvSpPr>
+            <a:spLocks noGrp="1"/>
+          </p:cNvSpPr>
+          <p:nvPr>
+            <p:ph type="title"/>
+          </p:nvPr>
+        </p:nvSpPr>
+        <p:spPr>
+          <a:xfrm>
+            <a:off x="509321" y="99670"/>
+            <a:ext cx="13738860" cy="828446"/>
+          </a:xfrm>
+          <a:prstGeom prst="rect">
+            <a:avLst/>
+          </a:prstGeom>
+          <a:noFill/>
+          <a:ln/>
+        </p:spPr>
+        <p:txBody>
+          <a:bodyPr wrap="square" lIns="0" tIns="0" rIns="0" bIns="0" rtlCol="0" anchor="ctr"/>
+          <a:lstStyle/>
+          <a:p>
+            <a:pPr marL="0" indent="0" algn="l">
+              <a:buNone/>
+            </a:pPr>
+            <a:r>
+              <a:rPr lang="en-US" sz="3200" b="1" dirty="0">
+                <a:solidFill>
+                  <a:srgbClr val="2C2926"/>
+                </a:solidFill>
+                <a:latin typeface="Pretendard" pitchFamily="34" charset="0"/>
+                <a:ea typeface="Pretendard" pitchFamily="34" charset="-122"/>
+                <a:cs typeface="Pretendard" pitchFamily="34" charset="-120"/>
+              </a:rPr>
+              <a:t>1. 스키마 도출: 소스 문서 → 노드 타입과 관계: 표본 → 후보 → 사람 확정</a:t>
+            </a:r>
+            <a:endParaRPr lang="en-US" sz="3200" dirty="0"/>
+          </a:p>
+        </p:txBody>
+      </p:sp>
+      <p:sp>
+        <p:nvSpPr>
+          <p:cNvPr id="3" name="Text 1"/>
+          <p:cNvSpPr txBox="1"/>
+          <p:nvPr/>
+        </p:nvSpPr>
+        <p:spPr>
+          <a:xfrm>
+            <a:off x="509321" y="1151230"/>
+            <a:ext cx="13624560" cy="384048"/>
+          </a:xfrm>
+          <a:prstGeom prst="rect">
+            <a:avLst/>
+          </a:prstGeom>
+          <a:noFill/>
+          <a:ln/>
+        </p:spPr>
+        <p:txBody>
+          <a:bodyPr wrap="square" lIns="0" tIns="0" rIns="0" bIns="0" rtlCol="0" anchor="ctr"/>
+          <a:lstStyle/>
+          <a:p>
+            <a:pPr marL="0" indent="0">
+              <a:buNone/>
+            </a:pPr>
+            <a:r>
+              <a:rPr lang="en-US" sz="1800" dirty="0">
+                <a:solidFill>
+                  <a:srgbClr val="000000"/>
+                </a:solidFill>
+                <a:latin typeface="Pretendard SemiBold" pitchFamily="34" charset="0"/>
+                <a:ea typeface="Pretendard SemiBold" pitchFamily="34" charset="-122"/>
+                <a:cs typeface="Pretendard SemiBold" pitchFamily="34" charset="-120"/>
+              </a:rPr>
+              <a:t>LLM은 표본에서 후보만 뽑고 확정은 사람이 함 — 확정한 목록을 GraphSchema로 고정해 추출기에 넘김</a:t>
+            </a:r>
+            <a:endParaRPr lang="en-US" sz="1800" dirty="0"/>
+          </a:p>
+        </p:txBody>
+      </p:sp>
+      <p:sp>
+        <p:nvSpPr>
+          <p:cNvPr id="5" name="Shape 2"/>
+          <p:cNvSpPr/>
+          <p:nvPr/>
+        </p:nvSpPr>
+        <p:spPr>
+          <a:xfrm>
+            <a:off x="509321" y="1737360"/>
+            <a:ext cx="2505456" cy="566928"/>
+          </a:xfrm>
+          <a:prstGeom prst="roundRect">
+            <a:avLst>
+              <a:gd name="adj" fmla="val 12903"/>
+            </a:avLst>
+          </a:prstGeom>
+          <a:solidFill>
+            <a:srgbClr val="FFFFFF"/>
+          </a:solidFill>
+          <a:ln w="15875">
+            <a:solidFill>
+              <a:srgbClr val="4A5364"/>
+            </a:solidFill>
+            <a:prstDash val="solid"/>
+          </a:ln>
+        </p:spPr>
+        <p:txBody>
+          <a:bodyPr/>
+          <a:lstStyle/>
+          <a:p>
+            <a:endParaRPr lang="ko-KR" altLang="en-US"/>
+          </a:p>
+        </p:txBody>
+      </p:sp>
+      <p:sp>
+        <p:nvSpPr>
+          <p:cNvPr id="6" name="Text 3"/>
+          <p:cNvSpPr txBox="1"/>
+          <p:nvPr/>
+        </p:nvSpPr>
+        <p:spPr>
+          <a:xfrm>
+            <a:off x="509321" y="1737360"/>
+            <a:ext cx="2505456" cy="566928"/>
+          </a:xfrm>
+          <a:prstGeom prst="rect">
+            <a:avLst/>
+          </a:prstGeom>
+          <a:noFill/>
+          <a:ln/>
+        </p:spPr>
+        <p:txBody>
+          <a:bodyPr wrap="square" lIns="1016" tIns="1016" rIns="1016" bIns="1016" rtlCol="0" anchor="ctr"/>
+          <a:lstStyle/>
+          <a:p>
+            <a:pPr marL="0" indent="0" algn="ctr">
+              <a:buNone/>
+            </a:pPr>
+            <a:r>
+              <a:rPr lang="en-US" sz="1400" b="1" dirty="0">
+                <a:solidFill>
+                  <a:srgbClr val="2B3242"/>
+                </a:solidFill>
+                <a:latin typeface="Pretendard" pitchFamily="34" charset="0"/>
+                <a:ea typeface="Pretendard" pitchFamily="34" charset="-122"/>
+                <a:cs typeface="Pretendard" pitchFamily="34" charset="-120"/>
+              </a:rPr>
+              <a:t>문서 종류별 표본 N건</a:t>
+            </a:r>
+            <a:endParaRPr lang="en-US" sz="1400" dirty="0"/>
+          </a:p>
+        </p:txBody>
+      </p:sp>
+      <p:sp>
+        <p:nvSpPr>
+          <p:cNvPr id="7" name="Shape 4"/>
+          <p:cNvSpPr/>
+          <p:nvPr/>
+        </p:nvSpPr>
+        <p:spPr>
+          <a:xfrm>
+            <a:off x="3042209" y="2020824"/>
+            <a:ext cx="219456" cy="0"/>
+          </a:xfrm>
+          <a:prstGeom prst="line">
+            <a:avLst/>
+          </a:prstGeom>
+          <a:noFill/>
+          <a:ln w="22225">
+            <a:solidFill>
+              <a:srgbClr val="4A5364"/>
+            </a:solidFill>
+            <a:prstDash val="solid"/>
+            <a:tailEnd type="triangle"/>
+          </a:ln>
+        </p:spPr>
+        <p:txBody>
+          <a:bodyPr/>
+          <a:lstStyle/>
+          <a:p>
+            <a:endParaRPr lang="ko-KR" altLang="en-US"/>
+          </a:p>
+        </p:txBody>
       </p:sp>
       <p:sp>
         <p:nvSpPr>
@@ -11135,6 +15079,13 @@
             <a:prstDash val="solid"/>
           </a:ln>
         </p:spPr>
+        <p:txBody>
+          <a:bodyPr/>
+          <a:lstStyle/>
+          <a:p>
+            <a:endParaRPr lang="ko-KR" altLang="en-US"/>
+          </a:p>
+        </p:txBody>
       </p:sp>
       <p:sp>
         <p:nvSpPr>
@@ -11157,7 +15108,7 @@
           <a:bodyPr wrap="square" lIns="1016" tIns="1016" rIns="1016" bIns="1016" rtlCol="0" anchor="ctr"/>
           <a:lstStyle/>
           <a:p>
-            <a:pPr algn="ctr" indent="0" marL="0">
+            <a:pPr marL="0" indent="0" algn="ctr">
               <a:buNone/>
             </a:pPr>
             <a:r>
@@ -11198,6 +15149,13 @@
             <a:tailEnd type="triangle"/>
           </a:ln>
         </p:spPr>
+        <p:txBody>
+          <a:bodyPr/>
+          <a:lstStyle/>
+          <a:p>
+            <a:endParaRPr lang="ko-KR" altLang="en-US"/>
+          </a:p>
+        </p:txBody>
       </p:sp>
       <p:sp>
         <p:nvSpPr>
@@ -11225,6 +15183,13 @@
             <a:prstDash val="solid"/>
           </a:ln>
         </p:spPr>
+        <p:txBody>
+          <a:bodyPr/>
+          <a:lstStyle/>
+          <a:p>
+            <a:endParaRPr lang="ko-KR" altLang="en-US"/>
+          </a:p>
+        </p:txBody>
       </p:sp>
       <p:sp>
         <p:nvSpPr>
@@ -11247,7 +15212,7 @@
           <a:bodyPr wrap="square" lIns="1016" tIns="1016" rIns="1016" bIns="1016" rtlCol="0" anchor="ctr"/>
           <a:lstStyle/>
           <a:p>
-            <a:pPr algn="ctr" indent="0" marL="0">
+            <a:pPr marL="0" indent="0" algn="ctr">
               <a:buNone/>
             </a:pPr>
             <a:r>
@@ -11288,6 +15253,13 @@
             <a:tailEnd type="triangle"/>
           </a:ln>
         </p:spPr>
+        <p:txBody>
+          <a:bodyPr/>
+          <a:lstStyle/>
+          <a:p>
+            <a:endParaRPr lang="ko-KR" altLang="en-US"/>
+          </a:p>
+        </p:txBody>
       </p:sp>
       <p:sp>
         <p:nvSpPr>
@@ -11310,6 +15282,13 @@
           </a:solidFill>
           <a:ln/>
         </p:spPr>
+        <p:txBody>
+          <a:bodyPr/>
+          <a:lstStyle/>
+          <a:p>
+            <a:endParaRPr lang="ko-KR" altLang="en-US"/>
+          </a:p>
+        </p:txBody>
       </p:sp>
       <p:sp>
         <p:nvSpPr>
@@ -11332,7 +15311,7 @@
           <a:bodyPr wrap="square" lIns="1016" tIns="1016" rIns="1016" bIns="1016" rtlCol="0" anchor="ctr"/>
           <a:lstStyle/>
           <a:p>
-            <a:pPr algn="ctr" indent="0" marL="0">
+            <a:pPr marL="0" indent="0" algn="ctr">
               <a:buNone/>
             </a:pPr>
             <a:r>
@@ -11373,6 +15352,13 @@
             <a:tailEnd type="triangle"/>
           </a:ln>
         </p:spPr>
+        <p:txBody>
+          <a:bodyPr/>
+          <a:lstStyle/>
+          <a:p>
+            <a:endParaRPr lang="ko-KR" altLang="en-US"/>
+          </a:p>
+        </p:txBody>
       </p:sp>
       <p:sp>
         <p:nvSpPr>
@@ -11395,6 +15381,13 @@
           </a:solidFill>
           <a:ln/>
         </p:spPr>
+        <p:txBody>
+          <a:bodyPr/>
+          <a:lstStyle/>
+          <a:p>
+            <a:endParaRPr lang="ko-KR" altLang="en-US"/>
+          </a:p>
+        </p:txBody>
       </p:sp>
       <p:sp>
         <p:nvSpPr>
@@ -11417,7 +15410,7 @@
           <a:bodyPr wrap="square" lIns="1016" tIns="1016" rIns="1016" bIns="1016" rtlCol="0" anchor="ctr"/>
           <a:lstStyle/>
           <a:p>
-            <a:pPr algn="ctr" indent="0" marL="0">
+            <a:pPr marL="0" indent="0" algn="ctr">
               <a:buNone/>
             </a:pPr>
             <a:r>
@@ -11456,6 +15449,13 @@
           </a:solidFill>
           <a:ln/>
         </p:spPr>
+        <p:txBody>
+          <a:bodyPr/>
+          <a:lstStyle/>
+          <a:p>
+            <a:endParaRPr lang="ko-KR" altLang="en-US"/>
+          </a:p>
+        </p:txBody>
       </p:sp>
       <p:sp>
         <p:nvSpPr>
@@ -11478,7 +15478,7 @@
           <a:bodyPr wrap="square" lIns="1016" tIns="1016" rIns="1016" bIns="1016" rtlCol="0" anchor="ctr"/>
           <a:lstStyle/>
           <a:p>
-            <a:pPr algn="ctr" indent="0" marL="0">
+            <a:pPr marL="0" indent="0" algn="ctr">
               <a:buNone/>
             </a:pPr>
             <a:r>
@@ -11522,6 +15522,13 @@
             <a:prstDash val="solid"/>
           </a:ln>
         </p:spPr>
+        <p:txBody>
+          <a:bodyPr/>
+          <a:lstStyle/>
+          <a:p>
+            <a:endParaRPr lang="ko-KR" altLang="en-US"/>
+          </a:p>
+        </p:txBody>
       </p:sp>
       <p:sp>
         <p:nvSpPr>
@@ -11544,6 +15551,13 @@
           </a:solidFill>
           <a:ln/>
         </p:spPr>
+        <p:txBody>
+          <a:bodyPr/>
+          <a:lstStyle/>
+          <a:p>
+            <a:endParaRPr lang="ko-KR" altLang="en-US"/>
+          </a:p>
+        </p:txBody>
       </p:sp>
       <p:sp>
         <p:nvSpPr>
@@ -11566,7 +15580,7 @@
           <a:bodyPr wrap="square" lIns="1016" tIns="1016" rIns="1016" bIns="1016" rtlCol="0" anchor="ctr"/>
           <a:lstStyle/>
           <a:p>
-            <a:pPr algn="ctr" indent="0" marL="0">
+            <a:pPr marL="0" indent="0" algn="ctr">
               <a:buNone/>
             </a:pPr>
             <a:r>
@@ -11583,7 +15597,7 @@
             <a:endParaRPr lang="en-US" sz="1400" dirty="0"/>
           </a:p>
           <a:p>
-            <a:pPr algn="ctr" indent="0" marL="0">
+            <a:pPr marL="0" indent="0" algn="ctr">
               <a:buNone/>
             </a:pPr>
             <a:r>
@@ -11622,7 +15636,7 @@
           <a:bodyPr wrap="square" lIns="0" tIns="0" rIns="0" bIns="0" rtlCol="0" anchor="ctr"/>
           <a:lstStyle/>
           <a:p>
-            <a:pPr algn="l" indent="0" marL="0">
+            <a:pPr marL="0" indent="0" algn="l">
               <a:buNone/>
             </a:pPr>
             <a:r>
@@ -11639,7 +15653,7 @@
             <a:endParaRPr lang="en-US" sz="1400" dirty="0"/>
           </a:p>
           <a:p>
-            <a:pPr algn="l" indent="0" marL="0">
+            <a:pPr marL="0" indent="0" algn="l">
               <a:buNone/>
             </a:pPr>
             <a:r>
@@ -11683,6 +15697,13 @@
             <a:prstDash val="solid"/>
           </a:ln>
         </p:spPr>
+        <p:txBody>
+          <a:bodyPr/>
+          <a:lstStyle/>
+          <a:p>
+            <a:endParaRPr lang="ko-KR" altLang="en-US"/>
+          </a:p>
+        </p:txBody>
       </p:sp>
       <p:sp>
         <p:nvSpPr>
@@ -11705,6 +15726,13 @@
           </a:solidFill>
           <a:ln/>
         </p:spPr>
+        <p:txBody>
+          <a:bodyPr/>
+          <a:lstStyle/>
+          <a:p>
+            <a:endParaRPr lang="ko-KR" altLang="en-US"/>
+          </a:p>
+        </p:txBody>
       </p:sp>
       <p:sp>
         <p:nvSpPr>
@@ -11727,7 +15755,7 @@
           <a:bodyPr wrap="square" lIns="1016" tIns="1016" rIns="1016" bIns="1016" rtlCol="0" anchor="ctr"/>
           <a:lstStyle/>
           <a:p>
-            <a:pPr algn="ctr" indent="0" marL="0">
+            <a:pPr marL="0" indent="0" algn="ctr">
               <a:buNone/>
             </a:pPr>
             <a:r>
@@ -11744,7 +15772,7 @@
             <a:endParaRPr lang="en-US" sz="1400" dirty="0"/>
           </a:p>
           <a:p>
-            <a:pPr algn="ctr" indent="0" marL="0">
+            <a:pPr marL="0" indent="0" algn="ctr">
               <a:buNone/>
             </a:pPr>
             <a:r>
@@ -11783,7 +15811,7 @@
           <a:bodyPr wrap="square" lIns="0" tIns="0" rIns="0" bIns="0" rtlCol="0" anchor="ctr"/>
           <a:lstStyle/>
           <a:p>
-            <a:pPr algn="l" indent="0" marL="0">
+            <a:pPr marL="0" indent="0" algn="l">
               <a:buNone/>
             </a:pPr>
             <a:r>
@@ -11800,7 +15828,7 @@
             <a:endParaRPr lang="en-US" sz="1400" dirty="0"/>
           </a:p>
           <a:p>
-            <a:pPr algn="l" indent="0" marL="0">
+            <a:pPr marL="0" indent="0" algn="l">
               <a:buNone/>
             </a:pPr>
             <a:r>
@@ -11844,6 +15872,13 @@
             <a:prstDash val="solid"/>
           </a:ln>
         </p:spPr>
+        <p:txBody>
+          <a:bodyPr/>
+          <a:lstStyle/>
+          <a:p>
+            <a:endParaRPr lang="ko-KR" altLang="en-US"/>
+          </a:p>
+        </p:txBody>
       </p:sp>
       <p:sp>
         <p:nvSpPr>
@@ -11866,6 +15901,13 @@
           </a:solidFill>
           <a:ln/>
         </p:spPr>
+        <p:txBody>
+          <a:bodyPr/>
+          <a:lstStyle/>
+          <a:p>
+            <a:endParaRPr lang="ko-KR" altLang="en-US"/>
+          </a:p>
+        </p:txBody>
       </p:sp>
       <p:sp>
         <p:nvSpPr>
@@ -11888,7 +15930,7 @@
           <a:bodyPr wrap="square" lIns="1016" tIns="1016" rIns="1016" bIns="1016" rtlCol="0" anchor="ctr"/>
           <a:lstStyle/>
           <a:p>
-            <a:pPr algn="ctr" indent="0" marL="0">
+            <a:pPr marL="0" indent="0" algn="ctr">
               <a:buNone/>
             </a:pPr>
             <a:r>
@@ -11927,7 +15969,7 @@
           <a:bodyPr wrap="square" lIns="0" tIns="0" rIns="0" bIns="0" rtlCol="0" anchor="ctr"/>
           <a:lstStyle/>
           <a:p>
-            <a:pPr algn="l" indent="0" marL="0">
+            <a:pPr marL="0" indent="0" algn="l">
               <a:buNone/>
             </a:pPr>
             <a:r>
@@ -11944,7 +15986,7 @@
             <a:endParaRPr lang="en-US" sz="1400" dirty="0"/>
           </a:p>
           <a:p>
-            <a:pPr algn="l" indent="0" marL="0">
+            <a:pPr marL="0" indent="0" algn="l">
               <a:buNone/>
             </a:pPr>
             <a:r>
@@ -11988,6 +16030,13 @@
             <a:prstDash val="solid"/>
           </a:ln>
         </p:spPr>
+        <p:txBody>
+          <a:bodyPr/>
+          <a:lstStyle/>
+          <a:p>
+            <a:endParaRPr lang="ko-KR" altLang="en-US"/>
+          </a:p>
+        </p:txBody>
       </p:sp>
       <p:sp>
         <p:nvSpPr>
@@ -12010,6 +16059,13 @@
           </a:solidFill>
           <a:ln/>
         </p:spPr>
+        <p:txBody>
+          <a:bodyPr/>
+          <a:lstStyle/>
+          <a:p>
+            <a:endParaRPr lang="ko-KR" altLang="en-US"/>
+          </a:p>
+        </p:txBody>
       </p:sp>
       <p:sp>
         <p:nvSpPr>
@@ -12032,7 +16088,7 @@
           <a:bodyPr wrap="square" lIns="1016" tIns="1016" rIns="1016" bIns="1016" rtlCol="0" anchor="ctr"/>
           <a:lstStyle/>
           <a:p>
-            <a:pPr algn="ctr" indent="0" marL="0">
+            <a:pPr marL="0" indent="0" algn="ctr">
               <a:buNone/>
             </a:pPr>
             <a:r>
@@ -12049,7 +16105,7 @@
             <a:endParaRPr lang="en-US" sz="1400" dirty="0"/>
           </a:p>
           <a:p>
-            <a:pPr algn="ctr" indent="0" marL="0">
+            <a:pPr marL="0" indent="0" algn="ctr">
               <a:buNone/>
             </a:pPr>
             <a:r>
@@ -12088,7 +16144,7 @@
           <a:bodyPr wrap="square" lIns="0" tIns="0" rIns="0" bIns="0" rtlCol="0" anchor="ctr"/>
           <a:lstStyle/>
           <a:p>
-            <a:pPr algn="l" indent="0" marL="0">
+            <a:pPr marL="0" indent="0" algn="l">
               <a:buNone/>
             </a:pPr>
             <a:r>
@@ -12105,7 +16161,7 @@
             <a:endParaRPr lang="en-US" sz="1400" dirty="0"/>
           </a:p>
           <a:p>
-            <a:pPr algn="l" indent="0" marL="0">
+            <a:pPr marL="0" indent="0" algn="l">
               <a:buNone/>
             </a:pPr>
             <a:r>
@@ -12144,6 +16200,13 @@
           </a:solidFill>
           <a:ln/>
         </p:spPr>
+        <p:txBody>
+          <a:bodyPr/>
+          <a:lstStyle/>
+          <a:p>
+            <a:endParaRPr lang="ko-KR" altLang="en-US"/>
+          </a:p>
+        </p:txBody>
       </p:sp>
       <p:sp>
         <p:nvSpPr>
@@ -12166,7 +16229,7 @@
           <a:bodyPr wrap="square" lIns="1016" tIns="1016" rIns="1016" bIns="1016" rtlCol="0" anchor="ctr"/>
           <a:lstStyle/>
           <a:p>
-            <a:pPr algn="ctr" indent="0" marL="0">
+            <a:pPr marL="0" indent="0" algn="ctr">
               <a:buNone/>
             </a:pPr>
             <a:r>
@@ -12210,6 +16273,13 @@
             <a:prstDash val="solid"/>
           </a:ln>
         </p:spPr>
+        <p:txBody>
+          <a:bodyPr/>
+          <a:lstStyle/>
+          <a:p>
+            <a:endParaRPr lang="ko-KR" altLang="en-US"/>
+          </a:p>
+        </p:txBody>
       </p:sp>
       <p:sp>
         <p:nvSpPr>
@@ -12232,6 +16302,13 @@
           </a:solidFill>
           <a:ln/>
         </p:spPr>
+        <p:txBody>
+          <a:bodyPr/>
+          <a:lstStyle/>
+          <a:p>
+            <a:endParaRPr lang="ko-KR" altLang="en-US"/>
+          </a:p>
+        </p:txBody>
       </p:sp>
       <p:sp>
         <p:nvSpPr>
@@ -12254,7 +16331,7 @@
           <a:bodyPr wrap="square" lIns="1016" tIns="1016" rIns="1016" bIns="1016" rtlCol="0" anchor="ctr"/>
           <a:lstStyle/>
           <a:p>
-            <a:pPr algn="ctr" indent="0" marL="0">
+            <a:pPr marL="0" indent="0" algn="ctr">
               <a:buNone/>
             </a:pPr>
             <a:r>
@@ -12293,7 +16370,7 @@
           <a:bodyPr wrap="square" lIns="0" tIns="0" rIns="0" bIns="0" rtlCol="0" anchor="ctr"/>
           <a:lstStyle/>
           <a:p>
-            <a:pPr algn="l" indent="0" marL="0">
+            <a:pPr marL="0" indent="0" algn="l">
               <a:buNone/>
             </a:pPr>
             <a:r>
@@ -12332,7 +16409,7 @@
           <a:bodyPr wrap="square" lIns="0" tIns="0" rIns="0" bIns="0" rtlCol="0" anchor="ctr"/>
           <a:lstStyle/>
           <a:p>
-            <a:pPr algn="l" indent="0" marL="0">
+            <a:pPr marL="0" indent="0" algn="l">
               <a:buNone/>
             </a:pPr>
             <a:r>
@@ -12371,7 +16448,7 @@
           <a:bodyPr wrap="square" lIns="0" tIns="0" rIns="0" bIns="0" rtlCol="0" anchor="ctr"/>
           <a:lstStyle/>
           <a:p>
-            <a:pPr algn="l" indent="0" marL="0">
+            <a:pPr marL="0" indent="0" algn="l">
               <a:buNone/>
             </a:pPr>
             <a:r>
@@ -12415,6 +16492,13 @@
             <a:prstDash val="solid"/>
           </a:ln>
         </p:spPr>
+        <p:txBody>
+          <a:bodyPr/>
+          <a:lstStyle/>
+          <a:p>
+            <a:endParaRPr lang="ko-KR" altLang="en-US"/>
+          </a:p>
+        </p:txBody>
       </p:sp>
       <p:sp>
         <p:nvSpPr>
@@ -12437,6 +16521,13 @@
           </a:solidFill>
           <a:ln/>
         </p:spPr>
+        <p:txBody>
+          <a:bodyPr/>
+          <a:lstStyle/>
+          <a:p>
+            <a:endParaRPr lang="ko-KR" altLang="en-US"/>
+          </a:p>
+        </p:txBody>
       </p:sp>
       <p:sp>
         <p:nvSpPr>
@@ -12459,7 +16550,7 @@
           <a:bodyPr wrap="square" lIns="1016" tIns="1016" rIns="1016" bIns="1016" rtlCol="0" anchor="ctr"/>
           <a:lstStyle/>
           <a:p>
-            <a:pPr algn="ctr" indent="0" marL="0">
+            <a:pPr marL="0" indent="0" algn="ctr">
               <a:buNone/>
             </a:pPr>
             <a:r>
@@ -12498,7 +16589,7 @@
           <a:bodyPr wrap="square" lIns="0" tIns="0" rIns="0" bIns="0" rtlCol="0" anchor="ctr"/>
           <a:lstStyle/>
           <a:p>
-            <a:pPr algn="l" indent="0" marL="0">
+            <a:pPr marL="0" indent="0" algn="l">
               <a:buNone/>
             </a:pPr>
             <a:r>
@@ -12537,7 +16628,7 @@
           <a:bodyPr wrap="square" lIns="0" tIns="0" rIns="0" bIns="0" rtlCol="0" anchor="ctr"/>
           <a:lstStyle/>
           <a:p>
-            <a:pPr algn="l" indent="0" marL="0">
+            <a:pPr marL="0" indent="0" algn="l">
               <a:buNone/>
             </a:pPr>
             <a:r>
@@ -12576,7 +16667,7 @@
           <a:bodyPr wrap="square" lIns="0" tIns="0" rIns="0" bIns="0" rtlCol="0" anchor="ctr"/>
           <a:lstStyle/>
           <a:p>
-            <a:pPr algn="l" indent="0" marL="0">
+            <a:pPr marL="0" indent="0" algn="l">
               <a:buNone/>
             </a:pPr>
             <a:r>
@@ -12620,6 +16711,13 @@
             <a:prstDash val="solid"/>
           </a:ln>
         </p:spPr>
+        <p:txBody>
+          <a:bodyPr/>
+          <a:lstStyle/>
+          <a:p>
+            <a:endParaRPr lang="ko-KR" altLang="en-US"/>
+          </a:p>
+        </p:txBody>
       </p:sp>
       <p:sp>
         <p:nvSpPr>
@@ -12642,6 +16740,13 @@
           </a:solidFill>
           <a:ln/>
         </p:spPr>
+        <p:txBody>
+          <a:bodyPr/>
+          <a:lstStyle/>
+          <a:p>
+            <a:endParaRPr lang="ko-KR" altLang="en-US"/>
+          </a:p>
+        </p:txBody>
       </p:sp>
       <p:sp>
         <p:nvSpPr>
@@ -12664,7 +16769,7 @@
           <a:bodyPr wrap="square" lIns="1016" tIns="1016" rIns="1016" bIns="1016" rtlCol="0" anchor="ctr"/>
           <a:lstStyle/>
           <a:p>
-            <a:pPr algn="ctr" indent="0" marL="0">
+            <a:pPr marL="0" indent="0" algn="ctr">
               <a:buNone/>
             </a:pPr>
             <a:r>
@@ -12703,7 +16808,7 @@
           <a:bodyPr wrap="square" lIns="0" tIns="0" rIns="0" bIns="0" rtlCol="0" anchor="ctr"/>
           <a:lstStyle/>
           <a:p>
-            <a:pPr algn="l" indent="0" marL="0">
+            <a:pPr marL="0" indent="0" algn="l">
               <a:buNone/>
             </a:pPr>
             <a:r>
@@ -12742,7 +16847,7 @@
           <a:bodyPr wrap="square" lIns="0" tIns="0" rIns="0" bIns="0" rtlCol="0" anchor="ctr"/>
           <a:lstStyle/>
           <a:p>
-            <a:pPr algn="l" indent="0" marL="0">
+            <a:pPr marL="0" indent="0" algn="l">
               <a:buNone/>
             </a:pPr>
             <a:r>
@@ -12781,7 +16886,7 @@
           <a:bodyPr wrap="square" lIns="0" tIns="0" rIns="0" bIns="0" rtlCol="0" anchor="ctr"/>
           <a:lstStyle/>
           <a:p>
-            <a:pPr algn="l" indent="0" marL="0">
+            <a:pPr marL="0" indent="0" algn="l">
               <a:buNone/>
             </a:pPr>
             <a:r>
@@ -12825,6 +16930,13 @@
             <a:prstDash val="solid"/>
           </a:ln>
         </p:spPr>
+        <p:txBody>
+          <a:bodyPr/>
+          <a:lstStyle/>
+          <a:p>
+            <a:endParaRPr lang="ko-KR" altLang="en-US"/>
+          </a:p>
+        </p:txBody>
       </p:sp>
       <p:sp>
         <p:nvSpPr>
@@ -12847,6 +16959,13 @@
           </a:solidFill>
           <a:ln/>
         </p:spPr>
+        <p:txBody>
+          <a:bodyPr/>
+          <a:lstStyle/>
+          <a:p>
+            <a:endParaRPr lang="ko-KR" altLang="en-US"/>
+          </a:p>
+        </p:txBody>
       </p:sp>
       <p:sp>
         <p:nvSpPr>
@@ -12869,7 +16988,7 @@
           <a:bodyPr wrap="square" lIns="1016" tIns="1016" rIns="1016" bIns="1016" rtlCol="0" anchor="ctr"/>
           <a:lstStyle/>
           <a:p>
-            <a:pPr algn="ctr" indent="0" marL="0">
+            <a:pPr marL="0" indent="0" algn="ctr">
               <a:buNone/>
             </a:pPr>
             <a:r>
@@ -12908,7 +17027,7 @@
           <a:bodyPr wrap="square" lIns="0" tIns="0" rIns="0" bIns="0" rtlCol="0" anchor="ctr"/>
           <a:lstStyle/>
           <a:p>
-            <a:pPr algn="l" indent="0" marL="0">
+            <a:pPr marL="0" indent="0" algn="l">
               <a:buNone/>
             </a:pPr>
             <a:r>
@@ -12925,7 +17044,7 @@
             <a:endParaRPr lang="en-US" sz="1400" dirty="0"/>
           </a:p>
           <a:p>
-            <a:pPr algn="l" indent="0" marL="0">
+            <a:pPr marL="0" indent="0" algn="l">
               <a:buNone/>
             </a:pPr>
             <a:r>
@@ -12969,6 +17088,13 @@
             <a:prstDash val="solid"/>
           </a:ln>
         </p:spPr>
+        <p:txBody>
+          <a:bodyPr/>
+          <a:lstStyle/>
+          <a:p>
+            <a:endParaRPr lang="ko-KR" altLang="en-US"/>
+          </a:p>
+        </p:txBody>
       </p:sp>
       <p:sp>
         <p:nvSpPr>
@@ -12991,6 +17117,13 @@
           </a:solidFill>
           <a:ln/>
         </p:spPr>
+        <p:txBody>
+          <a:bodyPr/>
+          <a:lstStyle/>
+          <a:p>
+            <a:endParaRPr lang="ko-KR" altLang="en-US"/>
+          </a:p>
+        </p:txBody>
       </p:sp>
       <p:sp>
         <p:nvSpPr>
@@ -13013,7 +17146,7 @@
           <a:bodyPr wrap="square" lIns="1016" tIns="1016" rIns="1016" bIns="1016" rtlCol="0" anchor="ctr"/>
           <a:lstStyle/>
           <a:p>
-            <a:pPr algn="ctr" indent="0" marL="0">
+            <a:pPr marL="0" indent="0" algn="ctr">
               <a:buNone/>
             </a:pPr>
             <a:r>
@@ -13052,7 +17185,7 @@
           <a:bodyPr wrap="square" lIns="0" tIns="0" rIns="0" bIns="0" rtlCol="0" anchor="ctr"/>
           <a:lstStyle/>
           <a:p>
-            <a:pPr algn="l" indent="0" marL="0">
+            <a:pPr marL="0" indent="0" algn="l">
               <a:buNone/>
             </a:pPr>
             <a:r>
@@ -13069,7 +17202,7 @@
             <a:endParaRPr lang="en-US" sz="1400" dirty="0"/>
           </a:p>
           <a:p>
-            <a:pPr algn="l" indent="0" marL="0">
+            <a:pPr marL="0" indent="0" algn="l">
               <a:buNone/>
             </a:pPr>
             <a:r>
@@ -13113,6 +17246,13 @@
             <a:prstDash val="solid"/>
           </a:ln>
         </p:spPr>
+        <p:txBody>
+          <a:bodyPr/>
+          <a:lstStyle/>
+          <a:p>
+            <a:endParaRPr lang="ko-KR" altLang="en-US"/>
+          </a:p>
+        </p:txBody>
       </p:sp>
       <p:sp>
         <p:nvSpPr>
@@ -13135,6 +17275,13 @@
           </a:solidFill>
           <a:ln/>
         </p:spPr>
+        <p:txBody>
+          <a:bodyPr/>
+          <a:lstStyle/>
+          <a:p>
+            <a:endParaRPr lang="ko-KR" altLang="en-US"/>
+          </a:p>
+        </p:txBody>
       </p:sp>
       <p:sp>
         <p:nvSpPr>
@@ -13157,7 +17304,7 @@
           <a:bodyPr wrap="square" lIns="1016" tIns="1016" rIns="1016" bIns="1016" rtlCol="0" anchor="ctr"/>
           <a:lstStyle/>
           <a:p>
-            <a:pPr algn="ctr" indent="0" marL="0">
+            <a:pPr marL="0" indent="0" algn="ctr">
               <a:buNone/>
             </a:pPr>
             <a:r>
@@ -13196,7 +17343,7 @@
           <a:bodyPr wrap="square" lIns="0" tIns="0" rIns="0" bIns="0" rtlCol="0" anchor="ctr"/>
           <a:lstStyle/>
           <a:p>
-            <a:pPr algn="l" indent="0" marL="0">
+            <a:pPr marL="0" indent="0" algn="l">
               <a:buNone/>
             </a:pPr>
             <a:r>
@@ -13213,7 +17360,7 @@
             <a:endParaRPr lang="en-US" sz="1400" dirty="0"/>
           </a:p>
           <a:p>
-            <a:pPr algn="l" indent="0" marL="0">
+            <a:pPr marL="0" indent="0" algn="l">
               <a:buNone/>
             </a:pPr>
             <a:r>
@@ -13257,6 +17404,13 @@
             <a:prstDash val="solid"/>
           </a:ln>
         </p:spPr>
+        <p:txBody>
+          <a:bodyPr/>
+          <a:lstStyle/>
+          <a:p>
+            <a:endParaRPr lang="ko-KR" altLang="en-US"/>
+          </a:p>
+        </p:txBody>
       </p:sp>
       <p:sp>
         <p:nvSpPr>
@@ -13279,6 +17433,13 @@
           </a:solidFill>
           <a:ln/>
         </p:spPr>
+        <p:txBody>
+          <a:bodyPr/>
+          <a:lstStyle/>
+          <a:p>
+            <a:endParaRPr lang="ko-KR" altLang="en-US"/>
+          </a:p>
+        </p:txBody>
       </p:sp>
       <p:sp>
         <p:nvSpPr>
@@ -13301,7 +17462,7 @@
           <a:bodyPr wrap="square" lIns="1016" tIns="1016" rIns="1016" bIns="1016" rtlCol="0" anchor="ctr"/>
           <a:lstStyle/>
           <a:p>
-            <a:pPr algn="ctr" indent="0" marL="0">
+            <a:pPr marL="0" indent="0" algn="ctr">
               <a:buNone/>
             </a:pPr>
             <a:r>
@@ -13340,7 +17501,7 @@
           <a:bodyPr wrap="square" lIns="0" tIns="0" rIns="0" bIns="0" rtlCol="0" anchor="ctr"/>
           <a:lstStyle/>
           <a:p>
-            <a:pPr algn="l" indent="0" marL="0">
+            <a:pPr marL="0" indent="0" algn="l">
               <a:buNone/>
             </a:pPr>
             <a:r>
@@ -13357,7 +17518,7 @@
             <a:endParaRPr lang="en-US" sz="1400" dirty="0"/>
           </a:p>
           <a:p>
-            <a:pPr algn="l" indent="0" marL="0">
+            <a:pPr marL="0" indent="0" algn="l">
               <a:buNone/>
             </a:pPr>
             <a:r>
@@ -13377,7 +17538,7 @@
       </p:sp>
       <p:sp>
         <p:nvSpPr>
-          <p:cNvPr id="25" name="Slide Number Placeholder 0"/>
+          <p:cNvPr id="4" name="Slide Number Placeholder 0"/>
           <p:cNvSpPr>
             <a:spLocks noGrp="1"/>
           </p:cNvSpPr>
@@ -13395,7 +17556,7 @@
           </a:prstGeom>
           <a:extLst>
             <a:ext uri="{C572A759-6A51-4108-AA02-DFA0A04FC94B}">
-              <ma14:wrappingTextBoxFlag xmlns:ma14="http://schemas.microsoft.com/office/mac/drawingml/2011/main" val="0"/>
+              <ma14:wrappingTextBoxFlag xmlns="" xmlns:ma14="http://schemas.microsoft.com/office/mac/drawingml/2011/main" val="0"/>
             </a:ext>
           </a:extLst>
         </p:spPr>
@@ -13416,8 +17577,8 @@
           <a:p>
             <a:pPr algn="r"/>
             <a:fld id="{F7021451-1387-4CA6-816F-3879F97B5CBC}" type="slidenum">
-              <a:rPr b="0" lang="en-US"/>
-              <a:t>4</a:t>
+              <a:rPr lang="en-US" b="0"/>
+              <a:t>5</a:t>
             </a:fld>
             <a:endParaRPr lang="en-US"/>
           </a:p>
@@ -13724,4 +17885,319 @@
     </a:ext>
   </a:extLst>
 </a:theme>
+</file>
+
+<file path=ppt/theme/theme2.xml><?xml version="1.0" encoding="utf-8"?>
+<a:theme xmlns:a="http://schemas.openxmlformats.org/drawingml/2006/main" name="Office 테마">
+  <a:themeElements>
+    <a:clrScheme name="Office">
+      <a:dk1>
+        <a:sysClr val="windowText" lastClr="000000"/>
+      </a:dk1>
+      <a:lt1>
+        <a:sysClr val="window" lastClr="FFFFFF"/>
+      </a:lt1>
+      <a:dk2>
+        <a:srgbClr val="0E2841"/>
+      </a:dk2>
+      <a:lt2>
+        <a:srgbClr val="E8E8E8"/>
+      </a:lt2>
+      <a:accent1>
+        <a:srgbClr val="156082"/>
+      </a:accent1>
+      <a:accent2>
+        <a:srgbClr val="E97132"/>
+      </a:accent2>
+      <a:accent3>
+        <a:srgbClr val="196B24"/>
+      </a:accent3>
+      <a:accent4>
+        <a:srgbClr val="0F9ED5"/>
+      </a:accent4>
+      <a:accent5>
+        <a:srgbClr val="A02B93"/>
+      </a:accent5>
+      <a:accent6>
+        <a:srgbClr val="4EA72E"/>
+      </a:accent6>
+      <a:hlink>
+        <a:srgbClr val="467886"/>
+      </a:hlink>
+      <a:folHlink>
+        <a:srgbClr val="96607D"/>
+      </a:folHlink>
+    </a:clrScheme>
+    <a:fontScheme name="Office">
+      <a:majorFont>
+        <a:latin typeface="맑은 고딕" panose="02110004020202020204"/>
+        <a:ea typeface=""/>
+        <a:cs typeface=""/>
+        <a:font script="Jpan" typeface="游ゴシック Light"/>
+        <a:font script="Hang" typeface="맑은 고딕"/>
+        <a:font script="Hans" typeface="等线 Light"/>
+        <a:font script="Hant" typeface="新細明體"/>
+        <a:font script="Arab" typeface="Times New Roman"/>
+        <a:font script="Hebr" typeface="Times New Roman"/>
+        <a:font script="Thai" typeface="Angsana New"/>
+        <a:font script="Ethi" typeface="Nyala"/>
+        <a:font script="Beng" typeface="Vrinda"/>
+        <a:font script="Gujr" typeface="Shruti"/>
+        <a:font script="Khmr" typeface="MoolBoran"/>
+        <a:font script="Knda" typeface="Tunga"/>
+        <a:font script="Guru" typeface="Raavi"/>
+        <a:font script="Cans" typeface="Euphemia"/>
+        <a:font script="Cher" typeface="Plantagenet Cherokee"/>
+        <a:font script="Yiii" typeface="Microsoft Yi Baiti"/>
+        <a:font script="Tibt" typeface="Microsoft Himalaya"/>
+        <a:font script="Thaa" typeface="MV Boli"/>
+        <a:font script="Deva" typeface="Mangal"/>
+        <a:font script="Telu" typeface="Gautami"/>
+        <a:font script="Taml" typeface="Latha"/>
+        <a:font script="Syrc" typeface="Estrangelo Edessa"/>
+        <a:font script="Orya" typeface="Kalinga"/>
+        <a:font script="Mlym" typeface="Kartika"/>
+        <a:font script="Laoo" typeface="DokChampa"/>
+        <a:font script="Sinh" typeface="Iskoola Pota"/>
+        <a:font script="Mong" typeface="Mongolian Baiti"/>
+        <a:font script="Viet" typeface="Times New Roman"/>
+        <a:font script="Uigh" typeface="Microsoft Uighur"/>
+        <a:font script="Geor" typeface="Sylfaen"/>
+        <a:font script="Armn" typeface="Arial"/>
+        <a:font script="Bugi" typeface="Leelawadee UI"/>
+        <a:font script="Bopo" typeface="Microsoft JhengHei"/>
+        <a:font script="Java" typeface="Javanese Text"/>
+        <a:font script="Lisu" typeface="Segoe UI"/>
+        <a:font script="Mymr" typeface="Myanmar Text"/>
+        <a:font script="Nkoo" typeface="Ebrima"/>
+        <a:font script="Olck" typeface="Nirmala UI"/>
+        <a:font script="Osma" typeface="Ebrima"/>
+        <a:font script="Phag" typeface="Phagspa"/>
+        <a:font script="Syrn" typeface="Estrangelo Edessa"/>
+        <a:font script="Syrj" typeface="Estrangelo Edessa"/>
+        <a:font script="Syre" typeface="Estrangelo Edessa"/>
+        <a:font script="Sora" typeface="Nirmala UI"/>
+        <a:font script="Tale" typeface="Microsoft Tai Le"/>
+        <a:font script="Talu" typeface="Microsoft New Tai Lue"/>
+        <a:font script="Tfng" typeface="Ebrima"/>
+      </a:majorFont>
+      <a:minorFont>
+        <a:latin typeface="맑은 고딕" panose="02110004020202020204"/>
+        <a:ea typeface=""/>
+        <a:cs typeface=""/>
+        <a:font script="Jpan" typeface="游ゴシック"/>
+        <a:font script="Hang" typeface="맑은 고딕"/>
+        <a:font script="Hans" typeface="等线"/>
+        <a:font script="Hant" typeface="新細明體"/>
+        <a:font script="Arab" typeface="Arial"/>
+        <a:font script="Hebr" typeface="Arial"/>
+        <a:font script="Thai" typeface="Cordia New"/>
+        <a:font script="Ethi" typeface="Nyala"/>
+        <a:font script="Beng" typeface="Vrinda"/>
+        <a:font script="Gujr" typeface="Shruti"/>
+        <a:font script="Khmr" typeface="DaunPenh"/>
+        <a:font script="Knda" typeface="Tunga"/>
+        <a:font script="Guru" typeface="Raavi"/>
+        <a:font script="Cans" typeface="Euphemia"/>
+        <a:font script="Cher" typeface="Plantagenet Cherokee"/>
+        <a:font script="Yiii" typeface="Microsoft Yi Baiti"/>
+        <a:font script="Tibt" typeface="Microsoft Himalaya"/>
+        <a:font script="Thaa" typeface="MV Boli"/>
+        <a:font script="Deva" typeface="Mangal"/>
+        <a:font script="Telu" typeface="Gautami"/>
+        <a:font script="Taml" typeface="Latha"/>
+        <a:font script="Syrc" typeface="Estrangelo Edessa"/>
+        <a:font script="Orya" typeface="Kalinga"/>
+        <a:font script="Mlym" typeface="Kartika"/>
+        <a:font script="Laoo" typeface="DokChampa"/>
+        <a:font script="Sinh" typeface="Iskoola Pota"/>
+        <a:font script="Mong" typeface="Mongolian Baiti"/>
+        <a:font script="Viet" typeface="Arial"/>
+        <a:font script="Uigh" typeface="Microsoft Uighur"/>
+        <a:font script="Geor" typeface="Sylfaen"/>
+        <a:font script="Armn" typeface="Arial"/>
+        <a:font script="Bugi" typeface="Leelawadee UI"/>
+        <a:font script="Bopo" typeface="Microsoft JhengHei"/>
+        <a:font script="Java" typeface="Javanese Text"/>
+        <a:font script="Lisu" typeface="Segoe UI"/>
+        <a:font script="Mymr" typeface="Myanmar Text"/>
+        <a:font script="Nkoo" typeface="Ebrima"/>
+        <a:font script="Olck" typeface="Nirmala UI"/>
+        <a:font script="Osma" typeface="Ebrima"/>
+        <a:font script="Phag" typeface="Phagspa"/>
+        <a:font script="Syrn" typeface="Estrangelo Edessa"/>
+        <a:font script="Syrj" typeface="Estrangelo Edessa"/>
+        <a:font script="Syre" typeface="Estrangelo Edessa"/>
+        <a:font script="Sora" typeface="Nirmala UI"/>
+        <a:font script="Tale" typeface="Microsoft Tai Le"/>
+        <a:font script="Talu" typeface="Microsoft New Tai Lue"/>
+        <a:font script="Tfng" typeface="Ebrima"/>
+      </a:minorFont>
+    </a:fontScheme>
+    <a:fmtScheme name="Office">
+      <a:fillStyleLst>
+        <a:solidFill>
+          <a:schemeClr val="phClr"/>
+        </a:solidFill>
+        <a:gradFill rotWithShape="1">
+          <a:gsLst>
+            <a:gs pos="0">
+              <a:schemeClr val="phClr">
+                <a:lumMod val="110000"/>
+                <a:satMod val="105000"/>
+                <a:tint val="67000"/>
+              </a:schemeClr>
+            </a:gs>
+            <a:gs pos="50000">
+              <a:schemeClr val="phClr">
+                <a:lumMod val="105000"/>
+                <a:satMod val="103000"/>
+                <a:tint val="73000"/>
+              </a:schemeClr>
+            </a:gs>
+            <a:gs pos="100000">
+              <a:schemeClr val="phClr">
+                <a:lumMod val="105000"/>
+                <a:satMod val="109000"/>
+                <a:tint val="81000"/>
+              </a:schemeClr>
+            </a:gs>
+          </a:gsLst>
+          <a:lin ang="5400000" scaled="0"/>
+        </a:gradFill>
+        <a:gradFill rotWithShape="1">
+          <a:gsLst>
+            <a:gs pos="0">
+              <a:schemeClr val="phClr">
+                <a:satMod val="103000"/>
+                <a:lumMod val="102000"/>
+                <a:tint val="94000"/>
+              </a:schemeClr>
+            </a:gs>
+            <a:gs pos="50000">
+              <a:schemeClr val="phClr">
+                <a:satMod val="110000"/>
+                <a:lumMod val="100000"/>
+                <a:shade val="100000"/>
+              </a:schemeClr>
+            </a:gs>
+            <a:gs pos="100000">
+              <a:schemeClr val="phClr">
+                <a:lumMod val="99000"/>
+                <a:satMod val="120000"/>
+                <a:shade val="78000"/>
+              </a:schemeClr>
+            </a:gs>
+          </a:gsLst>
+          <a:lin ang="5400000" scaled="0"/>
+        </a:gradFill>
+      </a:fillStyleLst>
+      <a:lnStyleLst>
+        <a:ln w="12700" cap="flat" cmpd="sng" algn="ctr">
+          <a:solidFill>
+            <a:schemeClr val="phClr"/>
+          </a:solidFill>
+          <a:prstDash val="solid"/>
+          <a:miter lim="800000"/>
+        </a:ln>
+        <a:ln w="19050" cap="flat" cmpd="sng" algn="ctr">
+          <a:solidFill>
+            <a:schemeClr val="phClr"/>
+          </a:solidFill>
+          <a:prstDash val="solid"/>
+          <a:miter lim="800000"/>
+        </a:ln>
+        <a:ln w="25400" cap="flat" cmpd="sng" algn="ctr">
+          <a:solidFill>
+            <a:schemeClr val="phClr"/>
+          </a:solidFill>
+          <a:prstDash val="solid"/>
+          <a:miter lim="800000"/>
+        </a:ln>
+      </a:lnStyleLst>
+      <a:effectStyleLst>
+        <a:effectStyle>
+          <a:effectLst/>
+        </a:effectStyle>
+        <a:effectStyle>
+          <a:effectLst/>
+        </a:effectStyle>
+        <a:effectStyle>
+          <a:effectLst>
+            <a:outerShdw blurRad="57150" dist="19050" dir="5400000" algn="ctr" rotWithShape="0">
+              <a:srgbClr val="000000">
+                <a:alpha val="63000"/>
+              </a:srgbClr>
+            </a:outerShdw>
+          </a:effectLst>
+        </a:effectStyle>
+      </a:effectStyleLst>
+      <a:bgFillStyleLst>
+        <a:solidFill>
+          <a:schemeClr val="phClr"/>
+        </a:solidFill>
+        <a:solidFill>
+          <a:schemeClr val="phClr">
+            <a:tint val="95000"/>
+            <a:satMod val="170000"/>
+          </a:schemeClr>
+        </a:solidFill>
+        <a:gradFill rotWithShape="1">
+          <a:gsLst>
+            <a:gs pos="0">
+              <a:schemeClr val="phClr">
+                <a:tint val="93000"/>
+                <a:satMod val="150000"/>
+                <a:shade val="98000"/>
+                <a:lumMod val="102000"/>
+              </a:schemeClr>
+            </a:gs>
+            <a:gs pos="50000">
+              <a:schemeClr val="phClr">
+                <a:tint val="98000"/>
+                <a:satMod val="130000"/>
+                <a:shade val="90000"/>
+                <a:lumMod val="103000"/>
+              </a:schemeClr>
+            </a:gs>
+            <a:gs pos="100000">
+              <a:schemeClr val="phClr">
+                <a:shade val="63000"/>
+                <a:satMod val="120000"/>
+              </a:schemeClr>
+            </a:gs>
+          </a:gsLst>
+          <a:lin ang="5400000" scaled="0"/>
+        </a:gradFill>
+      </a:bgFillStyleLst>
+    </a:fmtScheme>
+  </a:themeElements>
+  <a:objectDefaults>
+    <a:lnDef>
+      <a:spPr/>
+      <a:bodyPr/>
+      <a:lstStyle/>
+      <a:style>
+        <a:lnRef idx="2">
+          <a:schemeClr val="accent1"/>
+        </a:lnRef>
+        <a:fillRef idx="0">
+          <a:schemeClr val="accent1"/>
+        </a:fillRef>
+        <a:effectRef idx="1">
+          <a:schemeClr val="accent1"/>
+        </a:effectRef>
+        <a:fontRef idx="minor">
+          <a:schemeClr val="tx1"/>
+        </a:fontRef>
+      </a:style>
+    </a:lnDef>
+  </a:objectDefaults>
+  <a:extraClrSchemeLst/>
+  <a:extLst>
+    <a:ext uri="{05A4C25C-085E-4340-85A3-A5531E510DB2}">
+      <thm15:themeFamily xmlns:thm15="http://schemas.microsoft.com/office/thememl/2012/main" name="Office Theme" id="{2E142A2C-CD16-42D6-873A-C26D2A0506FA}" vid="{1BDDFF52-6CD6-40A5-AB3C-68EB2F1E4D0A}"/>
+    </a:ext>
+  </a:extLst>
+</a:theme>
 </file>